--- a/Adflow-ITS-Review.pptx
+++ b/Adflow-ITS-Review.pptx
@@ -2206,7 +2206,7 @@
                 <a:ea typeface="Calibri" pitchFamily="34" charset="-122"/>
                 <a:cs typeface="Calibri" pitchFamily="34" charset="-120"/>
               </a:rPr>
-              <a:t>Version 0.60.1  ·  Local edition  ·  September 2026</a:t>
+              <a:t>Version 0.61.1  ·  Local edition  ·  September 2026</a:t>
             </a:r>
             <a:endParaRPr lang="en-US" sz="1100" dirty="0"/>
           </a:p>
@@ -3470,7 +3470,7 @@
                 <a:ea typeface="Calibri" pitchFamily="34" charset="-122"/>
                 <a:cs typeface="Calibri" pitchFamily="34" charset="-120"/>
               </a:rPr>
-              <a:t>Adflow  ·  v0.60.1  ·  ITS review</a:t>
+              <a:t>Adflow  ·  v0.61.1  ·  ITS review</a:t>
             </a:r>
             <a:endParaRPr lang="en-US" sz="900" dirty="0"/>
           </a:p>
@@ -3817,7 +3817,7 @@
                 <a:ea typeface="Calibri" pitchFamily="34" charset="-122"/>
                 <a:cs typeface="Calibri" pitchFamily="34" charset="-120"/>
               </a:rPr>
-              <a:t>The repository is ready to scan today: unminified, dependency-free at runtime, with published checksums.</a:t>
+              <a:t>Ready to scan today: unminified, dependency-free at runtime, with published checksums. Ready to run: docker compose up -d --build.</a:t>
             </a:r>
             <a:endParaRPr lang="en-US" sz="1250" dirty="0"/>
           </a:p>
@@ -4263,7 +4263,7 @@
                 <a:ea typeface="Calibri" pitchFamily="34" charset="-122"/>
                 <a:cs typeface="Calibri" pitchFamily="34" charset="-120"/>
               </a:rPr>
-              <a:t>Adflow  ·  v0.60.1  ·  ITS review</a:t>
+              <a:t>Adflow  ·  v0.61.1  ·  ITS review</a:t>
             </a:r>
             <a:endParaRPr lang="en-US" sz="900" dirty="0"/>
           </a:p>
@@ -5033,7 +5033,7 @@
                 <a:ea typeface="Calibri" pitchFamily="34" charset="-122"/>
                 <a:cs typeface="Calibri" pitchFamily="34" charset="-120"/>
               </a:rPr>
-              <a:t>Adflow  ·  v0.60.1  ·  ITS review</a:t>
+              <a:t>Adflow  ·  v0.61.1  ·  ITS review</a:t>
             </a:r>
             <a:endParaRPr lang="en-US" sz="900" dirty="0"/>
           </a:p>
@@ -5632,7 +5632,7 @@
                 <a:ea typeface="Cambria" pitchFamily="34" charset="-122"/>
                 <a:cs typeface="Cambria" pitchFamily="34" charset="-120"/>
               </a:rPr>
-              <a:t>56k</a:t>
+              <a:t>55k</a:t>
             </a:r>
             <a:endParaRPr lang="en-US" sz="4600" dirty="0"/>
           </a:p>
@@ -5865,7 +5865,7 @@
                 <a:ea typeface="Calibri" pitchFamily="34" charset="-122"/>
                 <a:cs typeface="Calibri" pitchFamily="34" charset="-120"/>
               </a:rPr>
-              <a:t>Adflow  ·  v0.60.1  ·  ITS review</a:t>
+              <a:t>Adflow  ·  v0.61.1  ·  ITS review</a:t>
             </a:r>
             <a:endParaRPr lang="en-US" sz="900" dirty="0"/>
           </a:p>
@@ -6788,7 +6788,7 @@
                 <a:ea typeface="Calibri" pitchFamily="34" charset="-122"/>
                 <a:cs typeface="Calibri" pitchFamily="34" charset="-120"/>
               </a:rPr>
-              <a:t>Adflow  ·  v0.60.1  ·  ITS review</a:t>
+              <a:t>Adflow  ·  v0.61.1  ·  ITS review</a:t>
             </a:r>
             <a:endParaRPr lang="en-US" sz="900" dirty="0"/>
           </a:p>
@@ -7822,7 +7822,7 @@
                 <a:ea typeface="Calibri" pitchFamily="34" charset="-122"/>
                 <a:cs typeface="Calibri" pitchFamily="34" charset="-120"/>
               </a:rPr>
-              <a:t>Adflow  ·  v0.60.1  ·  ITS review</a:t>
+              <a:t>Adflow  ·  v0.61.1  ·  ITS review</a:t>
             </a:r>
             <a:endParaRPr lang="en-US" sz="900" dirty="0"/>
           </a:p>
@@ -8946,7 +8946,7 @@
                 <a:ea typeface="Calibri" pitchFamily="34" charset="-122"/>
                 <a:cs typeface="Calibri" pitchFamily="34" charset="-120"/>
               </a:rPr>
-              <a:t>Adflow  ·  v0.60.1  ·  ITS review</a:t>
+              <a:t>Adflow  ·  v0.61.1  ·  ITS review</a:t>
             </a:r>
             <a:endParaRPr lang="en-US" sz="900" dirty="0"/>
           </a:p>
@@ -9455,7 +9455,7 @@
                 <a:ea typeface="Calibri" pitchFamily="34" charset="-122"/>
                 <a:cs typeface="Calibri" pitchFamily="34" charset="-120"/>
               </a:rPr>
-              <a:t>Adflow  ·  v0.60.1  ·  ITS review</a:t>
+              <a:t>Adflow  ·  v0.61.1  ·  ITS review</a:t>
             </a:r>
             <a:endParaRPr lang="en-US" sz="900" dirty="0"/>
           </a:p>
@@ -11541,7 +11541,7 @@
                 <a:ea typeface="Calibri" pitchFamily="34" charset="-122"/>
                 <a:cs typeface="Calibri" pitchFamily="34" charset="-120"/>
               </a:rPr>
-              <a:t>Adflow  ·  v0.60.1  ·  ITS review</a:t>
+              <a:t>Adflow  ·  v0.61.1  ·  ITS review</a:t>
             </a:r>
             <a:endParaRPr lang="en-US" sz="900" dirty="0"/>
           </a:p>
@@ -12080,7 +12080,7 @@
                 <a:ea typeface="Calibri" pitchFamily="34" charset="-122"/>
                 <a:cs typeface="Calibri" pitchFamily="34" charset="-120"/>
               </a:rPr>
-              <a:t>Adflow  ·  v0.60.1  ·  ITS review</a:t>
+              <a:t>Adflow  ·  v0.61.1  ·  ITS review</a:t>
             </a:r>
             <a:endParaRPr lang="en-US" sz="900" dirty="0"/>
           </a:p>

--- a/Adflow-ITS-Review.pptx
+++ b/Adflow-ITS-Review.pptx
@@ -4,22 +4,21 @@
   <p:sldMasterIdLst>
     <p:sldMasterId id="2147483648" r:id="rId1"/>
   </p:sldMasterIdLst>
+  <p:notesMasterIdLst>
+    <p:notesMasterId r:id="rId12"/>
+  </p:notesMasterIdLst>
   <p:sldIdLst>
     <p:sldId id="256" r:id="rId2"/>
     <p:sldId id="257" r:id="rId3"/>
-    <p:sldId id="258" r:id="rId4"/>
-    <p:sldId id="259" r:id="rId5"/>
-    <p:sldId id="260" r:id="rId6"/>
-    <p:sldId id="261" r:id="rId7"/>
-    <p:sldId id="262" r:id="rId8"/>
-    <p:sldId id="263" r:id="rId9"/>
-    <p:sldId id="264" r:id="rId10"/>
-    <p:sldId id="265" r:id="rId11"/>
-    <p:sldId id="266" r:id="rId12"/>
+    <p:sldId id="259" r:id="rId4"/>
+    <p:sldId id="260" r:id="rId5"/>
+    <p:sldId id="261" r:id="rId6"/>
+    <p:sldId id="262" r:id="rId7"/>
+    <p:sldId id="263" r:id="rId8"/>
+    <p:sldId id="264" r:id="rId9"/>
+    <p:sldId id="265" r:id="rId10"/>
+    <p:sldId id="267" r:id="rId11"/>
   </p:sldIdLst>
-  <p:notesMasterIdLst>
-    <p:notesMasterId r:id="rId13"/>
-  </p:notesMasterIdLst>
   <p:sldSz cx="12192000" cy="6858000"/>
   <p:notesSz cx="6858000" cy="12192000"/>
   <p:defaultTextStyle>
@@ -114,13 +113,20 @@
       </a:defRPr>
     </a:lvl9pPr>
   </p:defaultTextStyle>
+  <p:extLst>
+    <p:ext uri="{EFAFB233-063F-42B5-8137-9DF3F51BA10A}">
+      <p15:sldGuideLst xmlns:p15="http://schemas.microsoft.com/office/powerpoint/2012/main"/>
+    </p:ext>
+  </p:extLst>
 </p:presentation>
 </file>
 
 <file path=ppt/charts/chart1.xml><?xml version="1.0" encoding="utf-8"?>
-<c:chartSpace xmlns:c="http://schemas.openxmlformats.org/drawingml/2006/chart" xmlns:a="http://schemas.openxmlformats.org/drawingml/2006/main" xmlns:r="http://schemas.openxmlformats.org/officeDocument/2006/relationships">
+<c:chartSpace xmlns:c="http://schemas.openxmlformats.org/drawingml/2006/chart" xmlns:a="http://schemas.openxmlformats.org/drawingml/2006/main" xmlns:r="http://schemas.openxmlformats.org/officeDocument/2006/relationships" xmlns:c16r2="http://schemas.microsoft.com/office/drawing/2015/06/chart">
   <c:date1904 val="0"/>
+  <c:lang val="en-US"/>
   <c:roundedCorners val="1"/>
+  <c:style val="2"/>
   <c:chart>
     <c:title>
       <c:tx>
@@ -148,7 +154,6 @@
           </a:p>
         </c:rich>
       </c:tx>
-      <c:layout/>
       <c:overlay val="0"/>
     </c:title>
     <c:autoTitleDeleted val="0"/>
@@ -192,6 +197,11 @@
               </a:solidFill>
               <a:effectLst/>
             </c:spPr>
+            <c:extLst>
+              <c:ext xmlns:c16="http://schemas.microsoft.com/office/drawing/2014/chart" uri="{C3380CC4-5D6E-409C-BE32-E72D297353CC}">
+                <c16:uniqueId val="{00000001-37F1-49F2-AE9D-16D1CEB47A13}"/>
+              </c:ext>
+            </c:extLst>
           </c:dPt>
           <c:dPt>
             <c:idx val="1"/>
@@ -202,6 +212,11 @@
               </a:solidFill>
               <a:effectLst/>
             </c:spPr>
+            <c:extLst>
+              <c:ext xmlns:c16="http://schemas.microsoft.com/office/drawing/2014/chart" uri="{C3380CC4-5D6E-409C-BE32-E72D297353CC}">
+                <c16:uniqueId val="{00000003-37F1-49F2-AE9D-16D1CEB47A13}"/>
+              </c:ext>
+            </c:extLst>
           </c:dPt>
           <c:dLbls>
             <c:dLbl>
@@ -220,6 +235,7 @@
                       <a:latin typeface="Calibri"/>
                     </a:defRPr>
                   </a:pPr>
+                  <a:endParaRPr lang="en-US"/>
                 </a:p>
               </c:txPr>
               <c:showLegendKey val="0"/>
@@ -228,6 +244,12 @@
               <c:showSerName val="0"/>
               <c:showPercent val="0"/>
               <c:showBubbleSize val="0"/>
+              <c:extLst>
+                <c:ext xmlns:c15="http://schemas.microsoft.com/office/drawing/2012/chart" uri="{CE6537A1-D6FC-4f65-9D91-7224C49458BB}"/>
+                <c:ext xmlns:c16="http://schemas.microsoft.com/office/drawing/2014/chart" uri="{C3380CC4-5D6E-409C-BE32-E72D297353CC}">
+                  <c16:uniqueId val="{00000001-37F1-49F2-AE9D-16D1CEB47A13}"/>
+                </c:ext>
+              </c:extLst>
             </c:dLbl>
             <c:dLbl>
               <c:idx val="1"/>
@@ -245,6 +267,7 @@
                       <a:latin typeface="Calibri"/>
                     </a:defRPr>
                   </a:pPr>
+                  <a:endParaRPr lang="en-US"/>
                 </a:p>
               </c:txPr>
               <c:showLegendKey val="0"/>
@@ -253,8 +276,21 @@
               <c:showSerName val="0"/>
               <c:showPercent val="0"/>
               <c:showBubbleSize val="0"/>
+              <c:extLst>
+                <c:ext xmlns:c15="http://schemas.microsoft.com/office/drawing/2012/chart" uri="{CE6537A1-D6FC-4f65-9D91-7224C49458BB}"/>
+                <c:ext xmlns:c16="http://schemas.microsoft.com/office/drawing/2014/chart" uri="{C3380CC4-5D6E-409C-BE32-E72D297353CC}">
+                  <c16:uniqueId val="{00000003-37F1-49F2-AE9D-16D1CEB47A13}"/>
+                </c:ext>
+              </c:extLst>
             </c:dLbl>
             <c:numFmt formatCode="0&quot; MB&quot;" sourceLinked="0"/>
+            <c:spPr>
+              <a:noFill/>
+              <a:ln>
+                <a:noFill/>
+              </a:ln>
+              <a:effectLst/>
+            </c:spPr>
             <c:txPr>
               <a:bodyPr/>
               <a:lstStyle/>
@@ -267,6 +303,7 @@
                     <a:latin typeface="Arial"/>
                   </a:defRPr>
                 </a:pPr>
+                <a:endParaRPr lang="en-US"/>
               </a:p>
             </c:txPr>
             <c:showLegendKey val="0"/>
@@ -276,6 +313,9 @@
             <c:showPercent val="1"/>
             <c:showBubbleSize val="0"/>
             <c:showLeaderLines val="0"/>
+            <c:extLst>
+              <c:ext xmlns:c15="http://schemas.microsoft.com/office/drawing/2012/chart" uri="{CE6537A1-D6FC-4f65-9D91-7224C49458BB}"/>
+            </c:extLst>
           </c:dLbls>
           <c:cat>
             <c:strRef>
@@ -295,6 +335,7 @@
             <c:numRef>
               <c:f>Sheet1!$B$2:$B$3</c:f>
               <c:numCache>
+                <c:formatCode>General</c:formatCode>
                 <c:ptCount val="2"/>
                 <c:pt idx="0">
                   <c:v>269</c:v>
@@ -305,7 +346,21 @@
               </c:numCache>
             </c:numRef>
           </c:val>
+          <c:extLst>
+            <c:ext xmlns:c16="http://schemas.microsoft.com/office/drawing/2014/chart" uri="{C3380CC4-5D6E-409C-BE32-E72D297353CC}">
+              <c16:uniqueId val="{00000004-37F1-49F2-AE9D-16D1CEB47A13}"/>
+            </c:ext>
+          </c:extLst>
         </c:ser>
+        <c:dLbls>
+          <c:showLegendKey val="0"/>
+          <c:showVal val="0"/>
+          <c:showCatName val="0"/>
+          <c:showSerName val="0"/>
+          <c:showPercent val="0"/>
+          <c:showBubbleSize val="0"/>
+          <c:showLeaderLines val="0"/>
+        </c:dLbls>
         <c:firstSliceAng val="0"/>
         <c:holeSize val="58"/>
       </c:doughnutChart>
@@ -339,6 +394,7 @@
     </c:legend>
     <c:plotVisOnly val="1"/>
     <c:dispBlanksAs val="span"/>
+    <c:showDLblsOverMax val="1"/>
   </c:chart>
   <c:spPr>
     <a:noFill/>
@@ -375,234 +431,10 @@
           <a:chExt cx="0" cy="0"/>
         </a:xfrm>
       </p:grpSpPr>
-      <p:sp>
-        <p:nvSpPr>
-          <p:cNvPr id="2" name="Header Placeholder 1"/>
-          <p:cNvSpPr>
-            <a:spLocks noGrp="1"/>
-          </p:cNvSpPr>
-          <p:nvPr>
-            <p:ph type="hdr" sz="quarter"/>
-          </p:nvPr>
-        </p:nvSpPr>
-        <p:spPr>
-          <a:xfrm>
-            <a:off x="0" y="0"/>
-            <a:ext cx="2971800" cy="458788"/>
-          </a:xfrm>
-          <a:prstGeom prst="rect">
-            <a:avLst/>
-          </a:prstGeom>
-        </p:spPr>
-        <p:txBody>
-          <a:bodyPr vert="horz" lIns="91440" tIns="45720" rIns="91440" bIns="45720" rtlCol="0"/>
-          <a:lstStyle>
-            <a:lvl1pPr algn="l">
-              <a:defRPr sz="1200"/>
-            </a:lvl1pPr>
-          </a:lstStyle>
-          <a:p>
-            <a:endParaRPr lang="en-US"/>
-          </a:p>
-        </p:txBody>
-      </p:sp>
-      <p:sp>
-        <p:nvSpPr>
-          <p:cNvPr id="3" name="Date Placeholder 2"/>
-          <p:cNvSpPr>
-            <a:spLocks noGrp="1"/>
-          </p:cNvSpPr>
-          <p:nvPr>
-            <p:ph type="dt" idx="1"/>
-          </p:nvPr>
-        </p:nvSpPr>
-        <p:spPr>
-          <a:xfrm>
-            <a:off x="3884613" y="0"/>
-            <a:ext cx="2971800" cy="458788"/>
-          </a:xfrm>
-          <a:prstGeom prst="rect">
-            <a:avLst/>
-          </a:prstGeom>
-        </p:spPr>
-        <p:txBody>
-          <a:bodyPr vert="horz" lIns="91440" tIns="45720" rIns="91440" bIns="45720" rtlCol="0"/>
-          <a:lstStyle>
-            <a:lvl1pPr algn="r">
-              <a:defRPr sz="1200"/>
-            </a:lvl1pPr>
-          </a:lstStyle>
-          <a:p>
-            <a:fld id="{5282F153-3F37-0F45-9E97-73ACFA13230C}" type="datetimeFigureOut">
-              <a:rPr lang="en-US"/>
-              <a:t>7/23/19</a:t>
-            </a:fld>
-            <a:endParaRPr lang="en-US"/>
-          </a:p>
-        </p:txBody>
-      </p:sp>
-      <p:sp>
-        <p:nvSpPr>
-          <p:cNvPr id="4" name="Slide Image Placeholder 3"/>
-          <p:cNvSpPr>
-            <a:spLocks noGrp="1" noRot="1" noChangeAspect="1"/>
-          </p:cNvSpPr>
-          <p:nvPr>
-            <p:ph type="sldImg" idx="2"/>
-          </p:nvPr>
-        </p:nvSpPr>
-        <p:spPr>
-          <a:xfrm>
-            <a:off x="685800" y="1143000"/>
-            <a:ext cx="5486400" cy="3086100"/>
-          </a:xfrm>
-          <a:prstGeom prst="rect">
-            <a:avLst/>
-          </a:prstGeom>
-          <a:noFill/>
-          <a:ln w="12700">
-            <a:solidFill>
-              <a:prstClr val="black"/>
-            </a:solidFill>
-          </a:ln>
-        </p:spPr>
-        <p:txBody>
-          <a:bodyPr vert="horz" lIns="91440" tIns="45720" rIns="91440" bIns="45720" rtlCol="0" anchor="ctr"/>
-          <a:lstStyle/>
-          <a:p>
-            <a:endParaRPr lang="en-US"/>
-          </a:p>
-        </p:txBody>
-      </p:sp>
-      <p:sp>
-        <p:nvSpPr>
-          <p:cNvPr id="5" name="Notes Placeholder 4"/>
-          <p:cNvSpPr>
-            <a:spLocks noGrp="1"/>
-          </p:cNvSpPr>
-          <p:nvPr>
-            <p:ph type="body" sz="quarter" idx="3"/>
-          </p:nvPr>
-        </p:nvSpPr>
-        <p:spPr>
-          <a:xfrm>
-            <a:off x="685800" y="4400550"/>
-            <a:ext cx="5486400" cy="3600450"/>
-          </a:xfrm>
-          <a:prstGeom prst="rect">
-            <a:avLst/>
-          </a:prstGeom>
-        </p:spPr>
-        <p:txBody>
-          <a:bodyPr vert="horz" lIns="91440" tIns="45720" rIns="91440" bIns="45720" rtlCol="0"/>
-          <a:lstStyle/>
-          <a:p>
-            <a:pPr lvl="0"/>
-            <a:r>
-              <a:rPr lang="en-US"/>
-              <a:t>Click to edit Master text styles</a:t>
-            </a:r>
-          </a:p>
-          <a:p>
-            <a:pPr lvl="1"/>
-            <a:r>
-              <a:rPr lang="en-US"/>
-              <a:t>Second level</a:t>
-            </a:r>
-          </a:p>
-          <a:p>
-            <a:pPr lvl="2"/>
-            <a:r>
-              <a:rPr lang="en-US"/>
-              <a:t>Third level</a:t>
-            </a:r>
-          </a:p>
-          <a:p>
-            <a:pPr lvl="3"/>
-            <a:r>
-              <a:rPr lang="en-US"/>
-              <a:t>Fourth level</a:t>
-            </a:r>
-          </a:p>
-          <a:p>
-            <a:pPr lvl="4"/>
-            <a:r>
-              <a:rPr lang="en-US"/>
-              <a:t>Fifth level</a:t>
-            </a:r>
-          </a:p>
-        </p:txBody>
-      </p:sp>
-      <p:sp>
-        <p:nvSpPr>
-          <p:cNvPr id="6" name="Footer Placeholder 5"/>
-          <p:cNvSpPr>
-            <a:spLocks noGrp="1"/>
-          </p:cNvSpPr>
-          <p:nvPr>
-            <p:ph type="ftr" sz="quarter" idx="4"/>
-          </p:nvPr>
-        </p:nvSpPr>
-        <p:spPr>
-          <a:xfrm>
-            <a:off x="0" y="8685213"/>
-            <a:ext cx="2971800" cy="458787"/>
-          </a:xfrm>
-          <a:prstGeom prst="rect">
-            <a:avLst/>
-          </a:prstGeom>
-        </p:spPr>
-        <p:txBody>
-          <a:bodyPr vert="horz" lIns="91440" tIns="45720" rIns="91440" bIns="45720" rtlCol="0" anchor="b"/>
-          <a:lstStyle>
-            <a:lvl1pPr algn="l">
-              <a:defRPr sz="1200"/>
-            </a:lvl1pPr>
-          </a:lstStyle>
-          <a:p>
-            <a:endParaRPr lang="en-US"/>
-          </a:p>
-        </p:txBody>
-      </p:sp>
-      <p:sp>
-        <p:nvSpPr>
-          <p:cNvPr id="7" name="Slide Number Placeholder 6"/>
-          <p:cNvSpPr>
-            <a:spLocks noGrp="1"/>
-          </p:cNvSpPr>
-          <p:nvPr>
-            <p:ph type="sldNum" sz="quarter" idx="5"/>
-          </p:nvPr>
-        </p:nvSpPr>
-        <p:spPr>
-          <a:xfrm>
-            <a:off x="3884613" y="8685213"/>
-            <a:ext cx="2971800" cy="458787"/>
-          </a:xfrm>
-          <a:prstGeom prst="rect">
-            <a:avLst/>
-          </a:prstGeom>
-        </p:spPr>
-        <p:txBody>
-          <a:bodyPr vert="horz" lIns="91440" tIns="45720" rIns="91440" bIns="45720" rtlCol="0" anchor="b"/>
-          <a:lstStyle>
-            <a:lvl1pPr algn="r">
-              <a:defRPr sz="1200"/>
-            </a:lvl1pPr>
-          </a:lstStyle>
-          <a:p>
-            <a:fld id="{CE5E9CC1-C706-0F49-92D6-E571CC5EEA8F}" type="slidenum">
-              <a:rPr lang="en-US"/>
-              <a:t>‹#›</a:t>
-            </a:fld>
-            <a:endParaRPr lang="en-US"/>
-          </a:p>
-        </p:txBody>
-      </p:sp>
     </p:spTree>
     <p:extLst>
       <p:ext uri="{BB962C8B-B14F-4D97-AF65-F5344CB8AC3E}">
-        <p14:creationId xmlns:p14="http://schemas.microsoft.com/office/powerpoint/2010/main" val="1024086991"/>
+        <p14:creationId xmlns:p14="http://schemas.microsoft.com/office/powerpoint/2010/main" val="749747450"/>
       </p:ext>
     </p:extLst>
   </p:cSld>
@@ -750,7 +582,6 @@
               <a:rPr lang="en-US" dirty="0"/>
               <a:t>Aim of the session: agree that Adflow can be reviewed and deployed. Two substantive questions only — the bundled Chromium runtime and code signing. Everything else is unusually simple: no backend, no accounts, no network traffic.</a:t>
             </a:r>
-            <a:endParaRPr lang="en-US" dirty="0"/>
           </a:p>
         </p:txBody>
       </p:sp>
@@ -836,9 +667,8 @@
           <a:p>
             <a:r>
               <a:rPr lang="en-US" dirty="0"/>
-              <a:t>Every licence body in the notices file is the genuine text fetched from each project’s own repository, not retyped, so it cannot drift from what they publish.</a:t>
+              <a:t>Leave this slide up for questions. The repository link gives ITS direct access to the source under review, with the security summary, dependency checksums and container runbook alongside it. If the repository is private, confirm who at ITS needs read access before the session.</a:t>
             </a:r>
-            <a:endParaRPr lang="en-US" dirty="0"/>
           </a:p>
         </p:txBody>
       </p:sp>
@@ -860,94 +690,6 @@
             <a:fld id="{F7021451-1387-4CA6-816F-3879F97B5CBC}" type="slidenum">
               <a:rPr lang="en-US"/>
               <a:t>10</a:t>
-            </a:fld>
-            <a:endParaRPr lang="en-US"/>
-          </a:p>
-        </p:txBody>
-      </p:sp>
-    </p:spTree>
-    <p:extLst>
-      <p:ext uri="{BB962C8B-B14F-4D97-AF65-F5344CB8AC3E}">
-        <p14:creationId xmlns:p14="http://schemas.microsoft.com/office/powerpoint/2010/main" val="1024086991"/>
-      </p:ext>
-    </p:extLst>
-  </p:cSld>
-  <p:clrMapOvr>
-    <a:masterClrMapping/>
-  </p:clrMapOvr>
-</p:notes>
-</file>
-
-<file path=ppt/notesSlides/notesSlide11.xml><?xml version="1.0" encoding="utf-8"?>
-<p:notes xmlns:a="http://schemas.openxmlformats.org/drawingml/2006/main" xmlns:r="http://schemas.openxmlformats.org/officeDocument/2006/relationships" xmlns:p="http://schemas.openxmlformats.org/presentationml/2006/main">
-  <p:cSld>
-    <p:spTree>
-      <p:nvGrpSpPr>
-        <p:cNvPr id="1" name=""/>
-        <p:cNvGrpSpPr/>
-        <p:nvPr/>
-      </p:nvGrpSpPr>
-      <p:grpSpPr>
-        <a:xfrm>
-          <a:off x="0" y="0"/>
-          <a:ext cx="0" cy="0"/>
-          <a:chOff x="0" y="0"/>
-          <a:chExt cx="0" cy="0"/>
-        </a:xfrm>
-      </p:grpSpPr>
-      <p:sp>
-        <p:nvSpPr>
-          <p:cNvPr id="2" name="Slide Image Placeholder 1"/>
-          <p:cNvSpPr>
-            <a:spLocks noGrp="1" noRot="1" noChangeAspect="1"/>
-          </p:cNvSpPr>
-          <p:nvPr>
-            <p:ph type="sldImg"/>
-          </p:nvPr>
-        </p:nvSpPr>
-        <p:spPr/>
-      </p:sp>
-      <p:sp>
-        <p:nvSpPr>
-          <p:cNvPr id="3" name="Notes Placeholder 2"/>
-          <p:cNvSpPr>
-            <a:spLocks noGrp="1"/>
-          </p:cNvSpPr>
-          <p:nvPr>
-            <p:ph type="body" idx="1"/>
-          </p:nvPr>
-        </p:nvSpPr>
-        <p:spPr/>
-        <p:txBody>
-          <a:bodyPr/>
-          <a:lstStyle/>
-          <a:p>
-            <a:r>
-              <a:rPr lang="en-US" dirty="0"/>
-              <a:t>Close on the second ask — the certificate is the only thing that needs budget, and it is the one item that visibly improves the experience for every member of staff.</a:t>
-            </a:r>
-            <a:endParaRPr lang="en-US" dirty="0"/>
-          </a:p>
-        </p:txBody>
-      </p:sp>
-      <p:sp>
-        <p:nvSpPr>
-          <p:cNvPr id="4" name="Slide Number Placeholder 3"/>
-          <p:cNvSpPr>
-            <a:spLocks noGrp="1"/>
-          </p:cNvSpPr>
-          <p:nvPr>
-            <p:ph type="sldNum" sz="quarter" idx="10"/>
-          </p:nvPr>
-        </p:nvSpPr>
-        <p:spPr/>
-        <p:txBody>
-          <a:bodyPr/>
-          <a:lstStyle/>
-          <a:p>
-            <a:fld id="{F7021451-1387-4CA6-816F-3879F97B5CBC}" type="slidenum">
-              <a:rPr lang="en-US"/>
-              <a:t>11</a:t>
             </a:fld>
             <a:endParaRPr lang="en-US"/>
           </a:p>
@@ -1014,7 +756,6 @@
               <a:rPr lang="en-US" dirty="0"/>
               <a:t>The three "no"s are what make the review short. Most of what a security team normally has to assess — authentication, data at rest on a server, API surface, egress — simply does not exist here.</a:t>
             </a:r>
-            <a:endParaRPr lang="en-US" dirty="0"/>
           </a:p>
         </p:txBody>
       </p:sp>
@@ -1100,9 +841,8 @@
           <a:p>
             <a:r>
               <a:rPr lang="en-US" dirty="0"/>
-              <a:t>Lead with this slide if time is short. The "no build step" point is worth dwelling on — very little commercial software can offer it, and it removes the usual supply-chain question about whether the shipped bundle matches the published source.</a:t>
+              <a:t>If the bundled runtime becomes a sticking point, the third column is the fallback: the same application inside the browser ITS already patches, with no Chromium of our own to maintain.</a:t>
             </a:r>
-            <a:endParaRPr lang="en-US" dirty="0"/>
           </a:p>
         </p:txBody>
       </p:sp>
@@ -1188,9 +928,8 @@
           <a:p>
             <a:r>
               <a:rPr lang="en-US" dirty="0"/>
-              <a:t>If the bundled runtime becomes a sticking point, the third column is the fallback: the same application inside the browser ITS already patches, with no Chromium of our own to maintain.</a:t>
+              <a:t>There is no data-retention or data-residency question to answer, because no institutional system ever holds this data. It is the same posture as a local image editor.</a:t>
             </a:r>
-            <a:endParaRPr lang="en-US" dirty="0"/>
           </a:p>
         </p:txBody>
       </p:sp>
@@ -1276,9 +1015,8 @@
           <a:p>
             <a:r>
               <a:rPr lang="en-US" dirty="0"/>
-              <a:t>There is no data-retention or data-residency question to answer, because no institutional system ever holds this data. It is the same posture as a local image editor.</a:t>
+              <a:t>Security teams distrust Electron apps largely because they typically ship telemetry and an update channel. This one has neither — worth saying plainly rather than letting them find out by asking.</a:t>
             </a:r>
-            <a:endParaRPr lang="en-US" dirty="0"/>
           </a:p>
         </p:txBody>
       </p:sp>
@@ -1364,9 +1102,8 @@
           <a:p>
             <a:r>
               <a:rPr lang="en-US" dirty="0"/>
-              <a:t>Security teams distrust Electron apps largely because they typically ship telemetry and an update channel. This one has neither — worth saying plainly rather than letting them find out by asking.</a:t>
+              <a:t>Expect the runtime size to prompt a question. The answer is that it is a browser engine, the same one already approved on the fleet, and the next slide covers the obligation that comes with bundling it.</a:t>
             </a:r>
-            <a:endParaRPr lang="en-US" dirty="0"/>
           </a:p>
         </p:txBody>
       </p:sp>
@@ -1452,9 +1189,8 @@
           <a:p>
             <a:r>
               <a:rPr lang="en-US" dirty="0"/>
-              <a:t>Expect the runtime size to prompt a question. The answer is that it is a browser engine, the same one already approved on the fleet, and the next slide covers the obligation that comes with bundling it.</a:t>
+              <a:t>If a scan is run it will report the 14. The distinction is real: those packages build the app and are not inside it. DEPENDENCIES.md documents both scopes and how to verify each checksum.</a:t>
             </a:r>
-            <a:endParaRPr lang="en-US" dirty="0"/>
           </a:p>
         </p:txBody>
       </p:sp>
@@ -1540,9 +1276,8 @@
           <a:p>
             <a:r>
               <a:rPr lang="en-US" dirty="0"/>
-              <a:t>If a scan is run it will report the 14. The distinction is real: those packages build the app and are not inside it. DEPENDENCIES.md documents both scopes and how to verify each checksum.</a:t>
+              <a:t>Do not soften this. Raising it ourselves is what makes it a managed risk rather than an oversight discovered during the review. The fallback in the red band is genuine and costs nothing to take.</a:t>
             </a:r>
-            <a:endParaRPr lang="en-US" dirty="0"/>
           </a:p>
         </p:txBody>
       </p:sp>
@@ -1628,9 +1363,8 @@
           <a:p>
             <a:r>
               <a:rPr lang="en-US" dirty="0"/>
-              <a:t>Do not soften this. Raising it ourselves is what makes it a managed risk rather than an oversight discovered during the review. The fallback in the red band is genuine and costs nothing to take.</a:t>
+              <a:t>Every licence body in the notices file is the genuine text fetched from each project’s own repository, not retyped, so it cannot drift from what they publish.</a:t>
             </a:r>
-            <a:endParaRPr lang="en-US" dirty="0"/>
           </a:p>
         </p:txBody>
       </p:sp>
@@ -1703,6 +1437,11 @@
 <file path=ppt/slideMasters/slideMaster1.xml><?xml version="1.0" encoding="utf-8"?>
 <p:sldMaster xmlns:a="http://schemas.openxmlformats.org/drawingml/2006/main" xmlns:r="http://schemas.openxmlformats.org/officeDocument/2006/relationships" xmlns:p="http://schemas.openxmlformats.org/presentationml/2006/main">
   <p:cSld>
+    <p:bg>
+      <p:bgRef idx="1001">
+        <a:schemeClr val="bg1"/>
+      </p:bgRef>
+    </p:bg>
     <p:spTree>
       <p:nvGrpSpPr>
         <p:cNvPr id="1" name=""/>
@@ -1985,6 +1724,7 @@
         <a:solidFill>
           <a:srgbClr val="000054"/>
         </a:solidFill>
+        <a:effectLst/>
       </p:bgPr>
     </p:bg>
     <p:spTree>
@@ -2003,14 +1743,14 @@
       </p:grpSpPr>
       <p:pic>
         <p:nvPicPr>
-          <p:cNvPr id="2" name="Image 0" descr="C:\Users\nguye\AppData\Local\Temp\claude\E--WORK-OFFLINE-apps-Adflow\c4dbe0b3-8f3b-4a26-ba73-6ba5f8057916\scratchpad\brand\pixel-red.png">    </p:cNvPr>
+          <p:cNvPr id="2" name="Image 0" descr="C:\Users\nguye\AppData\Local\Temp\claude\E--WORK-OFFLINE-apps-Adflow\c4dbe0b3-8f3b-4a26-ba73-6ba5f8057916\scratchpad\brand\pixel-red.png"/>
           <p:cNvPicPr>
             <a:picLocks noChangeAspect="1"/>
           </p:cNvPicPr>
           <p:nvPr/>
         </p:nvPicPr>
         <p:blipFill>
-          <a:blip r:embed="rId1"/>
+          <a:blip r:embed="rId3"/>
           <a:stretch>
             <a:fillRect/>
           </a:stretch>
@@ -2027,14 +1767,14 @@
       </p:pic>
       <p:pic>
         <p:nvPicPr>
-          <p:cNvPr id="3" name="Image 1" descr="C:\Users\nguye\AppData\Local\Temp\claude\E--WORK-OFFLINE-apps-Adflow\c4dbe0b3-8f3b-4a26-ba73-6ba5f8057916\scratchpad\brand\adflow-wordmark.png">    </p:cNvPr>
+          <p:cNvPr id="3" name="Image 1" descr="C:\Users\nguye\AppData\Local\Temp\claude\E--WORK-OFFLINE-apps-Adflow\c4dbe0b3-8f3b-4a26-ba73-6ba5f8057916\scratchpad\brand\adflow-wordmark.png"/>
           <p:cNvPicPr>
             <a:picLocks noChangeAspect="1"/>
           </p:cNvPicPr>
           <p:nvPr/>
         </p:nvPicPr>
         <p:blipFill>
-          <a:blip r:embed="rId2"/>
+          <a:blip r:embed="rId4"/>
           <a:stretch>
             <a:fillRect/>
           </a:stretch>
@@ -2070,7 +1810,7 @@
           <a:bodyPr wrap="square" lIns="0" tIns="0" rIns="0" bIns="0" rtlCol="0" anchor="t"/>
           <a:lstStyle/>
           <a:p>
-            <a:pPr indent="0" marL="0">
+            <a:pPr marL="0" indent="0">
               <a:lnSpc>
                 <a:spcPct val="100000"/>
               </a:lnSpc>
@@ -2090,7 +1830,7 @@
             <a:endParaRPr lang="en-US" sz="4400" dirty="0"/>
           </a:p>
           <a:p>
-            <a:pPr indent="0" marL="0">
+            <a:pPr marL="0" indent="0">
               <a:lnSpc>
                 <a:spcPct val="100000"/>
               </a:lnSpc>
@@ -2132,7 +1872,7 @@
           <a:bodyPr wrap="square" lIns="0" tIns="0" rIns="0" bIns="0" rtlCol="0" anchor="t"/>
           <a:lstStyle/>
           <a:p>
-            <a:pPr indent="0" marL="0">
+            <a:pPr marL="0" indent="0">
               <a:lnSpc>
                 <a:spcPct val="125000"/>
               </a:lnSpc>
@@ -2152,7 +1892,7 @@
             <a:endParaRPr lang="en-US" sz="1500" dirty="0"/>
           </a:p>
           <a:p>
-            <a:pPr indent="0" marL="0">
+            <a:pPr marL="0" indent="0">
               <a:lnSpc>
                 <a:spcPct val="125000"/>
               </a:lnSpc>
@@ -2194,7 +1934,7 @@
           <a:bodyPr wrap="square" lIns="0" tIns="0" rIns="0" bIns="0" rtlCol="0" anchor="ctr"/>
           <a:lstStyle/>
           <a:p>
-            <a:pPr indent="0" marL="0">
+            <a:pPr marL="0" indent="0">
               <a:buNone/>
             </a:pPr>
             <a:r>
@@ -2222,1315 +1962,13 @@
 
 <file path=ppt/slides/slide10.xml><?xml version="1.0" encoding="utf-8"?>
 <p:sld xmlns:a="http://schemas.openxmlformats.org/drawingml/2006/main" xmlns:r="http://schemas.openxmlformats.org/officeDocument/2006/relationships" xmlns:p="http://schemas.openxmlformats.org/presentationml/2006/main">
-  <p:cSld name="Slide 10">
-    <p:bg>
-      <p:bgPr>
-        <a:solidFill>
-          <a:srgbClr val="FFFFFF"/>
-        </a:solidFill>
-      </p:bgPr>
-    </p:bg>
-    <p:spTree>
-      <p:nvGrpSpPr>
-        <p:cNvPr id="1" name=""/>
-        <p:cNvGrpSpPr/>
-        <p:nvPr/>
-      </p:nvGrpSpPr>
-      <p:grpSpPr>
-        <a:xfrm>
-          <a:off x="0" y="0"/>
-          <a:ext cx="0" cy="0"/>
-          <a:chOff x="0" y="0"/>
-          <a:chExt cx="0" cy="0"/>
-        </a:xfrm>
-      </p:grpSpPr>
-      <p:sp>
-        <p:nvSpPr>
-          <p:cNvPr id="2" name="Text 0"/>
-          <p:cNvSpPr txBox="1"/>
-          <p:nvPr/>
-        </p:nvSpPr>
-        <p:spPr>
-          <a:xfrm>
-            <a:off x="594360" y="146304"/>
-            <a:ext cx="10972800" cy="274320"/>
-          </a:xfrm>
-          <a:prstGeom prst="rect">
-            <a:avLst/>
-          </a:prstGeom>
-          <a:noFill/>
-          <a:ln/>
-        </p:spPr>
-        <p:txBody>
-          <a:bodyPr wrap="square" lIns="0" tIns="0" rIns="0" bIns="0" rtlCol="0" anchor="ctr"/>
-          <a:lstStyle/>
-          <a:p>
-            <a:pPr algn="l" indent="0" marL="0">
-              <a:buNone/>
-            </a:pPr>
-            <a:r>
-              <a:rPr lang="en-US" sz="1100" b="1" spc="200" kern="0" dirty="0">
-                <a:solidFill>
-                  <a:srgbClr val="E61E2A"/>
-                </a:solidFill>
-                <a:latin typeface="Calibri" pitchFamily="34" charset="0"/>
-                <a:ea typeface="Calibri" pitchFamily="34" charset="-122"/>
-                <a:cs typeface="Calibri" pitchFamily="34" charset="-120"/>
-              </a:rPr>
-              <a:t>KNOWN GAPS</a:t>
-            </a:r>
-            <a:endParaRPr lang="en-US" sz="1100" dirty="0"/>
-          </a:p>
-        </p:txBody>
-      </p:sp>
-      <p:sp>
-        <p:nvSpPr>
-          <p:cNvPr id="3" name="Text 1"/>
-          <p:cNvSpPr txBox="1"/>
-          <p:nvPr/>
-        </p:nvSpPr>
-        <p:spPr>
-          <a:xfrm>
-            <a:off x="594360" y="411480"/>
-            <a:ext cx="10972800" cy="685800"/>
-          </a:xfrm>
-          <a:prstGeom prst="rect">
-            <a:avLst/>
-          </a:prstGeom>
-          <a:noFill/>
-          <a:ln/>
-        </p:spPr>
-        <p:txBody>
-          <a:bodyPr wrap="square" lIns="0" tIns="0" rIns="0" bIns="0" rtlCol="0" anchor="ctr"/>
-          <a:lstStyle/>
-          <a:p>
-            <a:pPr algn="l" indent="0" marL="0">
-              <a:buNone/>
-            </a:pPr>
-            <a:r>
-              <a:rPr lang="en-US" sz="3400" b="1" dirty="0">
-                <a:solidFill>
-                  <a:srgbClr val="000054"/>
-                </a:solidFill>
-                <a:latin typeface="Cambria" pitchFamily="34" charset="0"/>
-                <a:ea typeface="Cambria" pitchFamily="34" charset="-122"/>
-                <a:cs typeface="Cambria" pitchFamily="34" charset="-120"/>
-              </a:rPr>
-              <a:t>Stated openly, with their status</a:t>
-            </a:r>
-            <a:endParaRPr lang="en-US" sz="3400" dirty="0"/>
-          </a:p>
-        </p:txBody>
-      </p:sp>
-      <p:graphicFrame>
-        <p:nvGraphicFramePr>
-          <p:cNvPr id="11" name="Table 0"/>
-          <p:cNvGraphicFramePr>
-            <a:graphicFrameLocks noGrp="1"/>
-          </p:cNvGraphicFramePr>
-          <p:nvPr>
-            <p:extLst>
-              <p:ext uri="{D42A27DB-BD31-4B8C-83A1-F6EECF244321}">
-                <p14:modId xmlns:p14="http://schemas.microsoft.com/office/powerpoint/2010/main" val="1579011935"/>
-              </p:ext>
-            </p:extLst>
-          </p:nvPr>
-        </p:nvGraphicFramePr>
-        <p:xfrm>
-          <a:off x="594360" y="2011680"/>
-          <a:ext cx="10881360" cy="914400"/>
-        </p:xfrm>
-        <a:graphic>
-          <a:graphicData uri="http://schemas.openxmlformats.org/drawingml/2006/table">
-            <a:tbl>
-              <a:tblPr/>
-              <a:tblGrid>
-                <a:gridCol w="3017520"/>
-                <a:gridCol w="4297680"/>
-                <a:gridCol w="3566160"/>
-              </a:tblGrid>
-              <a:tr h="457200">
-                <a:tc>
-                  <a:txBody>
-                    <a:bodyPr/>
-                    <a:lstStyle/>
-                    <a:p>
-                      <a:pPr indent="0" marL="0">
-                        <a:buNone/>
-                      </a:pPr>
-                      <a:r>
-                        <a:rPr lang="en-US" sz="1200" b="1" dirty="0">
-                          <a:solidFill>
-                            <a:srgbClr val="FFFFFF"/>
-                          </a:solidFill>
-                          <a:latin typeface="Calibri" pitchFamily="34" charset="0"/>
-                          <a:ea typeface="Calibri" pitchFamily="34" charset="-122"/>
-                          <a:cs typeface="Calibri" pitchFamily="34" charset="-120"/>
-                        </a:rPr>
-                        <a:t>Gap</a:t>
-                      </a:r>
-                      <a:endParaRPr lang="en-US" sz="1200" dirty="0">
-                        <a:latin typeface="Calibri" charset="0"/>
-                        <a:ea typeface="Calibri" charset="0"/>
-                        <a:cs typeface="Calibri" charset="0"/>
-                      </a:endParaRPr>
-                    </a:p>
-                  </a:txBody>
-                  <a:tcPr marL="76200" marR="76200" marT="76200" marB="76200" anchor="ctr">
-                    <a:lnL w="9525" cap="flat" cmpd="sng" algn="ctr">
-                      <a:solidFill>
-                        <a:srgbClr val="D8DAE6"/>
-                      </a:solidFill>
-                      <a:prstDash val="solid"/>
-                      <a:round/>
-                      <a:headEnd type="none" w="med" len="med"/>
-                      <a:tailEnd type="none" w="med" len="med"/>
-                    </a:lnL>
-                    <a:lnR w="9525" cap="flat" cmpd="sng" algn="ctr">
-                      <a:solidFill>
-                        <a:srgbClr val="D8DAE6"/>
-                      </a:solidFill>
-                      <a:prstDash val="solid"/>
-                      <a:round/>
-                      <a:headEnd type="none" w="med" len="med"/>
-                      <a:tailEnd type="none" w="med" len="med"/>
-                    </a:lnR>
-                    <a:lnT w="9525" cap="flat" cmpd="sng" algn="ctr">
-                      <a:solidFill>
-                        <a:srgbClr val="D8DAE6"/>
-                      </a:solidFill>
-                      <a:prstDash val="solid"/>
-                      <a:round/>
-                      <a:headEnd type="none" w="med" len="med"/>
-                      <a:tailEnd type="none" w="med" len="med"/>
-                    </a:lnT>
-                    <a:lnB w="9525" cap="flat" cmpd="sng" algn="ctr">
-                      <a:solidFill>
-                        <a:srgbClr val="D8DAE6"/>
-                      </a:solidFill>
-                      <a:prstDash val="solid"/>
-                      <a:round/>
-                      <a:headEnd type="none" w="med" len="med"/>
-                      <a:tailEnd type="none" w="med" len="med"/>
-                    </a:lnB>
-                    <a:solidFill>
-                      <a:srgbClr val="000054"/>
-                    </a:solidFill>
-                  </a:tcPr>
-                </a:tc>
-                <a:tc>
-                  <a:txBody>
-                    <a:bodyPr/>
-                    <a:lstStyle/>
-                    <a:p>
-                      <a:pPr indent="0" marL="0">
-                        <a:buNone/>
-                      </a:pPr>
-                      <a:r>
-                        <a:rPr lang="en-US" sz="1200" b="1" dirty="0">
-                          <a:solidFill>
-                            <a:srgbClr val="FFFFFF"/>
-                          </a:solidFill>
-                          <a:latin typeface="Calibri" pitchFamily="34" charset="0"/>
-                          <a:ea typeface="Calibri" pitchFamily="34" charset="-122"/>
-                          <a:cs typeface="Calibri" pitchFamily="34" charset="-120"/>
-                        </a:rPr>
-                        <a:t>Effect</a:t>
-                      </a:r>
-                      <a:endParaRPr lang="en-US" sz="1200" dirty="0">
-                        <a:latin typeface="Calibri" charset="0"/>
-                        <a:ea typeface="Calibri" charset="0"/>
-                        <a:cs typeface="Calibri" charset="0"/>
-                      </a:endParaRPr>
-                    </a:p>
-                  </a:txBody>
-                  <a:tcPr marL="76200" marR="76200" marT="76200" marB="76200" anchor="ctr">
-                    <a:lnL w="9525" cap="flat" cmpd="sng" algn="ctr">
-                      <a:solidFill>
-                        <a:srgbClr val="D8DAE6"/>
-                      </a:solidFill>
-                      <a:prstDash val="solid"/>
-                      <a:round/>
-                      <a:headEnd type="none" w="med" len="med"/>
-                      <a:tailEnd type="none" w="med" len="med"/>
-                    </a:lnL>
-                    <a:lnR w="9525" cap="flat" cmpd="sng" algn="ctr">
-                      <a:solidFill>
-                        <a:srgbClr val="D8DAE6"/>
-                      </a:solidFill>
-                      <a:prstDash val="solid"/>
-                      <a:round/>
-                      <a:headEnd type="none" w="med" len="med"/>
-                      <a:tailEnd type="none" w="med" len="med"/>
-                    </a:lnR>
-                    <a:lnT w="9525" cap="flat" cmpd="sng" algn="ctr">
-                      <a:solidFill>
-                        <a:srgbClr val="D8DAE6"/>
-                      </a:solidFill>
-                      <a:prstDash val="solid"/>
-                      <a:round/>
-                      <a:headEnd type="none" w="med" len="med"/>
-                      <a:tailEnd type="none" w="med" len="med"/>
-                    </a:lnT>
-                    <a:lnB w="9525" cap="flat" cmpd="sng" algn="ctr">
-                      <a:solidFill>
-                        <a:srgbClr val="D8DAE6"/>
-                      </a:solidFill>
-                      <a:prstDash val="solid"/>
-                      <a:round/>
-                      <a:headEnd type="none" w="med" len="med"/>
-                      <a:tailEnd type="none" w="med" len="med"/>
-                    </a:lnB>
-                    <a:solidFill>
-                      <a:srgbClr val="000054"/>
-                    </a:solidFill>
-                  </a:tcPr>
-                </a:tc>
-                <a:tc>
-                  <a:txBody>
-                    <a:bodyPr/>
-                    <a:lstStyle/>
-                    <a:p>
-                      <a:pPr indent="0" marL="0">
-                        <a:buNone/>
-                      </a:pPr>
-                      <a:r>
-                        <a:rPr lang="en-US" sz="1200" b="1" dirty="0">
-                          <a:solidFill>
-                            <a:srgbClr val="FFFFFF"/>
-                          </a:solidFill>
-                          <a:latin typeface="Calibri" pitchFamily="34" charset="0"/>
-                          <a:ea typeface="Calibri" pitchFamily="34" charset="-122"/>
-                          <a:cs typeface="Calibri" pitchFamily="34" charset="-120"/>
-                        </a:rPr>
-                        <a:t>Status</a:t>
-                      </a:r>
-                      <a:endParaRPr lang="en-US" sz="1200" dirty="0">
-                        <a:latin typeface="Calibri" charset="0"/>
-                        <a:ea typeface="Calibri" charset="0"/>
-                        <a:cs typeface="Calibri" charset="0"/>
-                      </a:endParaRPr>
-                    </a:p>
-                  </a:txBody>
-                  <a:tcPr marL="76200" marR="76200" marT="76200" marB="76200" anchor="ctr">
-                    <a:lnL w="9525" cap="flat" cmpd="sng" algn="ctr">
-                      <a:solidFill>
-                        <a:srgbClr val="D8DAE6"/>
-                      </a:solidFill>
-                      <a:prstDash val="solid"/>
-                      <a:round/>
-                      <a:headEnd type="none" w="med" len="med"/>
-                      <a:tailEnd type="none" w="med" len="med"/>
-                    </a:lnL>
-                    <a:lnR w="9525" cap="flat" cmpd="sng" algn="ctr">
-                      <a:solidFill>
-                        <a:srgbClr val="D8DAE6"/>
-                      </a:solidFill>
-                      <a:prstDash val="solid"/>
-                      <a:round/>
-                      <a:headEnd type="none" w="med" len="med"/>
-                      <a:tailEnd type="none" w="med" len="med"/>
-                    </a:lnR>
-                    <a:lnT w="9525" cap="flat" cmpd="sng" algn="ctr">
-                      <a:solidFill>
-                        <a:srgbClr val="D8DAE6"/>
-                      </a:solidFill>
-                      <a:prstDash val="solid"/>
-                      <a:round/>
-                      <a:headEnd type="none" w="med" len="med"/>
-                      <a:tailEnd type="none" w="med" len="med"/>
-                    </a:lnT>
-                    <a:lnB w="9525" cap="flat" cmpd="sng" algn="ctr">
-                      <a:solidFill>
-                        <a:srgbClr val="D8DAE6"/>
-                      </a:solidFill>
-                      <a:prstDash val="solid"/>
-                      <a:round/>
-                      <a:headEnd type="none" w="med" len="med"/>
-                      <a:tailEnd type="none" w="med" len="med"/>
-                    </a:lnB>
-                    <a:solidFill>
-                      <a:srgbClr val="000054"/>
-                    </a:solidFill>
-                  </a:tcPr>
-                </a:tc>
-              </a:tr>
-              <a:tr h="457200">
-                <a:tc>
-                  <a:txBody>
-                    <a:bodyPr/>
-                    <a:lstStyle/>
-                    <a:p>
-                      <a:pPr indent="0" marL="0">
-                        <a:buNone/>
-                      </a:pPr>
-                      <a:r>
-                        <a:rPr lang="en-US" sz="1200" dirty="0">
-                          <a:solidFill>
-                            <a:srgbClr val="33333B"/>
-                          </a:solidFill>
-                          <a:latin typeface="Calibri" pitchFamily="34" charset="0"/>
-                          <a:ea typeface="Calibri" pitchFamily="34" charset="-122"/>
-                          <a:cs typeface="Calibri" pitchFamily="34" charset="-120"/>
-                        </a:rPr>
-                        <a:t>Binaries are not code-signed</a:t>
-                      </a:r>
-                      <a:endParaRPr lang="en-US" sz="1200" dirty="0">
-                        <a:latin typeface="Calibri" charset="0"/>
-                        <a:ea typeface="Calibri" charset="0"/>
-                        <a:cs typeface="Calibri" charset="0"/>
-                      </a:endParaRPr>
-                    </a:p>
-                  </a:txBody>
-                  <a:tcPr marL="76200" marR="76200" marT="76200" marB="76200" anchor="ctr">
-                    <a:lnL w="9525" cap="flat" cmpd="sng" algn="ctr">
-                      <a:solidFill>
-                        <a:srgbClr val="D8DAE6"/>
-                      </a:solidFill>
-                      <a:prstDash val="solid"/>
-                      <a:round/>
-                      <a:headEnd type="none" w="med" len="med"/>
-                      <a:tailEnd type="none" w="med" len="med"/>
-                    </a:lnL>
-                    <a:lnR w="9525" cap="flat" cmpd="sng" algn="ctr">
-                      <a:solidFill>
-                        <a:srgbClr val="D8DAE6"/>
-                      </a:solidFill>
-                      <a:prstDash val="solid"/>
-                      <a:round/>
-                      <a:headEnd type="none" w="med" len="med"/>
-                      <a:tailEnd type="none" w="med" len="med"/>
-                    </a:lnR>
-                    <a:lnT w="9525" cap="flat" cmpd="sng" algn="ctr">
-                      <a:solidFill>
-                        <a:srgbClr val="D8DAE6"/>
-                      </a:solidFill>
-                      <a:prstDash val="solid"/>
-                      <a:round/>
-                      <a:headEnd type="none" w="med" len="med"/>
-                      <a:tailEnd type="none" w="med" len="med"/>
-                    </a:lnT>
-                    <a:lnB w="9525" cap="flat" cmpd="sng" algn="ctr">
-                      <a:solidFill>
-                        <a:srgbClr val="D8DAE6"/>
-                      </a:solidFill>
-                      <a:prstDash val="solid"/>
-                      <a:round/>
-                      <a:headEnd type="none" w="med" len="med"/>
-                      <a:tailEnd type="none" w="med" len="med"/>
-                    </a:lnB>
-                  </a:tcPr>
-                </a:tc>
-                <a:tc>
-                  <a:txBody>
-                    <a:bodyPr/>
-                    <a:lstStyle/>
-                    <a:p>
-                      <a:pPr indent="0" marL="0">
-                        <a:buNone/>
-                      </a:pPr>
-                      <a:r>
-                        <a:rPr lang="en-US" sz="1200" dirty="0">
-                          <a:solidFill>
-                            <a:srgbClr val="33333B"/>
-                          </a:solidFill>
-                          <a:latin typeface="Calibri" pitchFamily="34" charset="0"/>
-                          <a:ea typeface="Calibri" pitchFamily="34" charset="-122"/>
-                          <a:cs typeface="Calibri" pitchFamily="34" charset="-120"/>
-                        </a:rPr>
-                        <a:t>Windows warns on download; macOS blocks it outright</a:t>
-                      </a:r>
-                      <a:endParaRPr lang="en-US" sz="1200" dirty="0">
-                        <a:latin typeface="Calibri" charset="0"/>
-                        <a:ea typeface="Calibri" charset="0"/>
-                        <a:cs typeface="Calibri" charset="0"/>
-                      </a:endParaRPr>
-                    </a:p>
-                  </a:txBody>
-                  <a:tcPr marL="76200" marR="76200" marT="76200" marB="76200" anchor="ctr">
-                    <a:lnL w="9525" cap="flat" cmpd="sng" algn="ctr">
-                      <a:solidFill>
-                        <a:srgbClr val="D8DAE6"/>
-                      </a:solidFill>
-                      <a:prstDash val="solid"/>
-                      <a:round/>
-                      <a:headEnd type="none" w="med" len="med"/>
-                      <a:tailEnd type="none" w="med" len="med"/>
-                    </a:lnL>
-                    <a:lnR w="9525" cap="flat" cmpd="sng" algn="ctr">
-                      <a:solidFill>
-                        <a:srgbClr val="D8DAE6"/>
-                      </a:solidFill>
-                      <a:prstDash val="solid"/>
-                      <a:round/>
-                      <a:headEnd type="none" w="med" len="med"/>
-                      <a:tailEnd type="none" w="med" len="med"/>
-                    </a:lnR>
-                    <a:lnT w="9525" cap="flat" cmpd="sng" algn="ctr">
-                      <a:solidFill>
-                        <a:srgbClr val="D8DAE6"/>
-                      </a:solidFill>
-                      <a:prstDash val="solid"/>
-                      <a:round/>
-                      <a:headEnd type="none" w="med" len="med"/>
-                      <a:tailEnd type="none" w="med" len="med"/>
-                    </a:lnT>
-                    <a:lnB w="9525" cap="flat" cmpd="sng" algn="ctr">
-                      <a:solidFill>
-                        <a:srgbClr val="D8DAE6"/>
-                      </a:solidFill>
-                      <a:prstDash val="solid"/>
-                      <a:round/>
-                      <a:headEnd type="none" w="med" len="med"/>
-                      <a:tailEnd type="none" w="med" len="med"/>
-                    </a:lnB>
-                  </a:tcPr>
-                </a:tc>
-                <a:tc>
-                  <a:txBody>
-                    <a:bodyPr/>
-                    <a:lstStyle/>
-                    <a:p>
-                      <a:pPr indent="0" marL="0">
-                        <a:buNone/>
-                      </a:pPr>
-                      <a:r>
-                        <a:rPr lang="en-US" sz="1200" dirty="0">
-                          <a:solidFill>
-                            <a:srgbClr val="33333B"/>
-                          </a:solidFill>
-                          <a:latin typeface="Calibri" pitchFamily="34" charset="0"/>
-                          <a:ea typeface="Calibri" pitchFamily="34" charset="-122"/>
-                          <a:cs typeface="Calibri" pitchFamily="34" charset="-120"/>
-                        </a:rPr>
-                        <a:t>Needs a certificate — our main ask</a:t>
-                      </a:r>
-                      <a:endParaRPr lang="en-US" sz="1200" dirty="0">
-                        <a:latin typeface="Calibri" charset="0"/>
-                        <a:ea typeface="Calibri" charset="0"/>
-                        <a:cs typeface="Calibri" charset="0"/>
-                      </a:endParaRPr>
-                    </a:p>
-                  </a:txBody>
-                  <a:tcPr marL="76200" marR="76200" marT="76200" marB="76200" anchor="ctr">
-                    <a:lnL w="9525" cap="flat" cmpd="sng" algn="ctr">
-                      <a:solidFill>
-                        <a:srgbClr val="D8DAE6"/>
-                      </a:solidFill>
-                      <a:prstDash val="solid"/>
-                      <a:round/>
-                      <a:headEnd type="none" w="med" len="med"/>
-                      <a:tailEnd type="none" w="med" len="med"/>
-                    </a:lnL>
-                    <a:lnR w="9525" cap="flat" cmpd="sng" algn="ctr">
-                      <a:solidFill>
-                        <a:srgbClr val="D8DAE6"/>
-                      </a:solidFill>
-                      <a:prstDash val="solid"/>
-                      <a:round/>
-                      <a:headEnd type="none" w="med" len="med"/>
-                      <a:tailEnd type="none" w="med" len="med"/>
-                    </a:lnR>
-                    <a:lnT w="9525" cap="flat" cmpd="sng" algn="ctr">
-                      <a:solidFill>
-                        <a:srgbClr val="D8DAE6"/>
-                      </a:solidFill>
-                      <a:prstDash val="solid"/>
-                      <a:round/>
-                      <a:headEnd type="none" w="med" len="med"/>
-                      <a:tailEnd type="none" w="med" len="med"/>
-                    </a:lnT>
-                    <a:lnB w="9525" cap="flat" cmpd="sng" algn="ctr">
-                      <a:solidFill>
-                        <a:srgbClr val="D8DAE6"/>
-                      </a:solidFill>
-                      <a:prstDash val="solid"/>
-                      <a:round/>
-                      <a:headEnd type="none" w="med" len="med"/>
-                      <a:tailEnd type="none" w="med" len="med"/>
-                    </a:lnB>
-                  </a:tcPr>
-                </a:tc>
-              </a:tr>
-              <a:tr h="457200">
-                <a:tc>
-                  <a:txBody>
-                    <a:bodyPr/>
-                    <a:lstStyle/>
-                    <a:p>
-                      <a:pPr indent="0" marL="0">
-                        <a:buNone/>
-                      </a:pPr>
-                      <a:r>
-                        <a:rPr lang="en-US" sz="1200" dirty="0">
-                          <a:solidFill>
-                            <a:srgbClr val="33333B"/>
-                          </a:solidFill>
-                          <a:latin typeface="Calibri" pitchFamily="34" charset="0"/>
-                          <a:ea typeface="Calibri" pitchFamily="34" charset="-122"/>
-                          <a:cs typeface="Calibri" pitchFamily="34" charset="-120"/>
-                        </a:rPr>
-                        <a:t>Chromium version is pinned</a:t>
-                      </a:r>
-                      <a:endParaRPr lang="en-US" sz="1200" dirty="0">
-                        <a:latin typeface="Calibri" charset="0"/>
-                        <a:ea typeface="Calibri" charset="0"/>
-                        <a:cs typeface="Calibri" charset="0"/>
-                      </a:endParaRPr>
-                    </a:p>
-                  </a:txBody>
-                  <a:tcPr marL="76200" marR="76200" marT="76200" marB="76200" anchor="ctr">
-                    <a:lnL w="9525" cap="flat" cmpd="sng" algn="ctr">
-                      <a:solidFill>
-                        <a:srgbClr val="D8DAE6"/>
-                      </a:solidFill>
-                      <a:prstDash val="solid"/>
-                      <a:round/>
-                      <a:headEnd type="none" w="med" len="med"/>
-                      <a:tailEnd type="none" w="med" len="med"/>
-                    </a:lnL>
-                    <a:lnR w="9525" cap="flat" cmpd="sng" algn="ctr">
-                      <a:solidFill>
-                        <a:srgbClr val="D8DAE6"/>
-                      </a:solidFill>
-                      <a:prstDash val="solid"/>
-                      <a:round/>
-                      <a:headEnd type="none" w="med" len="med"/>
-                      <a:tailEnd type="none" w="med" len="med"/>
-                    </a:lnR>
-                    <a:lnT w="9525" cap="flat" cmpd="sng" algn="ctr">
-                      <a:solidFill>
-                        <a:srgbClr val="D8DAE6"/>
-                      </a:solidFill>
-                      <a:prstDash val="solid"/>
-                      <a:round/>
-                      <a:headEnd type="none" w="med" len="med"/>
-                      <a:tailEnd type="none" w="med" len="med"/>
-                    </a:lnT>
-                    <a:lnB w="9525" cap="flat" cmpd="sng" algn="ctr">
-                      <a:solidFill>
-                        <a:srgbClr val="D8DAE6"/>
-                      </a:solidFill>
-                      <a:prstDash val="solid"/>
-                      <a:round/>
-                      <a:headEnd type="none" w="med" len="med"/>
-                      <a:tailEnd type="none" w="med" len="med"/>
-                    </a:lnB>
-                  </a:tcPr>
-                </a:tc>
-                <a:tc>
-                  <a:txBody>
-                    <a:bodyPr/>
-                    <a:lstStyle/>
-                    <a:p>
-                      <a:pPr indent="0" marL="0">
-                        <a:buNone/>
-                      </a:pPr>
-                      <a:r>
-                        <a:rPr lang="en-US" sz="1200" dirty="0">
-                          <a:solidFill>
-                            <a:srgbClr val="33333B"/>
-                          </a:solidFill>
-                          <a:latin typeface="Calibri" pitchFamily="34" charset="0"/>
-                          <a:ea typeface="Calibri" pitchFamily="34" charset="-122"/>
-                          <a:cs typeface="Calibri" pitchFamily="34" charset="-120"/>
-                        </a:rPr>
-                        <a:t>Not patched by ITS browser management</a:t>
-                      </a:r>
-                      <a:endParaRPr lang="en-US" sz="1200" dirty="0">
-                        <a:latin typeface="Calibri" charset="0"/>
-                        <a:ea typeface="Calibri" charset="0"/>
-                        <a:cs typeface="Calibri" charset="0"/>
-                      </a:endParaRPr>
-                    </a:p>
-                  </a:txBody>
-                  <a:tcPr marL="76200" marR="76200" marT="76200" marB="76200" anchor="ctr">
-                    <a:lnL w="9525" cap="flat" cmpd="sng" algn="ctr">
-                      <a:solidFill>
-                        <a:srgbClr val="D8DAE6"/>
-                      </a:solidFill>
-                      <a:prstDash val="solid"/>
-                      <a:round/>
-                      <a:headEnd type="none" w="med" len="med"/>
-                      <a:tailEnd type="none" w="med" len="med"/>
-                    </a:lnL>
-                    <a:lnR w="9525" cap="flat" cmpd="sng" algn="ctr">
-                      <a:solidFill>
-                        <a:srgbClr val="D8DAE6"/>
-                      </a:solidFill>
-                      <a:prstDash val="solid"/>
-                      <a:round/>
-                      <a:headEnd type="none" w="med" len="med"/>
-                      <a:tailEnd type="none" w="med" len="med"/>
-                    </a:lnR>
-                    <a:lnT w="9525" cap="flat" cmpd="sng" algn="ctr">
-                      <a:solidFill>
-                        <a:srgbClr val="D8DAE6"/>
-                      </a:solidFill>
-                      <a:prstDash val="solid"/>
-                      <a:round/>
-                      <a:headEnd type="none" w="med" len="med"/>
-                      <a:tailEnd type="none" w="med" len="med"/>
-                    </a:lnT>
-                    <a:lnB w="9525" cap="flat" cmpd="sng" algn="ctr">
-                      <a:solidFill>
-                        <a:srgbClr val="D8DAE6"/>
-                      </a:solidFill>
-                      <a:prstDash val="solid"/>
-                      <a:round/>
-                      <a:headEnd type="none" w="med" len="med"/>
-                      <a:tailEnd type="none" w="med" len="med"/>
-                    </a:lnB>
-                  </a:tcPr>
-                </a:tc>
-                <a:tc>
-                  <a:txBody>
-                    <a:bodyPr/>
-                    <a:lstStyle/>
-                    <a:p>
-                      <a:pPr indent="0" marL="0">
-                        <a:buNone/>
-                      </a:pPr>
-                      <a:r>
-                        <a:rPr lang="en-US" sz="1200" dirty="0">
-                          <a:solidFill>
-                            <a:srgbClr val="33333B"/>
-                          </a:solidFill>
-                          <a:latin typeface="Calibri" pitchFamily="34" charset="0"/>
-                          <a:ea typeface="Calibri" pitchFamily="34" charset="-122"/>
-                          <a:cs typeface="Calibri" pitchFamily="34" charset="-120"/>
-                        </a:rPr>
-                        <a:t>Rebuild and redistribute on advisories</a:t>
-                      </a:r>
-                      <a:endParaRPr lang="en-US" sz="1200" dirty="0">
-                        <a:latin typeface="Calibri" charset="0"/>
-                        <a:ea typeface="Calibri" charset="0"/>
-                        <a:cs typeface="Calibri" charset="0"/>
-                      </a:endParaRPr>
-                    </a:p>
-                  </a:txBody>
-                  <a:tcPr marL="76200" marR="76200" marT="76200" marB="76200" anchor="ctr">
-                    <a:lnL w="9525" cap="flat" cmpd="sng" algn="ctr">
-                      <a:solidFill>
-                        <a:srgbClr val="D8DAE6"/>
-                      </a:solidFill>
-                      <a:prstDash val="solid"/>
-                      <a:round/>
-                      <a:headEnd type="none" w="med" len="med"/>
-                      <a:tailEnd type="none" w="med" len="med"/>
-                    </a:lnL>
-                    <a:lnR w="9525" cap="flat" cmpd="sng" algn="ctr">
-                      <a:solidFill>
-                        <a:srgbClr val="D8DAE6"/>
-                      </a:solidFill>
-                      <a:prstDash val="solid"/>
-                      <a:round/>
-                      <a:headEnd type="none" w="med" len="med"/>
-                      <a:tailEnd type="none" w="med" len="med"/>
-                    </a:lnR>
-                    <a:lnT w="9525" cap="flat" cmpd="sng" algn="ctr">
-                      <a:solidFill>
-                        <a:srgbClr val="D8DAE6"/>
-                      </a:solidFill>
-                      <a:prstDash val="solid"/>
-                      <a:round/>
-                      <a:headEnd type="none" w="med" len="med"/>
-                      <a:tailEnd type="none" w="med" len="med"/>
-                    </a:lnT>
-                    <a:lnB w="9525" cap="flat" cmpd="sng" algn="ctr">
-                      <a:solidFill>
-                        <a:srgbClr val="D8DAE6"/>
-                      </a:solidFill>
-                      <a:prstDash val="solid"/>
-                      <a:round/>
-                      <a:headEnd type="none" w="med" len="med"/>
-                      <a:tailEnd type="none" w="med" len="med"/>
-                    </a:lnB>
-                  </a:tcPr>
-                </a:tc>
-              </a:tr>
-              <a:tr h="457200">
-                <a:tc>
-                  <a:txBody>
-                    <a:bodyPr/>
-                    <a:lstStyle/>
-                    <a:p>
-                      <a:pPr indent="0" marL="0">
-                        <a:buNone/>
-                      </a:pPr>
-                      <a:r>
-                        <a:rPr lang="en-US" sz="1200" dirty="0">
-                          <a:solidFill>
-                            <a:srgbClr val="33333B"/>
-                          </a:solidFill>
-                          <a:latin typeface="Calibri" pitchFamily="34" charset="0"/>
-                          <a:ea typeface="Calibri" pitchFamily="34" charset="-122"/>
-                          <a:cs typeface="Calibri" pitchFamily="34" charset="-120"/>
-                        </a:rPr>
-                        <a:t>Build tooling reports findings</a:t>
-                      </a:r>
-                      <a:endParaRPr lang="en-US" sz="1200" dirty="0">
-                        <a:latin typeface="Calibri" charset="0"/>
-                        <a:ea typeface="Calibri" charset="0"/>
-                        <a:cs typeface="Calibri" charset="0"/>
-                      </a:endParaRPr>
-                    </a:p>
-                  </a:txBody>
-                  <a:tcPr marL="76200" marR="76200" marT="76200" marB="76200" anchor="ctr">
-                    <a:lnL w="9525" cap="flat" cmpd="sng" algn="ctr">
-                      <a:solidFill>
-                        <a:srgbClr val="D8DAE6"/>
-                      </a:solidFill>
-                      <a:prstDash val="solid"/>
-                      <a:round/>
-                      <a:headEnd type="none" w="med" len="med"/>
-                      <a:tailEnd type="none" w="med" len="med"/>
-                    </a:lnL>
-                    <a:lnR w="9525" cap="flat" cmpd="sng" algn="ctr">
-                      <a:solidFill>
-                        <a:srgbClr val="D8DAE6"/>
-                      </a:solidFill>
-                      <a:prstDash val="solid"/>
-                      <a:round/>
-                      <a:headEnd type="none" w="med" len="med"/>
-                      <a:tailEnd type="none" w="med" len="med"/>
-                    </a:lnR>
-                    <a:lnT w="9525" cap="flat" cmpd="sng" algn="ctr">
-                      <a:solidFill>
-                        <a:srgbClr val="D8DAE6"/>
-                      </a:solidFill>
-                      <a:prstDash val="solid"/>
-                      <a:round/>
-                      <a:headEnd type="none" w="med" len="med"/>
-                      <a:tailEnd type="none" w="med" len="med"/>
-                    </a:lnT>
-                    <a:lnB w="9525" cap="flat" cmpd="sng" algn="ctr">
-                      <a:solidFill>
-                        <a:srgbClr val="D8DAE6"/>
-                      </a:solidFill>
-                      <a:prstDash val="solid"/>
-                      <a:round/>
-                      <a:headEnd type="none" w="med" len="med"/>
-                      <a:tailEnd type="none" w="med" len="med"/>
-                    </a:lnB>
-                  </a:tcPr>
-                </a:tc>
-                <a:tc>
-                  <a:txBody>
-                    <a:bodyPr/>
-                    <a:lstStyle/>
-                    <a:p>
-                      <a:pPr indent="0" marL="0">
-                        <a:buNone/>
-                      </a:pPr>
-                      <a:r>
-                        <a:rPr lang="en-US" sz="1200" dirty="0">
-                          <a:solidFill>
-                            <a:srgbClr val="33333B"/>
-                          </a:solidFill>
-                          <a:latin typeface="Calibri" pitchFamily="34" charset="0"/>
-                          <a:ea typeface="Calibri" pitchFamily="34" charset="-122"/>
-                          <a:cs typeface="Calibri" pitchFamily="34" charset="-120"/>
-                        </a:rPr>
-                        <a:t>None reach users; shipped scope is zero</a:t>
-                      </a:r>
-                      <a:endParaRPr lang="en-US" sz="1200" dirty="0">
-                        <a:latin typeface="Calibri" charset="0"/>
-                        <a:ea typeface="Calibri" charset="0"/>
-                        <a:cs typeface="Calibri" charset="0"/>
-                      </a:endParaRPr>
-                    </a:p>
-                  </a:txBody>
-                  <a:tcPr marL="76200" marR="76200" marT="76200" marB="76200" anchor="ctr">
-                    <a:lnL w="9525" cap="flat" cmpd="sng" algn="ctr">
-                      <a:solidFill>
-                        <a:srgbClr val="D8DAE6"/>
-                      </a:solidFill>
-                      <a:prstDash val="solid"/>
-                      <a:round/>
-                      <a:headEnd type="none" w="med" len="med"/>
-                      <a:tailEnd type="none" w="med" len="med"/>
-                    </a:lnL>
-                    <a:lnR w="9525" cap="flat" cmpd="sng" algn="ctr">
-                      <a:solidFill>
-                        <a:srgbClr val="D8DAE6"/>
-                      </a:solidFill>
-                      <a:prstDash val="solid"/>
-                      <a:round/>
-                      <a:headEnd type="none" w="med" len="med"/>
-                      <a:tailEnd type="none" w="med" len="med"/>
-                    </a:lnR>
-                    <a:lnT w="9525" cap="flat" cmpd="sng" algn="ctr">
-                      <a:solidFill>
-                        <a:srgbClr val="D8DAE6"/>
-                      </a:solidFill>
-                      <a:prstDash val="solid"/>
-                      <a:round/>
-                      <a:headEnd type="none" w="med" len="med"/>
-                      <a:tailEnd type="none" w="med" len="med"/>
-                    </a:lnT>
-                    <a:lnB w="9525" cap="flat" cmpd="sng" algn="ctr">
-                      <a:solidFill>
-                        <a:srgbClr val="D8DAE6"/>
-                      </a:solidFill>
-                      <a:prstDash val="solid"/>
-                      <a:round/>
-                      <a:headEnd type="none" w="med" len="med"/>
-                      <a:tailEnd type="none" w="med" len="med"/>
-                    </a:lnB>
-                  </a:tcPr>
-                </a:tc>
-                <a:tc>
-                  <a:txBody>
-                    <a:bodyPr/>
-                    <a:lstStyle/>
-                    <a:p>
-                      <a:pPr indent="0" marL="0">
-                        <a:buNone/>
-                      </a:pPr>
-                      <a:r>
-                        <a:rPr lang="en-US" sz="1200" dirty="0">
-                          <a:solidFill>
-                            <a:srgbClr val="33333B"/>
-                          </a:solidFill>
-                          <a:latin typeface="Calibri" pitchFamily="34" charset="0"/>
-                          <a:ea typeface="Calibri" pitchFamily="34" charset="-122"/>
-                          <a:cs typeface="Calibri" pitchFamily="34" charset="-120"/>
-                        </a:rPr>
-                        <a:t>Build-machine hygiene, tracked</a:t>
-                      </a:r>
-                      <a:endParaRPr lang="en-US" sz="1200" dirty="0">
-                        <a:latin typeface="Calibri" charset="0"/>
-                        <a:ea typeface="Calibri" charset="0"/>
-                        <a:cs typeface="Calibri" charset="0"/>
-                      </a:endParaRPr>
-                    </a:p>
-                  </a:txBody>
-                  <a:tcPr marL="76200" marR="76200" marT="76200" marB="76200" anchor="ctr">
-                    <a:lnL w="9525" cap="flat" cmpd="sng" algn="ctr">
-                      <a:solidFill>
-                        <a:srgbClr val="D8DAE6"/>
-                      </a:solidFill>
-                      <a:prstDash val="solid"/>
-                      <a:round/>
-                      <a:headEnd type="none" w="med" len="med"/>
-                      <a:tailEnd type="none" w="med" len="med"/>
-                    </a:lnL>
-                    <a:lnR w="9525" cap="flat" cmpd="sng" algn="ctr">
-                      <a:solidFill>
-                        <a:srgbClr val="D8DAE6"/>
-                      </a:solidFill>
-                      <a:prstDash val="solid"/>
-                      <a:round/>
-                      <a:headEnd type="none" w="med" len="med"/>
-                      <a:tailEnd type="none" w="med" len="med"/>
-                    </a:lnR>
-                    <a:lnT w="9525" cap="flat" cmpd="sng" algn="ctr">
-                      <a:solidFill>
-                        <a:srgbClr val="D8DAE6"/>
-                      </a:solidFill>
-                      <a:prstDash val="solid"/>
-                      <a:round/>
-                      <a:headEnd type="none" w="med" len="med"/>
-                      <a:tailEnd type="none" w="med" len="med"/>
-                    </a:lnT>
-                    <a:lnB w="9525" cap="flat" cmpd="sng" algn="ctr">
-                      <a:solidFill>
-                        <a:srgbClr val="D8DAE6"/>
-                      </a:solidFill>
-                      <a:prstDash val="solid"/>
-                      <a:round/>
-                      <a:headEnd type="none" w="med" len="med"/>
-                      <a:tailEnd type="none" w="med" len="med"/>
-                    </a:lnB>
-                  </a:tcPr>
-                </a:tc>
-              </a:tr>
-              <a:tr h="457200">
-                <a:tc>
-                  <a:txBody>
-                    <a:bodyPr/>
-                    <a:lstStyle/>
-                    <a:p>
-                      <a:pPr indent="0" marL="0">
-                        <a:buNone/>
-                      </a:pPr>
-                      <a:r>
-                        <a:rPr lang="en-US" sz="1200" dirty="0">
-                          <a:solidFill>
-                            <a:srgbClr val="33333B"/>
-                          </a:solidFill>
-                          <a:latin typeface="Calibri" pitchFamily="34" charset="0"/>
-                          <a:ea typeface="Calibri" pitchFamily="34" charset="-122"/>
-                          <a:cs typeface="Calibri" pitchFamily="34" charset="-120"/>
-                        </a:rPr>
-                        <a:t>macOS build not yet produced</a:t>
-                      </a:r>
-                      <a:endParaRPr lang="en-US" sz="1200" dirty="0">
-                        <a:latin typeface="Calibri" charset="0"/>
-                        <a:ea typeface="Calibri" charset="0"/>
-                        <a:cs typeface="Calibri" charset="0"/>
-                      </a:endParaRPr>
-                    </a:p>
-                  </a:txBody>
-                  <a:tcPr marL="76200" marR="76200" marT="76200" marB="76200" anchor="ctr">
-                    <a:lnL w="9525" cap="flat" cmpd="sng" algn="ctr">
-                      <a:solidFill>
-                        <a:srgbClr val="D8DAE6"/>
-                      </a:solidFill>
-                      <a:prstDash val="solid"/>
-                      <a:round/>
-                      <a:headEnd type="none" w="med" len="med"/>
-                      <a:tailEnd type="none" w="med" len="med"/>
-                    </a:lnL>
-                    <a:lnR w="9525" cap="flat" cmpd="sng" algn="ctr">
-                      <a:solidFill>
-                        <a:srgbClr val="D8DAE6"/>
-                      </a:solidFill>
-                      <a:prstDash val="solid"/>
-                      <a:round/>
-                      <a:headEnd type="none" w="med" len="med"/>
-                      <a:tailEnd type="none" w="med" len="med"/>
-                    </a:lnR>
-                    <a:lnT w="9525" cap="flat" cmpd="sng" algn="ctr">
-                      <a:solidFill>
-                        <a:srgbClr val="D8DAE6"/>
-                      </a:solidFill>
-                      <a:prstDash val="solid"/>
-                      <a:round/>
-                      <a:headEnd type="none" w="med" len="med"/>
-                      <a:tailEnd type="none" w="med" len="med"/>
-                    </a:lnT>
-                    <a:lnB w="9525" cap="flat" cmpd="sng" algn="ctr">
-                      <a:solidFill>
-                        <a:srgbClr val="D8DAE6"/>
-                      </a:solidFill>
-                      <a:prstDash val="solid"/>
-                      <a:round/>
-                      <a:headEnd type="none" w="med" len="med"/>
-                      <a:tailEnd type="none" w="med" len="med"/>
-                    </a:lnB>
-                  </a:tcPr>
-                </a:tc>
-                <a:tc>
-                  <a:txBody>
-                    <a:bodyPr/>
-                    <a:lstStyle/>
-                    <a:p>
-                      <a:pPr indent="0" marL="0">
-                        <a:buNone/>
-                      </a:pPr>
-                      <a:r>
-                        <a:rPr lang="en-US" sz="1200" dirty="0">
-                          <a:solidFill>
-                            <a:srgbClr val="33333B"/>
-                          </a:solidFill>
-                          <a:latin typeface="Calibri" pitchFamily="34" charset="0"/>
-                          <a:ea typeface="Calibri" pitchFamily="34" charset="-122"/>
-                          <a:cs typeface="Calibri" pitchFamily="34" charset="-120"/>
-                        </a:rPr>
-                        <a:t>Mac users build locally from source today</a:t>
-                      </a:r>
-                      <a:endParaRPr lang="en-US" sz="1200" dirty="0">
-                        <a:latin typeface="Calibri" charset="0"/>
-                        <a:ea typeface="Calibri" charset="0"/>
-                        <a:cs typeface="Calibri" charset="0"/>
-                      </a:endParaRPr>
-                    </a:p>
-                  </a:txBody>
-                  <a:tcPr marL="76200" marR="76200" marT="76200" marB="76200" anchor="ctr">
-                    <a:lnL w="9525" cap="flat" cmpd="sng" algn="ctr">
-                      <a:solidFill>
-                        <a:srgbClr val="D8DAE6"/>
-                      </a:solidFill>
-                      <a:prstDash val="solid"/>
-                      <a:round/>
-                      <a:headEnd type="none" w="med" len="med"/>
-                      <a:tailEnd type="none" w="med" len="med"/>
-                    </a:lnL>
-                    <a:lnR w="9525" cap="flat" cmpd="sng" algn="ctr">
-                      <a:solidFill>
-                        <a:srgbClr val="D8DAE6"/>
-                      </a:solidFill>
-                      <a:prstDash val="solid"/>
-                      <a:round/>
-                      <a:headEnd type="none" w="med" len="med"/>
-                      <a:tailEnd type="none" w="med" len="med"/>
-                    </a:lnR>
-                    <a:lnT w="9525" cap="flat" cmpd="sng" algn="ctr">
-                      <a:solidFill>
-                        <a:srgbClr val="D8DAE6"/>
-                      </a:solidFill>
-                      <a:prstDash val="solid"/>
-                      <a:round/>
-                      <a:headEnd type="none" w="med" len="med"/>
-                      <a:tailEnd type="none" w="med" len="med"/>
-                    </a:lnT>
-                    <a:lnB w="9525" cap="flat" cmpd="sng" algn="ctr">
-                      <a:solidFill>
-                        <a:srgbClr val="D8DAE6"/>
-                      </a:solidFill>
-                      <a:prstDash val="solid"/>
-                      <a:round/>
-                      <a:headEnd type="none" w="med" len="med"/>
-                      <a:tailEnd type="none" w="med" len="med"/>
-                    </a:lnB>
-                  </a:tcPr>
-                </a:tc>
-                <a:tc>
-                  <a:txBody>
-                    <a:bodyPr/>
-                    <a:lstStyle/>
-                    <a:p>
-                      <a:pPr indent="0" marL="0">
-                        <a:buNone/>
-                      </a:pPr>
-                      <a:r>
-                        <a:rPr lang="en-US" sz="1200" dirty="0">
-                          <a:solidFill>
-                            <a:srgbClr val="33333B"/>
-                          </a:solidFill>
-                          <a:latin typeface="Calibri" pitchFamily="34" charset="0"/>
-                          <a:ea typeface="Calibri" pitchFamily="34" charset="-122"/>
-                          <a:cs typeface="Calibri" pitchFamily="34" charset="-120"/>
-                        </a:rPr>
-                        <a:t>Needs an Apple Developer account</a:t>
-                      </a:r>
-                      <a:endParaRPr lang="en-US" sz="1200" dirty="0">
-                        <a:latin typeface="Calibri" charset="0"/>
-                        <a:ea typeface="Calibri" charset="0"/>
-                        <a:cs typeface="Calibri" charset="0"/>
-                      </a:endParaRPr>
-                    </a:p>
-                  </a:txBody>
-                  <a:tcPr marL="76200" marR="76200" marT="76200" marB="76200" anchor="ctr">
-                    <a:lnL w="9525" cap="flat" cmpd="sng" algn="ctr">
-                      <a:solidFill>
-                        <a:srgbClr val="D8DAE6"/>
-                      </a:solidFill>
-                      <a:prstDash val="solid"/>
-                      <a:round/>
-                      <a:headEnd type="none" w="med" len="med"/>
-                      <a:tailEnd type="none" w="med" len="med"/>
-                    </a:lnL>
-                    <a:lnR w="9525" cap="flat" cmpd="sng" algn="ctr">
-                      <a:solidFill>
-                        <a:srgbClr val="D8DAE6"/>
-                      </a:solidFill>
-                      <a:prstDash val="solid"/>
-                      <a:round/>
-                      <a:headEnd type="none" w="med" len="med"/>
-                      <a:tailEnd type="none" w="med" len="med"/>
-                    </a:lnR>
-                    <a:lnT w="9525" cap="flat" cmpd="sng" algn="ctr">
-                      <a:solidFill>
-                        <a:srgbClr val="D8DAE6"/>
-                      </a:solidFill>
-                      <a:prstDash val="solid"/>
-                      <a:round/>
-                      <a:headEnd type="none" w="med" len="med"/>
-                      <a:tailEnd type="none" w="med" len="med"/>
-                    </a:lnT>
-                    <a:lnB w="9525" cap="flat" cmpd="sng" algn="ctr">
-                      <a:solidFill>
-                        <a:srgbClr val="D8DAE6"/>
-                      </a:solidFill>
-                      <a:prstDash val="solid"/>
-                      <a:round/>
-                      <a:headEnd type="none" w="med" len="med"/>
-                      <a:tailEnd type="none" w="med" len="med"/>
-                    </a:lnB>
-                  </a:tcPr>
-                </a:tc>
-              </a:tr>
-            </a:tbl>
-          </a:graphicData>
-        </a:graphic>
-      </p:graphicFrame>
-      <p:sp>
-        <p:nvSpPr>
-          <p:cNvPr id="5" name="Shape 2"/>
-          <p:cNvSpPr/>
-          <p:nvPr/>
-        </p:nvSpPr>
-        <p:spPr>
-          <a:xfrm>
-            <a:off x="594360" y="4892040"/>
-            <a:ext cx="10881360" cy="914400"/>
-          </a:xfrm>
-          <a:prstGeom prst="roundRect">
-            <a:avLst>
-              <a:gd name="adj" fmla="val 6000"/>
-            </a:avLst>
-          </a:prstGeom>
-          <a:solidFill>
-            <a:srgbClr val="F4F5F9"/>
-          </a:solidFill>
-          <a:ln w="9525">
-            <a:solidFill>
-              <a:srgbClr val="D8DAE6"/>
-            </a:solidFill>
-            <a:prstDash val="solid"/>
-          </a:ln>
-        </p:spPr>
-      </p:sp>
-      <p:sp>
-        <p:nvSpPr>
-          <p:cNvPr id="6" name="Text 3"/>
-          <p:cNvSpPr txBox="1"/>
-          <p:nvPr/>
-        </p:nvSpPr>
-        <p:spPr>
-          <a:xfrm>
-            <a:off x="960120" y="5120640"/>
-            <a:ext cx="10149840" cy="457200"/>
-          </a:xfrm>
-          <a:prstGeom prst="rect">
-            <a:avLst/>
-          </a:prstGeom>
-          <a:noFill/>
-          <a:ln/>
-        </p:spPr>
-        <p:txBody>
-          <a:bodyPr wrap="square" lIns="0" tIns="0" rIns="0" bIns="0" rtlCol="0" anchor="t"/>
-          <a:lstStyle/>
-          <a:p>
-            <a:pPr indent="0" marL="0">
-              <a:buNone/>
-            </a:pPr>
-            <a:r>
-              <a:rPr lang="en-US" sz="1300" b="1" dirty="0">
-                <a:solidFill>
-                  <a:srgbClr val="000054"/>
-                </a:solidFill>
-                <a:latin typeface="Calibri" pitchFamily="34" charset="0"/>
-                <a:ea typeface="Calibri" pitchFamily="34" charset="-122"/>
-                <a:cs typeface="Calibri" pitchFamily="34" charset="-120"/>
-              </a:rPr>
-              <a:t>Supporting documents in the repository:  SECURITY.md  ·  DEPENDENCIES.md  ·  lib/THIRD-PARTY-NOTICES.txt</a:t>
-            </a:r>
-            <a:endParaRPr lang="en-US" sz="1300" dirty="0"/>
-          </a:p>
-        </p:txBody>
-      </p:sp>
-      <p:pic>
-        <p:nvPicPr>
-          <p:cNvPr id="7" name="Image 0" descr="C:\Users\nguye\AppData\Local\Temp\claude\E--WORK-OFFLINE-apps-Adflow\c4dbe0b3-8f3b-4a26-ba73-6ba5f8057916\scratchpad\brand\rmit-full.png">    </p:cNvPr>
-          <p:cNvPicPr>
-            <a:picLocks noChangeAspect="1"/>
-          </p:cNvPicPr>
-          <p:nvPr/>
-        </p:nvPicPr>
-        <p:blipFill>
-          <a:blip r:embed="rId1"/>
-          <a:stretch>
-            <a:fillRect/>
-          </a:stretch>
-        </p:blipFill>
-        <p:spPr>
-          <a:xfrm>
-            <a:off x="594360" y="6272784"/>
-            <a:ext cx="841248" cy="292033"/>
-          </a:xfrm>
-          <a:prstGeom prst="rect">
-            <a:avLst/>
-          </a:prstGeom>
-        </p:spPr>
-      </p:pic>
-      <p:sp>
-        <p:nvSpPr>
-          <p:cNvPr id="8" name="Text 4"/>
-          <p:cNvSpPr txBox="1"/>
-          <p:nvPr/>
-        </p:nvSpPr>
-        <p:spPr>
-          <a:xfrm>
-            <a:off x="1572768" y="6309360"/>
-            <a:ext cx="6400800" cy="256032"/>
-          </a:xfrm>
-          <a:prstGeom prst="rect">
-            <a:avLst/>
-          </a:prstGeom>
-          <a:noFill/>
-          <a:ln/>
-        </p:spPr>
-        <p:txBody>
-          <a:bodyPr wrap="square" lIns="0" tIns="0" rIns="0" bIns="0" rtlCol="0" anchor="ctr"/>
-          <a:lstStyle/>
-          <a:p>
-            <a:pPr indent="0" marL="0">
-              <a:buNone/>
-            </a:pPr>
-            <a:r>
-              <a:rPr lang="en-US" sz="900" dirty="0">
-                <a:solidFill>
-                  <a:srgbClr val="9C9FB4"/>
-                </a:solidFill>
-                <a:latin typeface="Calibri" pitchFamily="34" charset="0"/>
-                <a:ea typeface="Calibri" pitchFamily="34" charset="-122"/>
-                <a:cs typeface="Calibri" pitchFamily="34" charset="-120"/>
-              </a:rPr>
-              <a:t>Adflow  ·  v0.61.1  ·  ITS review</a:t>
-            </a:r>
-            <a:endParaRPr lang="en-US" sz="900" dirty="0"/>
-          </a:p>
-        </p:txBody>
-      </p:sp>
-      <p:sp>
-        <p:nvSpPr>
-          <p:cNvPr id="9" name="Text 5"/>
-          <p:cNvSpPr txBox="1"/>
-          <p:nvPr/>
-        </p:nvSpPr>
-        <p:spPr>
-          <a:xfrm>
-            <a:off x="11064240" y="6309360"/>
-            <a:ext cx="502920" cy="256032"/>
-          </a:xfrm>
-          <a:prstGeom prst="rect">
-            <a:avLst/>
-          </a:prstGeom>
-          <a:noFill/>
-          <a:ln/>
-        </p:spPr>
-        <p:txBody>
-          <a:bodyPr wrap="square" lIns="0" tIns="0" rIns="0" bIns="0" rtlCol="0" anchor="ctr"/>
-          <a:lstStyle/>
-          <a:p>
-            <a:pPr algn="r" indent="0" marL="0">
-              <a:buNone/>
-            </a:pPr>
-            <a:r>
-              <a:rPr lang="en-US" sz="900" dirty="0">
-                <a:solidFill>
-                  <a:srgbClr val="9C9FB4"/>
-                </a:solidFill>
-                <a:latin typeface="Calibri" pitchFamily="34" charset="0"/>
-                <a:ea typeface="Calibri" pitchFamily="34" charset="-122"/>
-                <a:cs typeface="Calibri" pitchFamily="34" charset="-120"/>
-              </a:rPr>
-              <a:t>10</a:t>
-            </a:r>
-            <a:endParaRPr lang="en-US" sz="900" dirty="0"/>
-          </a:p>
-        </p:txBody>
-      </p:sp>
-    </p:spTree>
-  </p:cSld>
-  <p:clrMapOvr>
-    <a:masterClrMapping/>
-  </p:clrMapOvr>
-</p:sld>
-</file>
-
-<file path=ppt/slides/slide11.xml><?xml version="1.0" encoding="utf-8"?>
-<p:sld xmlns:a="http://schemas.openxmlformats.org/drawingml/2006/main" xmlns:r="http://schemas.openxmlformats.org/officeDocument/2006/relationships" xmlns:p="http://schemas.openxmlformats.org/presentationml/2006/main">
-  <p:cSld name="Slide 11">
+  <p:cSld name="Recap">
     <p:bg>
       <p:bgPr>
         <a:solidFill>
           <a:srgbClr val="000054"/>
         </a:solidFill>
+        <a:effectLst/>
       </p:bgPr>
     </p:bg>
     <p:spTree>
@@ -3549,14 +1987,14 @@
       </p:grpSpPr>
       <p:pic>
         <p:nvPicPr>
-          <p:cNvPr id="2" name="Image 0" descr="C:\Users\nguye\AppData\Local\Temp\claude\E--WORK-OFFLINE-apps-Adflow\c4dbe0b3-8f3b-4a26-ba73-6ba5f8057916\scratchpad\brand\pixel-red.png">    </p:cNvPr>
+          <p:cNvPr id="2" name="Image 0" descr="C:\Users\nguye\AppData\Local\Temp\claude\E--WORK-OFFLINE-apps-Adflow\c4dbe0b3-8f3b-4a26-ba73-6ba5f8057916\scratchpad\brand\pixel-red.png"/>
           <p:cNvPicPr>
             <a:picLocks noChangeAspect="1"/>
           </p:cNvPicPr>
           <p:nvPr/>
         </p:nvPicPr>
         <p:blipFill>
-          <a:blip r:embed="rId1">
+          <a:blip r:embed="rId3">
             <a:alphaModFix amt="22000"/>
           </a:blip>
           <a:stretch>
@@ -3575,14 +2013,14 @@
       </p:pic>
       <p:sp>
         <p:nvSpPr>
-          <p:cNvPr id="3" name="Text 0"/>
+          <p:cNvPr id="3" name="Text 3"/>
           <p:cNvSpPr txBox="1"/>
           <p:nvPr/>
         </p:nvSpPr>
         <p:spPr>
           <a:xfrm>
             <a:off x="594360" y="146304"/>
-            <a:ext cx="10972800" cy="274320"/>
+            <a:ext cx="10881360" cy="274320"/>
           </a:xfrm>
           <a:prstGeom prst="rect">
             <a:avLst/>
@@ -3594,11 +2032,11 @@
           <a:bodyPr wrap="square" lIns="0" tIns="0" rIns="0" bIns="0" rtlCol="0" anchor="ctr"/>
           <a:lstStyle/>
           <a:p>
-            <a:pPr algn="l" indent="0" marL="0">
+            <a:pPr marL="0" indent="0" algn="l">
               <a:buNone/>
             </a:pPr>
             <a:r>
-              <a:rPr lang="en-US" sz="1100" b="1" spc="200" kern="0" dirty="0">
+              <a:rPr lang="en-US" sz="1100" b="1" spc="200" dirty="0">
                 <a:solidFill>
                   <a:srgbClr val="E61E2A"/>
                 </a:solidFill>
@@ -3606,7 +2044,7 @@
                 <a:ea typeface="Calibri" pitchFamily="34" charset="-122"/>
                 <a:cs typeface="Calibri" pitchFamily="34" charset="-120"/>
               </a:rPr>
-              <a:t>WHAT WE ARE ASKING FOR</a:t>
+              <a:t>RECAP</a:t>
             </a:r>
             <a:endParaRPr lang="en-US" sz="1100" dirty="0"/>
           </a:p>
@@ -3614,7 +2052,7 @@
       </p:sp>
       <p:sp>
         <p:nvSpPr>
-          <p:cNvPr id="4" name="Text 1"/>
+          <p:cNvPr id="4" name="Text 4"/>
           <p:cNvSpPr txBox="1"/>
           <p:nvPr/>
         </p:nvSpPr>
@@ -3633,7 +2071,7 @@
           <a:bodyPr wrap="square" lIns="0" tIns="0" rIns="0" bIns="0" rtlCol="0" anchor="ctr"/>
           <a:lstStyle/>
           <a:p>
-            <a:pPr indent="0" marL="0">
+            <a:pPr marL="0" indent="0" algn="l">
               <a:buNone/>
             </a:pPr>
             <a:r>
@@ -3645,7 +2083,7 @@
                 <a:ea typeface="Cambria" pitchFamily="34" charset="-122"/>
                 <a:cs typeface="Cambria" pitchFamily="34" charset="-120"/>
               </a:rPr>
-              <a:t>Three decisions</a:t>
+              <a:t>Where Adflow stands</a:t>
             </a:r>
             <a:endParaRPr lang="en-US" sz="3600" dirty="0"/>
           </a:p>
@@ -3653,14 +2091,14 @@
       </p:sp>
       <p:sp>
         <p:nvSpPr>
-          <p:cNvPr id="5" name="Shape 2"/>
+          <p:cNvPr id="5" name="Shape 5"/>
           <p:cNvSpPr/>
           <p:nvPr/>
         </p:nvSpPr>
         <p:spPr>
           <a:xfrm>
-            <a:off x="594360" y="1572768"/>
-            <a:ext cx="10881360" cy="1261872"/>
+            <a:off x="594360" y="1417320"/>
+            <a:ext cx="5349240" cy="1600200"/>
           </a:xfrm>
           <a:prstGeom prst="roundRect">
             <a:avLst>
@@ -3680,14 +2118,14 @@
       </p:sp>
       <p:sp>
         <p:nvSpPr>
-          <p:cNvPr id="6" name="Shape 3"/>
+          <p:cNvPr id="6" name="Shape 6"/>
           <p:cNvSpPr/>
           <p:nvPr/>
         </p:nvSpPr>
         <p:spPr>
           <a:xfrm>
-            <a:off x="960120" y="2011680"/>
-            <a:ext cx="384048" cy="384048"/>
+            <a:off x="868680" y="1673352"/>
+            <a:ext cx="338328" cy="338328"/>
           </a:xfrm>
           <a:prstGeom prst="ellipse">
             <a:avLst/>
@@ -3705,14 +2143,14 @@
       </p:sp>
       <p:sp>
         <p:nvSpPr>
-          <p:cNvPr id="7" name="Text 4"/>
+          <p:cNvPr id="7" name="Text 7"/>
           <p:cNvSpPr txBox="1"/>
           <p:nvPr/>
         </p:nvSpPr>
         <p:spPr>
           <a:xfrm>
-            <a:off x="960120" y="2011680"/>
-            <a:ext cx="384048" cy="384048"/>
+            <a:off x="868680" y="1673352"/>
+            <a:ext cx="338328" cy="338328"/>
           </a:xfrm>
           <a:prstGeom prst="rect">
             <a:avLst/>
@@ -3724,11 +2162,11 @@
           <a:bodyPr wrap="square" lIns="0" tIns="0" rIns="0" bIns="0" rtlCol="0" anchor="ctr"/>
           <a:lstStyle/>
           <a:p>
-            <a:pPr algn="ctr" indent="0" marL="0">
+            <a:pPr marL="0" indent="0" algn="ctr">
               <a:buNone/>
             </a:pPr>
             <a:r>
-              <a:rPr lang="en-US" sz="1300" b="1" dirty="0">
+              <a:rPr lang="en-US" sz="1200" b="1" dirty="0">
                 <a:solidFill>
                   <a:srgbClr val="FFFFFF"/>
                 </a:solidFill>
@@ -3738,20 +2176,20 @@
               </a:rPr>
               <a:t>1</a:t>
             </a:r>
-            <a:endParaRPr lang="en-US" sz="1300" dirty="0"/>
+            <a:endParaRPr lang="en-US" sz="1200" dirty="0"/>
           </a:p>
         </p:txBody>
       </p:sp>
       <p:sp>
         <p:nvSpPr>
-          <p:cNvPr id="8" name="Text 5"/>
+          <p:cNvPr id="8" name="Text 8"/>
           <p:cNvSpPr txBox="1"/>
           <p:nvPr/>
         </p:nvSpPr>
         <p:spPr>
           <a:xfrm>
-            <a:off x="1554480" y="1801368"/>
-            <a:ext cx="9509760" cy="329184"/>
+            <a:off x="1408176" y="1691640"/>
+            <a:ext cx="4261104" cy="301752"/>
           </a:xfrm>
           <a:prstGeom prst="rect">
             <a:avLst/>
@@ -3760,10 +2198,10 @@
           <a:ln/>
         </p:spPr>
         <p:txBody>
-          <a:bodyPr wrap="square" lIns="0" tIns="0" rIns="0" bIns="0" rtlCol="0" anchor="t"/>
+          <a:bodyPr wrap="square" lIns="0" tIns="0" rIns="0" bIns="0" rtlCol="0" anchor="ctr"/>
           <a:lstStyle/>
           <a:p>
-            <a:pPr indent="0" marL="0">
+            <a:pPr marL="0" indent="0" algn="l">
               <a:buNone/>
             </a:pPr>
             <a:r>
@@ -3775,7 +2213,7 @@
                 <a:ea typeface="Calibri" pitchFamily="34" charset="-122"/>
                 <a:cs typeface="Calibri" pitchFamily="34" charset="-120"/>
               </a:rPr>
-              <a:t>Approve the application for internal use</a:t>
+              <a:t>What it is</a:t>
             </a:r>
             <a:endParaRPr lang="en-US" sz="1600" dirty="0"/>
           </a:p>
@@ -3783,14 +2221,14 @@
       </p:sp>
       <p:sp>
         <p:nvSpPr>
-          <p:cNvPr id="9" name="Text 6"/>
+          <p:cNvPr id="9" name="Text 9"/>
           <p:cNvSpPr txBox="1"/>
           <p:nvPr/>
         </p:nvSpPr>
         <p:spPr>
           <a:xfrm>
-            <a:off x="1554480" y="2167128"/>
-            <a:ext cx="9509760" cy="502920"/>
+            <a:off x="1408176" y="2084832"/>
+            <a:ext cx="4261104" cy="777240"/>
           </a:xfrm>
           <a:prstGeom prst="rect">
             <a:avLst/>
@@ -3802,7 +2240,7 @@
           <a:bodyPr wrap="square" lIns="0" tIns="0" rIns="0" bIns="0" rtlCol="0" anchor="t"/>
           <a:lstStyle/>
           <a:p>
-            <a:pPr indent="0" marL="0">
+            <a:pPr marL="0" indent="0" algn="l">
               <a:lnSpc>
                 <a:spcPct val="115000"/>
               </a:lnSpc>
@@ -3817,7 +2255,7 @@
                 <a:ea typeface="Calibri" pitchFamily="34" charset="-122"/>
                 <a:cs typeface="Calibri" pitchFamily="34" charset="-120"/>
               </a:rPr>
-              <a:t>Ready to scan today: unminified, dependency-free at runtime, with published checksums. Ready to run: docker compose up -d --build.</a:t>
+              <a:t>An in-house HTML5 display-ad builder with no backend, no accounts and no network traffic. Everything stays on the user’s machine.</a:t>
             </a:r>
             <a:endParaRPr lang="en-US" sz="1250" dirty="0"/>
           </a:p>
@@ -3825,14 +2263,14 @@
       </p:sp>
       <p:sp>
         <p:nvSpPr>
-          <p:cNvPr id="10" name="Shape 7"/>
+          <p:cNvPr id="10" name="Shape 10"/>
           <p:cNvSpPr/>
           <p:nvPr/>
         </p:nvSpPr>
         <p:spPr>
           <a:xfrm>
-            <a:off x="594360" y="2944368"/>
-            <a:ext cx="10881360" cy="1261872"/>
+            <a:off x="6126480" y="1417320"/>
+            <a:ext cx="5349240" cy="1600200"/>
           </a:xfrm>
           <a:prstGeom prst="roundRect">
             <a:avLst>
@@ -3852,14 +2290,14 @@
       </p:sp>
       <p:sp>
         <p:nvSpPr>
-          <p:cNvPr id="11" name="Shape 8"/>
+          <p:cNvPr id="11" name="Shape 11"/>
           <p:cNvSpPr/>
           <p:nvPr/>
         </p:nvSpPr>
         <p:spPr>
           <a:xfrm>
-            <a:off x="960120" y="3383280"/>
-            <a:ext cx="384048" cy="384048"/>
+            <a:off x="6400800" y="1673352"/>
+            <a:ext cx="338328" cy="338328"/>
           </a:xfrm>
           <a:prstGeom prst="ellipse">
             <a:avLst/>
@@ -3877,14 +2315,14 @@
       </p:sp>
       <p:sp>
         <p:nvSpPr>
-          <p:cNvPr id="12" name="Text 9"/>
+          <p:cNvPr id="12" name="Text 12"/>
           <p:cNvSpPr txBox="1"/>
           <p:nvPr/>
         </p:nvSpPr>
         <p:spPr>
           <a:xfrm>
-            <a:off x="960120" y="3383280"/>
-            <a:ext cx="384048" cy="384048"/>
+            <a:off x="6400800" y="1673352"/>
+            <a:ext cx="338328" cy="338328"/>
           </a:xfrm>
           <a:prstGeom prst="rect">
             <a:avLst/>
@@ -3896,11 +2334,11 @@
           <a:bodyPr wrap="square" lIns="0" tIns="0" rIns="0" bIns="0" rtlCol="0" anchor="ctr"/>
           <a:lstStyle/>
           <a:p>
-            <a:pPr algn="ctr" indent="0" marL="0">
+            <a:pPr marL="0" indent="0" algn="ctr">
               <a:buNone/>
             </a:pPr>
             <a:r>
-              <a:rPr lang="en-US" sz="1300" b="1" dirty="0">
+              <a:rPr lang="en-US" sz="1200" b="1" dirty="0">
                 <a:solidFill>
                   <a:srgbClr val="FFFFFF"/>
                 </a:solidFill>
@@ -3910,20 +2348,20 @@
               </a:rPr>
               <a:t>2</a:t>
             </a:r>
-            <a:endParaRPr lang="en-US" sz="1300" dirty="0"/>
+            <a:endParaRPr lang="en-US" sz="1200" dirty="0"/>
           </a:p>
         </p:txBody>
       </p:sp>
       <p:sp>
         <p:nvSpPr>
-          <p:cNvPr id="13" name="Text 10"/>
+          <p:cNvPr id="13" name="Text 13"/>
           <p:cNvSpPr txBox="1"/>
           <p:nvPr/>
         </p:nvSpPr>
         <p:spPr>
           <a:xfrm>
-            <a:off x="1554480" y="3172968"/>
-            <a:ext cx="9509760" cy="329184"/>
+            <a:off x="6940296" y="1691640"/>
+            <a:ext cx="4261104" cy="301752"/>
           </a:xfrm>
           <a:prstGeom prst="rect">
             <a:avLst/>
@@ -3932,10 +2370,10 @@
           <a:ln/>
         </p:spPr>
         <p:txBody>
-          <a:bodyPr wrap="square" lIns="0" tIns="0" rIns="0" bIns="0" rtlCol="0" anchor="t"/>
+          <a:bodyPr wrap="square" lIns="0" tIns="0" rIns="0" bIns="0" rtlCol="0" anchor="ctr"/>
           <a:lstStyle/>
           <a:p>
-            <a:pPr indent="0" marL="0">
+            <a:pPr marL="0" indent="0" algn="l">
               <a:buNone/>
             </a:pPr>
             <a:r>
@@ -3947,7 +2385,7 @@
                 <a:ea typeface="Calibri" pitchFamily="34" charset="-122"/>
                 <a:cs typeface="Calibri" pitchFamily="34" charset="-120"/>
               </a:rPr>
-              <a:t>Provide a code-signing certificate</a:t>
+              <a:t>How it is delivered</a:t>
             </a:r>
             <a:endParaRPr lang="en-US" sz="1600" dirty="0"/>
           </a:p>
@@ -3955,14 +2393,14 @@
       </p:sp>
       <p:sp>
         <p:nvSpPr>
-          <p:cNvPr id="14" name="Text 11"/>
+          <p:cNvPr id="14" name="Text 14"/>
           <p:cNvSpPr txBox="1"/>
           <p:nvPr/>
         </p:nvSpPr>
         <p:spPr>
           <a:xfrm>
-            <a:off x="1554480" y="3538728"/>
-            <a:ext cx="9509760" cy="502920"/>
+            <a:off x="6940296" y="2084832"/>
+            <a:ext cx="4261104" cy="777240"/>
           </a:xfrm>
           <a:prstGeom prst="rect">
             <a:avLst/>
@@ -3974,7 +2412,7 @@
           <a:bodyPr wrap="square" lIns="0" tIns="0" rIns="0" bIns="0" rtlCol="0" anchor="t"/>
           <a:lstStyle/>
           <a:p>
-            <a:pPr indent="0" marL="0">
+            <a:pPr marL="0" indent="0" algn="l">
               <a:lnSpc>
                 <a:spcPct val="115000"/>
               </a:lnSpc>
@@ -3989,7 +2427,7 @@
                 <a:ea typeface="Calibri" pitchFamily="34" charset="-122"/>
                 <a:cs typeface="Calibri" pitchFamily="34" charset="-120"/>
               </a:rPr>
-              <a:t>Removes the SmartScreen warning staff currently see, and is a prerequisite for any macOS distribution.</a:t>
+              <a:t>A portable desktop app for staff: Windows today, macOS in testing. The same code runs in a Docker container or on any static host.</a:t>
             </a:r>
             <a:endParaRPr lang="en-US" sz="1250" dirty="0"/>
           </a:p>
@@ -3997,14 +2435,14 @@
       </p:sp>
       <p:sp>
         <p:nvSpPr>
-          <p:cNvPr id="15" name="Shape 12"/>
+          <p:cNvPr id="15" name="Shape 15"/>
           <p:cNvSpPr/>
           <p:nvPr/>
         </p:nvSpPr>
         <p:spPr>
           <a:xfrm>
-            <a:off x="594360" y="4315968"/>
-            <a:ext cx="10881360" cy="1261872"/>
+            <a:off x="594360" y="3200400"/>
+            <a:ext cx="5349240" cy="1600200"/>
           </a:xfrm>
           <a:prstGeom prst="roundRect">
             <a:avLst>
@@ -4024,14 +2462,14 @@
       </p:sp>
       <p:sp>
         <p:nvSpPr>
-          <p:cNvPr id="16" name="Shape 13"/>
+          <p:cNvPr id="16" name="Shape 16"/>
           <p:cNvSpPr/>
           <p:nvPr/>
         </p:nvSpPr>
         <p:spPr>
           <a:xfrm>
-            <a:off x="960120" y="4754880"/>
-            <a:ext cx="384048" cy="384048"/>
+            <a:off x="868680" y="3456432"/>
+            <a:ext cx="338328" cy="338328"/>
           </a:xfrm>
           <a:prstGeom prst="ellipse">
             <a:avLst/>
@@ -4049,14 +2487,14 @@
       </p:sp>
       <p:sp>
         <p:nvSpPr>
-          <p:cNvPr id="17" name="Text 14"/>
+          <p:cNvPr id="17" name="Text 17"/>
           <p:cNvSpPr txBox="1"/>
           <p:nvPr/>
         </p:nvSpPr>
         <p:spPr>
           <a:xfrm>
-            <a:off x="960120" y="4754880"/>
-            <a:ext cx="384048" cy="384048"/>
+            <a:off x="868680" y="3456432"/>
+            <a:ext cx="338328" cy="338328"/>
           </a:xfrm>
           <a:prstGeom prst="rect">
             <a:avLst/>
@@ -4068,11 +2506,11 @@
           <a:bodyPr wrap="square" lIns="0" tIns="0" rIns="0" bIns="0" rtlCol="0" anchor="ctr"/>
           <a:lstStyle/>
           <a:p>
-            <a:pPr algn="ctr" indent="0" marL="0">
+            <a:pPr marL="0" indent="0" algn="ctr">
               <a:buNone/>
             </a:pPr>
             <a:r>
-              <a:rPr lang="en-US" sz="1300" b="1" dirty="0">
+              <a:rPr lang="en-US" sz="1200" b="1" dirty="0">
                 <a:solidFill>
                   <a:srgbClr val="FFFFFF"/>
                 </a:solidFill>
@@ -4082,20 +2520,20 @@
               </a:rPr>
               <a:t>3</a:t>
             </a:r>
-            <a:endParaRPr lang="en-US" sz="1300" dirty="0"/>
+            <a:endParaRPr lang="en-US" sz="1200" dirty="0"/>
           </a:p>
         </p:txBody>
       </p:sp>
       <p:sp>
         <p:nvSpPr>
-          <p:cNvPr id="18" name="Text 15"/>
+          <p:cNvPr id="18" name="Text 18"/>
           <p:cNvSpPr txBox="1"/>
           <p:nvPr/>
         </p:nvSpPr>
         <p:spPr>
           <a:xfrm>
-            <a:off x="1554480" y="4544568"/>
-            <a:ext cx="9509760" cy="329184"/>
+            <a:off x="1408176" y="3474720"/>
+            <a:ext cx="4261104" cy="301752"/>
           </a:xfrm>
           <a:prstGeom prst="rect">
             <a:avLst/>
@@ -4104,10 +2542,10 @@
           <a:ln/>
         </p:spPr>
         <p:txBody>
-          <a:bodyPr wrap="square" lIns="0" tIns="0" rIns="0" bIns="0" rtlCol="0" anchor="t"/>
+          <a:bodyPr wrap="square" lIns="0" tIns="0" rIns="0" bIns="0" rtlCol="0" anchor="ctr"/>
           <a:lstStyle/>
           <a:p>
-            <a:pPr indent="0" marL="0">
+            <a:pPr marL="0" indent="0" algn="l">
               <a:buNone/>
             </a:pPr>
             <a:r>
@@ -4119,7 +2557,7 @@
                 <a:ea typeface="Calibri" pitchFamily="34" charset="-122"/>
                 <a:cs typeface="Calibri" pitchFamily="34" charset="-120"/>
               </a:rPr>
-              <a:t>Agree the patching arrangement</a:t>
+              <a:t>What remains open</a:t>
             </a:r>
             <a:endParaRPr lang="en-US" sz="1600" dirty="0"/>
           </a:p>
@@ -4127,14 +2565,14 @@
       </p:sp>
       <p:sp>
         <p:nvSpPr>
-          <p:cNvPr id="19" name="Text 16"/>
+          <p:cNvPr id="19" name="Text 19"/>
           <p:cNvSpPr txBox="1"/>
           <p:nvPr/>
         </p:nvSpPr>
         <p:spPr>
           <a:xfrm>
-            <a:off x="1554480" y="4910328"/>
-            <a:ext cx="9509760" cy="502920"/>
+            <a:off x="1408176" y="3867912"/>
+            <a:ext cx="4261104" cy="777240"/>
           </a:xfrm>
           <a:prstGeom prst="rect">
             <a:avLst/>
@@ -4146,7 +2584,7 @@
           <a:bodyPr wrap="square" lIns="0" tIns="0" rIns="0" bIns="0" rtlCol="0" anchor="t"/>
           <a:lstStyle/>
           <a:p>
-            <a:pPr indent="0" marL="0">
+            <a:pPr marL="0" indent="0" algn="l">
               <a:lnSpc>
                 <a:spcPct val="115000"/>
               </a:lnSpc>
@@ -4161,7 +2599,7 @@
                 <a:ea typeface="Calibri" pitchFamily="34" charset="-122"/>
                 <a:cs typeface="Calibri" pitchFamily="34" charset="-120"/>
               </a:rPr>
-              <a:t>We rebuild and redistribute on Chromium advisories. Confirm that meets policy, or we move to hosted delivery instead.</a:t>
+              <a:t>Patching the bundled Chromium, code signing, and a signed macOS build. Build-tooling findings never reach users.</a:t>
             </a:r>
             <a:endParaRPr lang="en-US" sz="1250" dirty="0"/>
           </a:p>
@@ -4169,14 +2607,66 @@
       </p:sp>
       <p:sp>
         <p:nvSpPr>
-          <p:cNvPr id="20" name="Text 17"/>
+          <p:cNvPr id="20" name="Shape 20"/>
+          <p:cNvSpPr/>
+          <p:nvPr/>
+        </p:nvSpPr>
+        <p:spPr>
+          <a:xfrm>
+            <a:off x="6126480" y="3200400"/>
+            <a:ext cx="5349240" cy="1600200"/>
+          </a:xfrm>
+          <a:prstGeom prst="roundRect">
+            <a:avLst>
+              <a:gd name="adj" fmla="val 4348"/>
+            </a:avLst>
+          </a:prstGeom>
+          <a:solidFill>
+            <a:srgbClr val="141468"/>
+          </a:solidFill>
+          <a:ln w="9525">
+            <a:solidFill>
+              <a:srgbClr val="D8DAE6"/>
+            </a:solidFill>
+            <a:prstDash val="solid"/>
+          </a:ln>
+        </p:spPr>
+      </p:sp>
+      <p:sp>
+        <p:nvSpPr>
+          <p:cNvPr id="21" name="Shape 21"/>
+          <p:cNvSpPr/>
+          <p:nvPr/>
+        </p:nvSpPr>
+        <p:spPr>
+          <a:xfrm>
+            <a:off x="6400800" y="3456432"/>
+            <a:ext cx="338328" cy="338328"/>
+          </a:xfrm>
+          <a:prstGeom prst="ellipse">
+            <a:avLst/>
+          </a:prstGeom>
+          <a:solidFill>
+            <a:srgbClr val="E61E2A"/>
+          </a:solidFill>
+          <a:ln w="12700">
+            <a:solidFill>
+              <a:srgbClr val="E61E2A"/>
+            </a:solidFill>
+            <a:prstDash val="solid"/>
+          </a:ln>
+        </p:spPr>
+      </p:sp>
+      <p:sp>
+        <p:nvSpPr>
+          <p:cNvPr id="22" name="Text 22"/>
           <p:cNvSpPr txBox="1"/>
           <p:nvPr/>
         </p:nvSpPr>
         <p:spPr>
           <a:xfrm>
-            <a:off x="594360" y="5715000"/>
-            <a:ext cx="10881360" cy="365760"/>
+            <a:off x="6400800" y="3456432"/>
+            <a:ext cx="338328" cy="338328"/>
           </a:xfrm>
           <a:prstGeom prst="rect">
             <a:avLst/>
@@ -4185,37 +2675,293 @@
           <a:ln/>
         </p:spPr>
         <p:txBody>
-          <a:bodyPr wrap="square" lIns="0" tIns="0" rIns="0" bIns="0" rtlCol="0" anchor="t"/>
+          <a:bodyPr wrap="square" lIns="0" tIns="0" rIns="0" bIns="0" rtlCol="0" anchor="ctr"/>
           <a:lstStyle/>
           <a:p>
-            <a:pPr indent="0" marL="0">
+            <a:pPr marL="0" indent="0" algn="ctr">
               <a:buNone/>
             </a:pPr>
             <a:r>
-              <a:rPr lang="en-US" sz="1300" i="1" dirty="0">
+              <a:rPr lang="en-US" sz="1200" b="1" dirty="0">
                 <a:solidFill>
-                  <a:srgbClr val="8E90B4"/>
+                  <a:srgbClr val="FFFFFF"/>
                 </a:solidFill>
                 <a:latin typeface="Calibri" pitchFamily="34" charset="0"/>
                 <a:ea typeface="Calibri" pitchFamily="34" charset="-122"/>
                 <a:cs typeface="Calibri" pitchFamily="34" charset="-120"/>
               </a:rPr>
-              <a:t>Adflow is small, readable, offline by default and stores nothing outside the machine it runs on.</a:t>
+              <a:t>4</a:t>
             </a:r>
-            <a:endParaRPr lang="en-US" sz="1300" dirty="0"/>
+            <a:endParaRPr lang="en-US" sz="1200" dirty="0"/>
+          </a:p>
+        </p:txBody>
+      </p:sp>
+      <p:sp>
+        <p:nvSpPr>
+          <p:cNvPr id="23" name="Text 23"/>
+          <p:cNvSpPr txBox="1"/>
+          <p:nvPr/>
+        </p:nvSpPr>
+        <p:spPr>
+          <a:xfrm>
+            <a:off x="6940296" y="3474720"/>
+            <a:ext cx="4261104" cy="301752"/>
+          </a:xfrm>
+          <a:prstGeom prst="rect">
+            <a:avLst/>
+          </a:prstGeom>
+          <a:noFill/>
+          <a:ln/>
+        </p:spPr>
+        <p:txBody>
+          <a:bodyPr wrap="square" lIns="0" tIns="0" rIns="0" bIns="0" rtlCol="0" anchor="ctr"/>
+          <a:lstStyle/>
+          <a:p>
+            <a:pPr marL="0" indent="0" algn="l">
+              <a:buNone/>
+            </a:pPr>
+            <a:r>
+              <a:rPr lang="en-US" sz="1600" b="1" dirty="0">
+                <a:solidFill>
+                  <a:srgbClr val="FFFFFF"/>
+                </a:solidFill>
+                <a:latin typeface="Calibri" pitchFamily="34" charset="0"/>
+                <a:ea typeface="Calibri" pitchFamily="34" charset="-122"/>
+                <a:cs typeface="Calibri" pitchFamily="34" charset="-120"/>
+              </a:rPr>
+              <a:t>What we are asking for</a:t>
+            </a:r>
+            <a:endParaRPr lang="en-US" sz="1600" dirty="0"/>
+          </a:p>
+        </p:txBody>
+      </p:sp>
+      <p:sp>
+        <p:nvSpPr>
+          <p:cNvPr id="24" name="Text 24"/>
+          <p:cNvSpPr txBox="1"/>
+          <p:nvPr/>
+        </p:nvSpPr>
+        <p:spPr>
+          <a:xfrm>
+            <a:off x="6940296" y="3867912"/>
+            <a:ext cx="4261104" cy="777240"/>
+          </a:xfrm>
+          <a:prstGeom prst="rect">
+            <a:avLst/>
+          </a:prstGeom>
+          <a:noFill/>
+          <a:ln/>
+        </p:spPr>
+        <p:txBody>
+          <a:bodyPr wrap="square" lIns="0" tIns="0" rIns="0" bIns="0" rtlCol="0" anchor="t"/>
+          <a:lstStyle/>
+          <a:p>
+            <a:pPr marL="0" indent="0" algn="l">
+              <a:lnSpc>
+                <a:spcPct val="115000"/>
+              </a:lnSpc>
+              <a:buNone/>
+            </a:pPr>
+            <a:r>
+              <a:rPr lang="en-US" sz="1250" dirty="0">
+                <a:solidFill>
+                  <a:srgbClr val="AFB2D4"/>
+                </a:solidFill>
+                <a:latin typeface="Calibri" pitchFamily="34" charset="0"/>
+                <a:ea typeface="Calibri" pitchFamily="34" charset="-122"/>
+                <a:cs typeface="Calibri" pitchFamily="34" charset="-120"/>
+              </a:rPr>
+              <a:t>Approval for internal use, a code-signing certificate, and agreement on the patching arrangement.</a:t>
+            </a:r>
+            <a:endParaRPr lang="en-US" sz="1250" dirty="0"/>
+          </a:p>
+        </p:txBody>
+      </p:sp>
+      <p:sp>
+        <p:nvSpPr>
+          <p:cNvPr id="25" name="Shape 25">
+            <a:hlinkClick r:id="rId4"/>
+          </p:cNvPr>
+          <p:cNvSpPr/>
+          <p:nvPr/>
+        </p:nvSpPr>
+        <p:spPr>
+          <a:xfrm>
+            <a:off x="594360" y="4983480"/>
+            <a:ext cx="10881360" cy="868680"/>
+          </a:xfrm>
+          <a:prstGeom prst="roundRect">
+            <a:avLst>
+              <a:gd name="adj" fmla="val 6000"/>
+            </a:avLst>
+          </a:prstGeom>
+          <a:solidFill>
+            <a:srgbClr val="FFFFFF"/>
+          </a:solidFill>
+          <a:ln w="9525">
+            <a:solidFill>
+              <a:srgbClr val="FFFFFF"/>
+            </a:solidFill>
+            <a:prstDash val="solid"/>
+          </a:ln>
+        </p:spPr>
+      </p:sp>
+      <p:sp>
+        <p:nvSpPr>
+          <p:cNvPr id="26" name="Text 26"/>
+          <p:cNvSpPr txBox="1"/>
+          <p:nvPr/>
+        </p:nvSpPr>
+        <p:spPr>
+          <a:xfrm>
+            <a:off x="960120" y="5129784"/>
+            <a:ext cx="4572000" cy="228600"/>
+          </a:xfrm>
+          <a:prstGeom prst="rect">
+            <a:avLst/>
+          </a:prstGeom>
+          <a:noFill/>
+          <a:ln/>
+        </p:spPr>
+        <p:txBody>
+          <a:bodyPr wrap="square" lIns="0" tIns="0" rIns="0" bIns="0" rtlCol="0" anchor="ctr"/>
+          <a:lstStyle/>
+          <a:p>
+            <a:pPr marL="0" indent="0" algn="l">
+              <a:buNone/>
+            </a:pPr>
+            <a:r>
+              <a:rPr lang="en-US" sz="1000" b="1" spc="200" dirty="0">
+                <a:solidFill>
+                  <a:srgbClr val="E61E2A"/>
+                </a:solidFill>
+                <a:latin typeface="Calibri" pitchFamily="34" charset="0"/>
+                <a:ea typeface="Calibri" pitchFamily="34" charset="-122"/>
+                <a:cs typeface="Calibri" pitchFamily="34" charset="-120"/>
+              </a:rPr>
+              <a:t>SOURCE CODE AND DOCUMENTATION</a:t>
+            </a:r>
+            <a:endParaRPr lang="en-US" sz="1000" dirty="0"/>
+          </a:p>
+        </p:txBody>
+      </p:sp>
+      <p:sp>
+        <p:nvSpPr>
+          <p:cNvPr id="27" name="Text 27"/>
+          <p:cNvSpPr txBox="1"/>
+          <p:nvPr/>
+        </p:nvSpPr>
+        <p:spPr>
+          <a:xfrm>
+            <a:off x="960120" y="5385816"/>
+            <a:ext cx="6583680" cy="338328"/>
+          </a:xfrm>
+          <a:prstGeom prst="rect">
+            <a:avLst/>
+          </a:prstGeom>
+          <a:noFill/>
+          <a:ln/>
+        </p:spPr>
+        <p:txBody>
+          <a:bodyPr wrap="square" lIns="0" tIns="0" rIns="0" bIns="0" rtlCol="0" anchor="ctr"/>
+          <a:lstStyle/>
+          <a:p>
+            <a:pPr marL="0" indent="0" algn="l">
+              <a:buNone/>
+            </a:pPr>
+            <a:r>
+              <a:rPr lang="en-US" sz="2000" b="1" dirty="0">
+                <a:solidFill>
+                  <a:srgbClr val="000054"/>
+                </a:solidFill>
+                <a:latin typeface="Calibri" pitchFamily="34" charset="0"/>
+                <a:ea typeface="Calibri" pitchFamily="34" charset="-122"/>
+                <a:cs typeface="Calibri" pitchFamily="34" charset="-120"/>
+                <a:hlinkClick r:id="rId4">
+                  <a:extLst>
+                    <a:ext uri="{A12FA001-AC4F-418D-AE19-62706E023703}">
+                      <ahyp:hlinkClr xmlns:ahyp="http://schemas.microsoft.com/office/drawing/2018/hyperlinkcolor" val="tx"/>
+                    </a:ext>
+                  </a:extLst>
+                </a:hlinkClick>
+              </a:rPr>
+              <a:t>github.com/westmere7/Adflow_local</a:t>
+            </a:r>
+            <a:endParaRPr lang="en-US" sz="2000" dirty="0"/>
+          </a:p>
+        </p:txBody>
+      </p:sp>
+      <p:sp>
+        <p:nvSpPr>
+          <p:cNvPr id="28" name="Text 28"/>
+          <p:cNvSpPr txBox="1"/>
+          <p:nvPr/>
+        </p:nvSpPr>
+        <p:spPr>
+          <a:xfrm>
+            <a:off x="7726680" y="5129784"/>
+            <a:ext cx="3383280" cy="594360"/>
+          </a:xfrm>
+          <a:prstGeom prst="rect">
+            <a:avLst/>
+          </a:prstGeom>
+          <a:noFill/>
+          <a:ln/>
+        </p:spPr>
+        <p:txBody>
+          <a:bodyPr wrap="square" lIns="0" tIns="0" rIns="0" bIns="0" rtlCol="0" anchor="ctr"/>
+          <a:lstStyle/>
+          <a:p>
+            <a:pPr marL="0" indent="0" algn="r">
+              <a:lnSpc>
+                <a:spcPct val="115000"/>
+              </a:lnSpc>
+              <a:buNone/>
+            </a:pPr>
+            <a:r>
+              <a:rPr lang="en-US" sz="1100" dirty="0">
+                <a:solidFill>
+                  <a:srgbClr val="4A4C78"/>
+                </a:solidFill>
+                <a:latin typeface="Calibri" pitchFamily="34" charset="0"/>
+                <a:ea typeface="Calibri" pitchFamily="34" charset="-122"/>
+                <a:cs typeface="Calibri" pitchFamily="34" charset="-120"/>
+              </a:rPr>
+              <a:t>README.md  ·  SECURITY.md</a:t>
+            </a:r>
+          </a:p>
+          <a:p>
+            <a:pPr marL="0" indent="0" algn="r">
+              <a:lnSpc>
+                <a:spcPct val="115000"/>
+              </a:lnSpc>
+              <a:buNone/>
+            </a:pPr>
+            <a:r>
+              <a:rPr lang="en-US" sz="1100" dirty="0">
+                <a:solidFill>
+                  <a:srgbClr val="4A4C78"/>
+                </a:solidFill>
+                <a:latin typeface="Calibri" pitchFamily="34" charset="0"/>
+                <a:ea typeface="Calibri" pitchFamily="34" charset="-122"/>
+                <a:cs typeface="Calibri" pitchFamily="34" charset="-120"/>
+              </a:rPr>
+              <a:t>DEPENDENCIES.md  ·  DEPLOYMENT.md</a:t>
+            </a:r>
+            <a:endParaRPr lang="en-US" sz="1100" dirty="0"/>
           </a:p>
         </p:txBody>
       </p:sp>
       <p:pic>
         <p:nvPicPr>
-          <p:cNvPr id="21" name="Image 1" descr="C:\Users\nguye\AppData\Local\Temp\claude\E--WORK-OFFLINE-apps-Adflow\c4dbe0b3-8f3b-4a26-ba73-6ba5f8057916\scratchpad\brand\rmit-white.png">    </p:cNvPr>
+          <p:cNvPr id="29" name="Image 1" descr="C:\Users\nguye\AppData\Local\Temp\claude\E--WORK-OFFLINE-apps-Adflow\c4dbe0b3-8f3b-4a26-ba73-6ba5f8057916\scratchpad\brand\rmit-white.png"/>
           <p:cNvPicPr>
             <a:picLocks noChangeAspect="1"/>
           </p:cNvPicPr>
           <p:nvPr/>
         </p:nvPicPr>
         <p:blipFill>
-          <a:blip r:embed="rId2"/>
+          <a:blip r:embed="rId5"/>
           <a:stretch>
             <a:fillRect/>
           </a:stretch>
@@ -4232,7 +2978,7 @@
       </p:pic>
       <p:sp>
         <p:nvSpPr>
-          <p:cNvPr id="22" name="Text 18"/>
+          <p:cNvPr id="30" name="Text 30"/>
           <p:cNvSpPr txBox="1"/>
           <p:nvPr/>
         </p:nvSpPr>
@@ -4251,7 +2997,7 @@
           <a:bodyPr wrap="square" lIns="0" tIns="0" rIns="0" bIns="0" rtlCol="0" anchor="ctr"/>
           <a:lstStyle/>
           <a:p>
-            <a:pPr indent="0" marL="0">
+            <a:pPr marL="0" indent="0" algn="l">
               <a:buNone/>
             </a:pPr>
             <a:r>
@@ -4271,7 +3017,7 @@
       </p:sp>
       <p:sp>
         <p:nvSpPr>
-          <p:cNvPr id="23" name="Text 19"/>
+          <p:cNvPr id="31" name="Text 31"/>
           <p:cNvSpPr txBox="1"/>
           <p:nvPr/>
         </p:nvSpPr>
@@ -4290,11 +3036,11 @@
           <a:bodyPr wrap="square" lIns="0" tIns="0" rIns="0" bIns="0" rtlCol="0" anchor="ctr"/>
           <a:lstStyle/>
           <a:p>
-            <a:pPr algn="r" indent="0" marL="0">
+            <a:pPr marL="0" indent="0" algn="r">
               <a:buNone/>
             </a:pPr>
             <a:r>
-              <a:rPr lang="en-US" sz="900" dirty="0">
+              <a:rPr lang="en-US" sz="900">
                 <a:solidFill>
                   <a:srgbClr val="8E90B4"/>
                 </a:solidFill>
@@ -4302,7 +3048,7 @@
                 <a:ea typeface="Calibri" pitchFamily="34" charset="-122"/>
                 <a:cs typeface="Calibri" pitchFamily="34" charset="-120"/>
               </a:rPr>
-              <a:t>11</a:t>
+              <a:t>10</a:t>
             </a:r>
             <a:endParaRPr lang="en-US" sz="900" dirty="0"/>
           </a:p>
@@ -4324,6 +3070,7 @@
         <a:solidFill>
           <a:srgbClr val="FFFFFF"/>
         </a:solidFill>
+        <a:effectLst/>
       </p:bgPr>
     </p:bg>
     <p:spTree>
@@ -4361,11 +3108,11 @@
           <a:bodyPr wrap="square" lIns="0" tIns="0" rIns="0" bIns="0" rtlCol="0" anchor="ctr"/>
           <a:lstStyle/>
           <a:p>
-            <a:pPr algn="l" indent="0" marL="0">
+            <a:pPr marL="0" indent="0" algn="l">
               <a:buNone/>
             </a:pPr>
             <a:r>
-              <a:rPr lang="en-US" sz="1100" b="1" spc="200" kern="0" dirty="0">
+              <a:rPr lang="en-US" sz="1100" b="1" kern="0" spc="200" dirty="0">
                 <a:solidFill>
                   <a:srgbClr val="E61E2A"/>
                 </a:solidFill>
@@ -4400,7 +3147,7 @@
           <a:bodyPr wrap="square" lIns="0" tIns="0" rIns="0" bIns="0" rtlCol="0" anchor="ctr"/>
           <a:lstStyle/>
           <a:p>
-            <a:pPr algn="l" indent="0" marL="0">
+            <a:pPr marL="0" indent="0" algn="l">
               <a:buNone/>
             </a:pPr>
             <a:r>
@@ -4439,7 +3186,7 @@
           <a:bodyPr wrap="square" lIns="0" tIns="0" rIns="0" bIns="0" rtlCol="0" anchor="t"/>
           <a:lstStyle/>
           <a:p>
-            <a:pPr algn="l" indent="0" marL="0">
+            <a:pPr marL="0" indent="0" algn="l">
               <a:lnSpc>
                 <a:spcPct val="120000"/>
               </a:lnSpc>
@@ -4533,7 +3280,7 @@
           <a:bodyPr wrap="square" lIns="0" tIns="0" rIns="0" bIns="0" rtlCol="0" anchor="ctr"/>
           <a:lstStyle/>
           <a:p>
-            <a:pPr algn="ctr" indent="0" marL="0">
+            <a:pPr marL="0" indent="0" algn="ctr">
               <a:buNone/>
             </a:pPr>
             <a:r>
@@ -4572,7 +3319,7 @@
           <a:bodyPr wrap="square" lIns="0" tIns="0" rIns="0" bIns="0" rtlCol="0" anchor="ctr"/>
           <a:lstStyle/>
           <a:p>
-            <a:pPr indent="0" marL="0">
+            <a:pPr marL="0" indent="0">
               <a:buNone/>
             </a:pPr>
             <a:r>
@@ -4611,7 +3358,7 @@
           <a:bodyPr wrap="square" lIns="0" tIns="0" rIns="0" bIns="0" rtlCol="0" anchor="ctr"/>
           <a:lstStyle/>
           <a:p>
-            <a:pPr indent="0" marL="0">
+            <a:pPr marL="0" indent="0">
               <a:lnSpc>
                 <a:spcPct val="115000"/>
               </a:lnSpc>
@@ -4705,7 +3452,7 @@
           <a:bodyPr wrap="square" lIns="0" tIns="0" rIns="0" bIns="0" rtlCol="0" anchor="ctr"/>
           <a:lstStyle/>
           <a:p>
-            <a:pPr algn="ctr" indent="0" marL="0">
+            <a:pPr marL="0" indent="0" algn="ctr">
               <a:buNone/>
             </a:pPr>
             <a:r>
@@ -4744,7 +3491,7 @@
           <a:bodyPr wrap="square" lIns="0" tIns="0" rIns="0" bIns="0" rtlCol="0" anchor="ctr"/>
           <a:lstStyle/>
           <a:p>
-            <a:pPr indent="0" marL="0">
+            <a:pPr marL="0" indent="0">
               <a:buNone/>
             </a:pPr>
             <a:r>
@@ -4783,7 +3530,7 @@
           <a:bodyPr wrap="square" lIns="0" tIns="0" rIns="0" bIns="0" rtlCol="0" anchor="ctr"/>
           <a:lstStyle/>
           <a:p>
-            <a:pPr indent="0" marL="0">
+            <a:pPr marL="0" indent="0">
               <a:lnSpc>
                 <a:spcPct val="115000"/>
               </a:lnSpc>
@@ -4877,7 +3624,7 @@
           <a:bodyPr wrap="square" lIns="0" tIns="0" rIns="0" bIns="0" rtlCol="0" anchor="ctr"/>
           <a:lstStyle/>
           <a:p>
-            <a:pPr algn="ctr" indent="0" marL="0">
+            <a:pPr marL="0" indent="0" algn="ctr">
               <a:buNone/>
             </a:pPr>
             <a:r>
@@ -4916,7 +3663,7 @@
           <a:bodyPr wrap="square" lIns="0" tIns="0" rIns="0" bIns="0" rtlCol="0" anchor="ctr"/>
           <a:lstStyle/>
           <a:p>
-            <a:pPr indent="0" marL="0">
+            <a:pPr marL="0" indent="0">
               <a:buNone/>
             </a:pPr>
             <a:r>
@@ -4955,7 +3702,7 @@
           <a:bodyPr wrap="square" lIns="0" tIns="0" rIns="0" bIns="0" rtlCol="0" anchor="ctr"/>
           <a:lstStyle/>
           <a:p>
-            <a:pPr indent="0" marL="0">
+            <a:pPr marL="0" indent="0">
               <a:lnSpc>
                 <a:spcPct val="115000"/>
               </a:lnSpc>
@@ -4978,14 +3725,14 @@
       </p:sp>
       <p:pic>
         <p:nvPicPr>
-          <p:cNvPr id="20" name="Image 0" descr="C:\Users\nguye\AppData\Local\Temp\claude\E--WORK-OFFLINE-apps-Adflow\c4dbe0b3-8f3b-4a26-ba73-6ba5f8057916\scratchpad\brand\rmit-full.png">    </p:cNvPr>
+          <p:cNvPr id="20" name="Image 0" descr="C:\Users\nguye\AppData\Local\Temp\claude\E--WORK-OFFLINE-apps-Adflow\c4dbe0b3-8f3b-4a26-ba73-6ba5f8057916\scratchpad\brand\rmit-full.png"/>
           <p:cNvPicPr>
             <a:picLocks noChangeAspect="1"/>
           </p:cNvPicPr>
           <p:nvPr/>
         </p:nvPicPr>
         <p:blipFill>
-          <a:blip r:embed="rId1"/>
+          <a:blip r:embed="rId3"/>
           <a:stretch>
             <a:fillRect/>
           </a:stretch>
@@ -5021,7 +3768,7 @@
           <a:bodyPr wrap="square" lIns="0" tIns="0" rIns="0" bIns="0" rtlCol="0" anchor="ctr"/>
           <a:lstStyle/>
           <a:p>
-            <a:pPr indent="0" marL="0">
+            <a:pPr marL="0" indent="0">
               <a:buNone/>
             </a:pPr>
             <a:r>
@@ -5060,7 +3807,7 @@
           <a:bodyPr wrap="square" lIns="0" tIns="0" rIns="0" bIns="0" rtlCol="0" anchor="ctr"/>
           <a:lstStyle/>
           <a:p>
-            <a:pPr algn="r" indent="0" marL="0">
+            <a:pPr marL="0" indent="0" algn="r">
               <a:buNone/>
             </a:pPr>
             <a:r>
@@ -5088,12 +3835,13 @@
 
 <file path=ppt/slides/slide3.xml><?xml version="1.0" encoding="utf-8"?>
 <p:sld xmlns:a="http://schemas.openxmlformats.org/drawingml/2006/main" xmlns:r="http://schemas.openxmlformats.org/officeDocument/2006/relationships" xmlns:p="http://schemas.openxmlformats.org/presentationml/2006/main">
-  <p:cSld name="Slide 3">
+  <p:cSld name="Slide 4">
     <p:bg>
       <p:bgPr>
         <a:solidFill>
           <a:srgbClr val="FFFFFF"/>
         </a:solidFill>
+        <a:effectLst/>
       </p:bgPr>
     </p:bg>
     <p:spTree>
@@ -5131,843 +3879,11 @@
           <a:bodyPr wrap="square" lIns="0" tIns="0" rIns="0" bIns="0" rtlCol="0" anchor="ctr"/>
           <a:lstStyle/>
           <a:p>
-            <a:pPr algn="l" indent="0" marL="0">
+            <a:pPr marL="0" indent="0" algn="l">
               <a:buNone/>
             </a:pPr>
             <a:r>
-              <a:rPr lang="en-US" sz="1100" b="1" spc="200" kern="0" dirty="0">
-                <a:solidFill>
-                  <a:srgbClr val="E61E2A"/>
-                </a:solidFill>
-                <a:latin typeface="Calibri" pitchFamily="34" charset="0"/>
-                <a:ea typeface="Calibri" pitchFamily="34" charset="-122"/>
-                <a:cs typeface="Calibri" pitchFamily="34" charset="-120"/>
-              </a:rPr>
-              <a:t>AT A GLANCE</a:t>
-            </a:r>
-            <a:endParaRPr lang="en-US" sz="1100" dirty="0"/>
-          </a:p>
-        </p:txBody>
-      </p:sp>
-      <p:sp>
-        <p:nvSpPr>
-          <p:cNvPr id="3" name="Text 1"/>
-          <p:cNvSpPr txBox="1"/>
-          <p:nvPr/>
-        </p:nvSpPr>
-        <p:spPr>
-          <a:xfrm>
-            <a:off x="594360" y="411480"/>
-            <a:ext cx="10972800" cy="685800"/>
-          </a:xfrm>
-          <a:prstGeom prst="rect">
-            <a:avLst/>
-          </a:prstGeom>
-          <a:noFill/>
-          <a:ln/>
-        </p:spPr>
-        <p:txBody>
-          <a:bodyPr wrap="square" lIns="0" tIns="0" rIns="0" bIns="0" rtlCol="0" anchor="ctr"/>
-          <a:lstStyle/>
-          <a:p>
-            <a:pPr algn="l" indent="0" marL="0">
-              <a:buNone/>
-            </a:pPr>
-            <a:r>
-              <a:rPr lang="en-US" sz="3400" b="1" dirty="0">
-                <a:solidFill>
-                  <a:srgbClr val="000054"/>
-                </a:solidFill>
-                <a:latin typeface="Cambria" pitchFamily="34" charset="0"/>
-                <a:ea typeface="Cambria" pitchFamily="34" charset="-122"/>
-                <a:cs typeface="Cambria" pitchFamily="34" charset="-120"/>
-              </a:rPr>
-              <a:t>The numbers that matter for review</a:t>
-            </a:r>
-            <a:endParaRPr lang="en-US" sz="3400" dirty="0"/>
-          </a:p>
-        </p:txBody>
-      </p:sp>
-      <p:sp>
-        <p:nvSpPr>
-          <p:cNvPr id="4" name="Shape 2"/>
-          <p:cNvSpPr/>
-          <p:nvPr/>
-        </p:nvSpPr>
-        <p:spPr>
-          <a:xfrm>
-            <a:off x="594360" y="2057400"/>
-            <a:ext cx="2615184" cy="1783080"/>
-          </a:xfrm>
-          <a:prstGeom prst="roundRect">
-            <a:avLst>
-              <a:gd name="adj" fmla="val 3077"/>
-            </a:avLst>
-          </a:prstGeom>
-          <a:solidFill>
-            <a:srgbClr val="F4F5F9"/>
-          </a:solidFill>
-          <a:ln w="9525">
-            <a:solidFill>
-              <a:srgbClr val="D8DAE6"/>
-            </a:solidFill>
-            <a:prstDash val="solid"/>
-          </a:ln>
-        </p:spPr>
-      </p:sp>
-      <p:sp>
-        <p:nvSpPr>
-          <p:cNvPr id="5" name="Text 3"/>
-          <p:cNvSpPr txBox="1"/>
-          <p:nvPr/>
-        </p:nvSpPr>
-        <p:spPr>
-          <a:xfrm>
-            <a:off x="886968" y="2212848"/>
-            <a:ext cx="2103120" cy="822960"/>
-          </a:xfrm>
-          <a:prstGeom prst="rect">
-            <a:avLst/>
-          </a:prstGeom>
-          <a:noFill/>
-          <a:ln/>
-        </p:spPr>
-        <p:txBody>
-          <a:bodyPr wrap="square" lIns="0" tIns="0" rIns="0" bIns="0" rtlCol="0" anchor="ctr"/>
-          <a:lstStyle/>
-          <a:p>
-            <a:pPr algn="l" indent="0" marL="0">
-              <a:buNone/>
-            </a:pPr>
-            <a:r>
-              <a:rPr lang="en-US" sz="4600" b="1" dirty="0">
-                <a:solidFill>
-                  <a:srgbClr val="1F7A4D"/>
-                </a:solidFill>
-                <a:latin typeface="Cambria" pitchFamily="34" charset="0"/>
-                <a:ea typeface="Cambria" pitchFamily="34" charset="-122"/>
-                <a:cs typeface="Cambria" pitchFamily="34" charset="-120"/>
-              </a:rPr>
-              <a:t>0</a:t>
-            </a:r>
-            <a:endParaRPr lang="en-US" sz="4600" dirty="0"/>
-          </a:p>
-        </p:txBody>
-      </p:sp>
-      <p:sp>
-        <p:nvSpPr>
-          <p:cNvPr id="6" name="Text 4"/>
-          <p:cNvSpPr txBox="1"/>
-          <p:nvPr/>
-        </p:nvSpPr>
-        <p:spPr>
-          <a:xfrm>
-            <a:off x="886968" y="3017520"/>
-            <a:ext cx="2103120" cy="548640"/>
-          </a:xfrm>
-          <a:prstGeom prst="rect">
-            <a:avLst/>
-          </a:prstGeom>
-          <a:noFill/>
-          <a:ln/>
-        </p:spPr>
-        <p:txBody>
-          <a:bodyPr wrap="square" lIns="0" tIns="0" rIns="0" bIns="0" rtlCol="0" anchor="ctr"/>
-          <a:lstStyle/>
-          <a:p>
-            <a:pPr algn="l" indent="0" marL="0">
-              <a:lnSpc>
-                <a:spcPct val="115000"/>
-              </a:lnSpc>
-              <a:buNone/>
-            </a:pPr>
-            <a:r>
-              <a:rPr lang="en-US" sz="1200" dirty="0">
-                <a:solidFill>
-                  <a:srgbClr val="6C6F85"/>
-                </a:solidFill>
-                <a:latin typeface="Calibri" pitchFamily="34" charset="0"/>
-                <a:ea typeface="Calibri" pitchFamily="34" charset="-122"/>
-                <a:cs typeface="Calibri" pitchFamily="34" charset="-120"/>
-              </a:rPr>
-              <a:t>Outbound network</a:t>
-            </a:r>
-            <a:endParaRPr lang="en-US" sz="1200" dirty="0"/>
-          </a:p>
-          <a:p>
-            <a:pPr algn="l" indent="0" marL="0">
-              <a:lnSpc>
-                <a:spcPct val="115000"/>
-              </a:lnSpc>
-              <a:buNone/>
-            </a:pPr>
-            <a:r>
-              <a:rPr lang="en-US" sz="1200" dirty="0">
-                <a:solidFill>
-                  <a:srgbClr val="6C6F85"/>
-                </a:solidFill>
-                <a:latin typeface="Calibri" pitchFamily="34" charset="0"/>
-                <a:ea typeface="Calibri" pitchFamily="34" charset="-122"/>
-                <a:cs typeface="Calibri" pitchFamily="34" charset="-120"/>
-              </a:rPr>
-              <a:t>connections at runtime</a:t>
-            </a:r>
-            <a:endParaRPr lang="en-US" sz="1200" dirty="0"/>
-          </a:p>
-        </p:txBody>
-      </p:sp>
-      <p:sp>
-        <p:nvSpPr>
-          <p:cNvPr id="7" name="Shape 5"/>
-          <p:cNvSpPr/>
-          <p:nvPr/>
-        </p:nvSpPr>
-        <p:spPr>
-          <a:xfrm>
-            <a:off x="3364992" y="2057400"/>
-            <a:ext cx="2615184" cy="1783080"/>
-          </a:xfrm>
-          <a:prstGeom prst="roundRect">
-            <a:avLst>
-              <a:gd name="adj" fmla="val 3077"/>
-            </a:avLst>
-          </a:prstGeom>
-          <a:solidFill>
-            <a:srgbClr val="F4F5F9"/>
-          </a:solidFill>
-          <a:ln w="9525">
-            <a:solidFill>
-              <a:srgbClr val="D8DAE6"/>
-            </a:solidFill>
-            <a:prstDash val="solid"/>
-          </a:ln>
-        </p:spPr>
-      </p:sp>
-      <p:sp>
-        <p:nvSpPr>
-          <p:cNvPr id="8" name="Text 6"/>
-          <p:cNvSpPr txBox="1"/>
-          <p:nvPr/>
-        </p:nvSpPr>
-        <p:spPr>
-          <a:xfrm>
-            <a:off x="3657600" y="2212848"/>
-            <a:ext cx="2103120" cy="822960"/>
-          </a:xfrm>
-          <a:prstGeom prst="rect">
-            <a:avLst/>
-          </a:prstGeom>
-          <a:noFill/>
-          <a:ln/>
-        </p:spPr>
-        <p:txBody>
-          <a:bodyPr wrap="square" lIns="0" tIns="0" rIns="0" bIns="0" rtlCol="0" anchor="ctr"/>
-          <a:lstStyle/>
-          <a:p>
-            <a:pPr algn="l" indent="0" marL="0">
-              <a:buNone/>
-            </a:pPr>
-            <a:r>
-              <a:rPr lang="en-US" sz="4600" b="1" dirty="0">
-                <a:solidFill>
-                  <a:srgbClr val="1F7A4D"/>
-                </a:solidFill>
-                <a:latin typeface="Cambria" pitchFamily="34" charset="0"/>
-                <a:ea typeface="Cambria" pitchFamily="34" charset="-122"/>
-                <a:cs typeface="Cambria" pitchFamily="34" charset="-120"/>
-              </a:rPr>
-              <a:t>0</a:t>
-            </a:r>
-            <a:endParaRPr lang="en-US" sz="4600" dirty="0"/>
-          </a:p>
-        </p:txBody>
-      </p:sp>
-      <p:sp>
-        <p:nvSpPr>
-          <p:cNvPr id="9" name="Text 7"/>
-          <p:cNvSpPr txBox="1"/>
-          <p:nvPr/>
-        </p:nvSpPr>
-        <p:spPr>
-          <a:xfrm>
-            <a:off x="3657600" y="3017520"/>
-            <a:ext cx="2103120" cy="548640"/>
-          </a:xfrm>
-          <a:prstGeom prst="rect">
-            <a:avLst/>
-          </a:prstGeom>
-          <a:noFill/>
-          <a:ln/>
-        </p:spPr>
-        <p:txBody>
-          <a:bodyPr wrap="square" lIns="0" tIns="0" rIns="0" bIns="0" rtlCol="0" anchor="ctr"/>
-          <a:lstStyle/>
-          <a:p>
-            <a:pPr algn="l" indent="0" marL="0">
-              <a:lnSpc>
-                <a:spcPct val="115000"/>
-              </a:lnSpc>
-              <a:buNone/>
-            </a:pPr>
-            <a:r>
-              <a:rPr lang="en-US" sz="1200" dirty="0">
-                <a:solidFill>
-                  <a:srgbClr val="6C6F85"/>
-                </a:solidFill>
-                <a:latin typeface="Calibri" pitchFamily="34" charset="0"/>
-                <a:ea typeface="Calibri" pitchFamily="34" charset="-122"/>
-                <a:cs typeface="Calibri" pitchFamily="34" charset="-120"/>
-              </a:rPr>
-              <a:t>Vulnerabilities in</a:t>
-            </a:r>
-            <a:endParaRPr lang="en-US" sz="1200" dirty="0"/>
-          </a:p>
-          <a:p>
-            <a:pPr algn="l" indent="0" marL="0">
-              <a:lnSpc>
-                <a:spcPct val="115000"/>
-              </a:lnSpc>
-              <a:buNone/>
-            </a:pPr>
-            <a:r>
-              <a:rPr lang="en-US" sz="1200" dirty="0">
-                <a:solidFill>
-                  <a:srgbClr val="6C6F85"/>
-                </a:solidFill>
-                <a:latin typeface="Calibri" pitchFamily="34" charset="0"/>
-                <a:ea typeface="Calibri" pitchFamily="34" charset="-122"/>
-                <a:cs typeface="Calibri" pitchFamily="34" charset="-120"/>
-              </a:rPr>
-              <a:t>shipped dependencies</a:t>
-            </a:r>
-            <a:endParaRPr lang="en-US" sz="1200" dirty="0"/>
-          </a:p>
-        </p:txBody>
-      </p:sp>
-      <p:sp>
-        <p:nvSpPr>
-          <p:cNvPr id="10" name="Shape 8"/>
-          <p:cNvSpPr/>
-          <p:nvPr/>
-        </p:nvSpPr>
-        <p:spPr>
-          <a:xfrm>
-            <a:off x="6135624" y="2057400"/>
-            <a:ext cx="2615184" cy="1783080"/>
-          </a:xfrm>
-          <a:prstGeom prst="roundRect">
-            <a:avLst>
-              <a:gd name="adj" fmla="val 3077"/>
-            </a:avLst>
-          </a:prstGeom>
-          <a:solidFill>
-            <a:srgbClr val="F4F5F9"/>
-          </a:solidFill>
-          <a:ln w="9525">
-            <a:solidFill>
-              <a:srgbClr val="D8DAE6"/>
-            </a:solidFill>
-            <a:prstDash val="solid"/>
-          </a:ln>
-        </p:spPr>
-      </p:sp>
-      <p:sp>
-        <p:nvSpPr>
-          <p:cNvPr id="11" name="Text 9"/>
-          <p:cNvSpPr txBox="1"/>
-          <p:nvPr/>
-        </p:nvSpPr>
-        <p:spPr>
-          <a:xfrm>
-            <a:off x="6428232" y="2212848"/>
-            <a:ext cx="2103120" cy="822960"/>
-          </a:xfrm>
-          <a:prstGeom prst="rect">
-            <a:avLst/>
-          </a:prstGeom>
-          <a:noFill/>
-          <a:ln/>
-        </p:spPr>
-        <p:txBody>
-          <a:bodyPr wrap="square" lIns="0" tIns="0" rIns="0" bIns="0" rtlCol="0" anchor="ctr"/>
-          <a:lstStyle/>
-          <a:p>
-            <a:pPr algn="l" indent="0" marL="0">
-              <a:buNone/>
-            </a:pPr>
-            <a:r>
-              <a:rPr lang="en-US" sz="4600" b="1" dirty="0">
-                <a:solidFill>
-                  <a:srgbClr val="000054"/>
-                </a:solidFill>
-                <a:latin typeface="Cambria" pitchFamily="34" charset="0"/>
-                <a:ea typeface="Cambria" pitchFamily="34" charset="-122"/>
-                <a:cs typeface="Cambria" pitchFamily="34" charset="-120"/>
-              </a:rPr>
-              <a:t>5</a:t>
-            </a:r>
-            <a:endParaRPr lang="en-US" sz="4600" dirty="0"/>
-          </a:p>
-        </p:txBody>
-      </p:sp>
-      <p:sp>
-        <p:nvSpPr>
-          <p:cNvPr id="12" name="Text 10"/>
-          <p:cNvSpPr txBox="1"/>
-          <p:nvPr/>
-        </p:nvSpPr>
-        <p:spPr>
-          <a:xfrm>
-            <a:off x="6428232" y="3017520"/>
-            <a:ext cx="2103120" cy="548640"/>
-          </a:xfrm>
-          <a:prstGeom prst="rect">
-            <a:avLst/>
-          </a:prstGeom>
-          <a:noFill/>
-          <a:ln/>
-        </p:spPr>
-        <p:txBody>
-          <a:bodyPr wrap="square" lIns="0" tIns="0" rIns="0" bIns="0" rtlCol="0" anchor="ctr"/>
-          <a:lstStyle/>
-          <a:p>
-            <a:pPr algn="l" indent="0" marL="0">
-              <a:lnSpc>
-                <a:spcPct val="115000"/>
-              </a:lnSpc>
-              <a:buNone/>
-            </a:pPr>
-            <a:r>
-              <a:rPr lang="en-US" sz="1200" dirty="0">
-                <a:solidFill>
-                  <a:srgbClr val="6C6F85"/>
-                </a:solidFill>
-                <a:latin typeface="Calibri" pitchFamily="34" charset="0"/>
-                <a:ea typeface="Calibri" pitchFamily="34" charset="-122"/>
-                <a:cs typeface="Calibri" pitchFamily="34" charset="-120"/>
-              </a:rPr>
-              <a:t>Third-party libraries,</a:t>
-            </a:r>
-            <a:endParaRPr lang="en-US" sz="1200" dirty="0"/>
-          </a:p>
-          <a:p>
-            <a:pPr algn="l" indent="0" marL="0">
-              <a:lnSpc>
-                <a:spcPct val="115000"/>
-              </a:lnSpc>
-              <a:buNone/>
-            </a:pPr>
-            <a:r>
-              <a:rPr lang="en-US" sz="1200" dirty="0">
-                <a:solidFill>
-                  <a:srgbClr val="6C6F85"/>
-                </a:solidFill>
-                <a:latin typeface="Calibri" pitchFamily="34" charset="0"/>
-                <a:ea typeface="Calibri" pitchFamily="34" charset="-122"/>
-                <a:cs typeface="Calibri" pitchFamily="34" charset="-120"/>
-              </a:rPr>
-              <a:t>all checksummed</a:t>
-            </a:r>
-            <a:endParaRPr lang="en-US" sz="1200" dirty="0"/>
-          </a:p>
-        </p:txBody>
-      </p:sp>
-      <p:sp>
-        <p:nvSpPr>
-          <p:cNvPr id="13" name="Shape 11"/>
-          <p:cNvSpPr/>
-          <p:nvPr/>
-        </p:nvSpPr>
-        <p:spPr>
-          <a:xfrm>
-            <a:off x="8906256" y="2057400"/>
-            <a:ext cx="2615184" cy="1783080"/>
-          </a:xfrm>
-          <a:prstGeom prst="roundRect">
-            <a:avLst>
-              <a:gd name="adj" fmla="val 3077"/>
-            </a:avLst>
-          </a:prstGeom>
-          <a:solidFill>
-            <a:srgbClr val="F4F5F9"/>
-          </a:solidFill>
-          <a:ln w="9525">
-            <a:solidFill>
-              <a:srgbClr val="D8DAE6"/>
-            </a:solidFill>
-            <a:prstDash val="solid"/>
-          </a:ln>
-        </p:spPr>
-      </p:sp>
-      <p:sp>
-        <p:nvSpPr>
-          <p:cNvPr id="14" name="Text 12"/>
-          <p:cNvSpPr txBox="1"/>
-          <p:nvPr/>
-        </p:nvSpPr>
-        <p:spPr>
-          <a:xfrm>
-            <a:off x="9198864" y="2212848"/>
-            <a:ext cx="2103120" cy="822960"/>
-          </a:xfrm>
-          <a:prstGeom prst="rect">
-            <a:avLst/>
-          </a:prstGeom>
-          <a:noFill/>
-          <a:ln/>
-        </p:spPr>
-        <p:txBody>
-          <a:bodyPr wrap="square" lIns="0" tIns="0" rIns="0" bIns="0" rtlCol="0" anchor="ctr"/>
-          <a:lstStyle/>
-          <a:p>
-            <a:pPr algn="l" indent="0" marL="0">
-              <a:buNone/>
-            </a:pPr>
-            <a:r>
-              <a:rPr lang="en-US" sz="4600" b="1" dirty="0">
-                <a:solidFill>
-                  <a:srgbClr val="000054"/>
-                </a:solidFill>
-                <a:latin typeface="Cambria" pitchFamily="34" charset="0"/>
-                <a:ea typeface="Cambria" pitchFamily="34" charset="-122"/>
-                <a:cs typeface="Cambria" pitchFamily="34" charset="-120"/>
-              </a:rPr>
-              <a:t>55k</a:t>
-            </a:r>
-            <a:endParaRPr lang="en-US" sz="4600" dirty="0"/>
-          </a:p>
-        </p:txBody>
-      </p:sp>
-      <p:sp>
-        <p:nvSpPr>
-          <p:cNvPr id="15" name="Text 13"/>
-          <p:cNvSpPr txBox="1"/>
-          <p:nvPr/>
-        </p:nvSpPr>
-        <p:spPr>
-          <a:xfrm>
-            <a:off x="9198864" y="3017520"/>
-            <a:ext cx="2103120" cy="548640"/>
-          </a:xfrm>
-          <a:prstGeom prst="rect">
-            <a:avLst/>
-          </a:prstGeom>
-          <a:noFill/>
-          <a:ln/>
-        </p:spPr>
-        <p:txBody>
-          <a:bodyPr wrap="square" lIns="0" tIns="0" rIns="0" bIns="0" rtlCol="0" anchor="ctr"/>
-          <a:lstStyle/>
-          <a:p>
-            <a:pPr algn="l" indent="0" marL="0">
-              <a:lnSpc>
-                <a:spcPct val="115000"/>
-              </a:lnSpc>
-              <a:buNone/>
-            </a:pPr>
-            <a:r>
-              <a:rPr lang="en-US" sz="1200" dirty="0">
-                <a:solidFill>
-                  <a:srgbClr val="6C6F85"/>
-                </a:solidFill>
-                <a:latin typeface="Calibri" pitchFamily="34" charset="0"/>
-                <a:ea typeface="Calibri" pitchFamily="34" charset="-122"/>
-                <a:cs typeface="Calibri" pitchFamily="34" charset="-120"/>
-              </a:rPr>
-              <a:t>Lines of first-party code,</a:t>
-            </a:r>
-            <a:endParaRPr lang="en-US" sz="1200" dirty="0"/>
-          </a:p>
-          <a:p>
-            <a:pPr algn="l" indent="0" marL="0">
-              <a:lnSpc>
-                <a:spcPct val="115000"/>
-              </a:lnSpc>
-              <a:buNone/>
-            </a:pPr>
-            <a:r>
-              <a:rPr lang="en-US" sz="1200" dirty="0">
-                <a:solidFill>
-                  <a:srgbClr val="6C6F85"/>
-                </a:solidFill>
-                <a:latin typeface="Calibri" pitchFamily="34" charset="0"/>
-                <a:ea typeface="Calibri" pitchFamily="34" charset="-122"/>
-                <a:cs typeface="Calibri" pitchFamily="34" charset="-120"/>
-              </a:rPr>
-              <a:t>none of it minified</a:t>
-            </a:r>
-            <a:endParaRPr lang="en-US" sz="1200" dirty="0"/>
-          </a:p>
-        </p:txBody>
-      </p:sp>
-      <p:sp>
-        <p:nvSpPr>
-          <p:cNvPr id="16" name="Shape 14"/>
-          <p:cNvSpPr/>
-          <p:nvPr/>
-        </p:nvSpPr>
-        <p:spPr>
-          <a:xfrm>
-            <a:off x="594360" y="4114800"/>
-            <a:ext cx="10881360" cy="1783080"/>
-          </a:xfrm>
-          <a:prstGeom prst="roundRect">
-            <a:avLst>
-              <a:gd name="adj" fmla="val 3077"/>
-            </a:avLst>
-          </a:prstGeom>
-          <a:solidFill>
-            <a:srgbClr val="000054"/>
-          </a:solidFill>
-          <a:ln w="9525">
-            <a:solidFill>
-              <a:srgbClr val="D8DAE6"/>
-            </a:solidFill>
-            <a:prstDash val="solid"/>
-          </a:ln>
-        </p:spPr>
-      </p:sp>
-      <p:sp>
-        <p:nvSpPr>
-          <p:cNvPr id="17" name="Text 15"/>
-          <p:cNvSpPr txBox="1"/>
-          <p:nvPr/>
-        </p:nvSpPr>
-        <p:spPr>
-          <a:xfrm>
-            <a:off x="960120" y="4370832"/>
-            <a:ext cx="10149840" cy="329184"/>
-          </a:xfrm>
-          <a:prstGeom prst="rect">
-            <a:avLst/>
-          </a:prstGeom>
-          <a:noFill/>
-          <a:ln/>
-        </p:spPr>
-        <p:txBody>
-          <a:bodyPr wrap="square" lIns="0" tIns="0" rIns="0" bIns="0" rtlCol="0" anchor="ctr"/>
-          <a:lstStyle/>
-          <a:p>
-            <a:pPr indent="0" marL="0">
-              <a:buNone/>
-            </a:pPr>
-            <a:r>
-              <a:rPr lang="en-US" sz="1200" b="1" spc="150" kern="0" dirty="0">
-                <a:solidFill>
-                  <a:srgbClr val="E61E2A"/>
-                </a:solidFill>
-                <a:latin typeface="Calibri" pitchFamily="34" charset="0"/>
-                <a:ea typeface="Calibri" pitchFamily="34" charset="-122"/>
-                <a:cs typeface="Calibri" pitchFamily="34" charset="-120"/>
-              </a:rPr>
-              <a:t>The single most useful fact for a code review</a:t>
-            </a:r>
-            <a:endParaRPr lang="en-US" sz="1200" dirty="0"/>
-          </a:p>
-        </p:txBody>
-      </p:sp>
-      <p:sp>
-        <p:nvSpPr>
-          <p:cNvPr id="18" name="Text 16"/>
-          <p:cNvSpPr txBox="1"/>
-          <p:nvPr/>
-        </p:nvSpPr>
-        <p:spPr>
-          <a:xfrm>
-            <a:off x="960120" y="4754880"/>
-            <a:ext cx="10149840" cy="914400"/>
-          </a:xfrm>
-          <a:prstGeom prst="rect">
-            <a:avLst/>
-          </a:prstGeom>
-          <a:noFill/>
-          <a:ln/>
-        </p:spPr>
-        <p:txBody>
-          <a:bodyPr wrap="square" lIns="0" tIns="0" rIns="0" bIns="0" rtlCol="0" anchor="t"/>
-          <a:lstStyle/>
-          <a:p>
-            <a:pPr indent="0" marL="0">
-              <a:lnSpc>
-                <a:spcPct val="125000"/>
-              </a:lnSpc>
-              <a:buNone/>
-            </a:pPr>
-            <a:r>
-              <a:rPr lang="en-US" sz="1450" dirty="0">
-                <a:solidFill>
-                  <a:srgbClr val="DCDDEE"/>
-                </a:solidFill>
-                <a:latin typeface="Calibri" pitchFamily="34" charset="0"/>
-                <a:ea typeface="Calibri" pitchFamily="34" charset="-122"/>
-                <a:cs typeface="Calibri" pitchFamily="34" charset="-120"/>
-              </a:rPr>
-              <a:t>There is no build step. No bundler, no transpiler, no minifier is applied to our own code — so the file in the repository is byte-for-byte the file that executes. A reviewer reads exactly what runs, with no pipeline to trust and no bundle to reverse.</a:t>
-            </a:r>
-            <a:endParaRPr lang="en-US" sz="1450" dirty="0"/>
-          </a:p>
-        </p:txBody>
-      </p:sp>
-      <p:pic>
-        <p:nvPicPr>
-          <p:cNvPr id="19" name="Image 0" descr="C:\Users\nguye\AppData\Local\Temp\claude\E--WORK-OFFLINE-apps-Adflow\c4dbe0b3-8f3b-4a26-ba73-6ba5f8057916\scratchpad\brand\rmit-full.png">    </p:cNvPr>
-          <p:cNvPicPr>
-            <a:picLocks noChangeAspect="1"/>
-          </p:cNvPicPr>
-          <p:nvPr/>
-        </p:nvPicPr>
-        <p:blipFill>
-          <a:blip r:embed="rId1"/>
-          <a:stretch>
-            <a:fillRect/>
-          </a:stretch>
-        </p:blipFill>
-        <p:spPr>
-          <a:xfrm>
-            <a:off x="594360" y="6272784"/>
-            <a:ext cx="841248" cy="292033"/>
-          </a:xfrm>
-          <a:prstGeom prst="rect">
-            <a:avLst/>
-          </a:prstGeom>
-        </p:spPr>
-      </p:pic>
-      <p:sp>
-        <p:nvSpPr>
-          <p:cNvPr id="20" name="Text 17"/>
-          <p:cNvSpPr txBox="1"/>
-          <p:nvPr/>
-        </p:nvSpPr>
-        <p:spPr>
-          <a:xfrm>
-            <a:off x="1572768" y="6309360"/>
-            <a:ext cx="6400800" cy="256032"/>
-          </a:xfrm>
-          <a:prstGeom prst="rect">
-            <a:avLst/>
-          </a:prstGeom>
-          <a:noFill/>
-          <a:ln/>
-        </p:spPr>
-        <p:txBody>
-          <a:bodyPr wrap="square" lIns="0" tIns="0" rIns="0" bIns="0" rtlCol="0" anchor="ctr"/>
-          <a:lstStyle/>
-          <a:p>
-            <a:pPr indent="0" marL="0">
-              <a:buNone/>
-            </a:pPr>
-            <a:r>
-              <a:rPr lang="en-US" sz="900" dirty="0">
-                <a:solidFill>
-                  <a:srgbClr val="9C9FB4"/>
-                </a:solidFill>
-                <a:latin typeface="Calibri" pitchFamily="34" charset="0"/>
-                <a:ea typeface="Calibri" pitchFamily="34" charset="-122"/>
-                <a:cs typeface="Calibri" pitchFamily="34" charset="-120"/>
-              </a:rPr>
-              <a:t>Adflow  ·  v0.61.1  ·  ITS review</a:t>
-            </a:r>
-            <a:endParaRPr lang="en-US" sz="900" dirty="0"/>
-          </a:p>
-        </p:txBody>
-      </p:sp>
-      <p:sp>
-        <p:nvSpPr>
-          <p:cNvPr id="21" name="Text 18"/>
-          <p:cNvSpPr txBox="1"/>
-          <p:nvPr/>
-        </p:nvSpPr>
-        <p:spPr>
-          <a:xfrm>
-            <a:off x="11064240" y="6309360"/>
-            <a:ext cx="502920" cy="256032"/>
-          </a:xfrm>
-          <a:prstGeom prst="rect">
-            <a:avLst/>
-          </a:prstGeom>
-          <a:noFill/>
-          <a:ln/>
-        </p:spPr>
-        <p:txBody>
-          <a:bodyPr wrap="square" lIns="0" tIns="0" rIns="0" bIns="0" rtlCol="0" anchor="ctr"/>
-          <a:lstStyle/>
-          <a:p>
-            <a:pPr algn="r" indent="0" marL="0">
-              <a:buNone/>
-            </a:pPr>
-            <a:r>
-              <a:rPr lang="en-US" sz="900" dirty="0">
-                <a:solidFill>
-                  <a:srgbClr val="9C9FB4"/>
-                </a:solidFill>
-                <a:latin typeface="Calibri" pitchFamily="34" charset="0"/>
-                <a:ea typeface="Calibri" pitchFamily="34" charset="-122"/>
-                <a:cs typeface="Calibri" pitchFamily="34" charset="-120"/>
-              </a:rPr>
-              <a:t>3</a:t>
-            </a:r>
-            <a:endParaRPr lang="en-US" sz="900" dirty="0"/>
-          </a:p>
-        </p:txBody>
-      </p:sp>
-    </p:spTree>
-  </p:cSld>
-  <p:clrMapOvr>
-    <a:masterClrMapping/>
-  </p:clrMapOvr>
-</p:sld>
-</file>
-
-<file path=ppt/slides/slide4.xml><?xml version="1.0" encoding="utf-8"?>
-<p:sld xmlns:a="http://schemas.openxmlformats.org/drawingml/2006/main" xmlns:r="http://schemas.openxmlformats.org/officeDocument/2006/relationships" xmlns:p="http://schemas.openxmlformats.org/presentationml/2006/main">
-  <p:cSld name="Slide 4">
-    <p:bg>
-      <p:bgPr>
-        <a:solidFill>
-          <a:srgbClr val="FFFFFF"/>
-        </a:solidFill>
-      </p:bgPr>
-    </p:bg>
-    <p:spTree>
-      <p:nvGrpSpPr>
-        <p:cNvPr id="1" name=""/>
-        <p:cNvGrpSpPr/>
-        <p:nvPr/>
-      </p:nvGrpSpPr>
-      <p:grpSpPr>
-        <a:xfrm>
-          <a:off x="0" y="0"/>
-          <a:ext cx="0" cy="0"/>
-          <a:chOff x="0" y="0"/>
-          <a:chExt cx="0" cy="0"/>
-        </a:xfrm>
-      </p:grpSpPr>
-      <p:sp>
-        <p:nvSpPr>
-          <p:cNvPr id="2" name="Text 0"/>
-          <p:cNvSpPr txBox="1"/>
-          <p:nvPr/>
-        </p:nvSpPr>
-        <p:spPr>
-          <a:xfrm>
-            <a:off x="594360" y="146304"/>
-            <a:ext cx="10972800" cy="274320"/>
-          </a:xfrm>
-          <a:prstGeom prst="rect">
-            <a:avLst/>
-          </a:prstGeom>
-          <a:noFill/>
-          <a:ln/>
-        </p:spPr>
-        <p:txBody>
-          <a:bodyPr wrap="square" lIns="0" tIns="0" rIns="0" bIns="0" rtlCol="0" anchor="ctr"/>
-          <a:lstStyle/>
-          <a:p>
-            <a:pPr algn="l" indent="0" marL="0">
-              <a:buNone/>
-            </a:pPr>
-            <a:r>
-              <a:rPr lang="en-US" sz="1100" b="1" spc="200" kern="0" dirty="0">
+              <a:rPr lang="en-US" sz="1100" b="1" kern="0" spc="200" dirty="0">
                 <a:solidFill>
                   <a:srgbClr val="E61E2A"/>
                 </a:solidFill>
@@ -6002,7 +3918,7 @@
           <a:bodyPr wrap="square" lIns="0" tIns="0" rIns="0" bIns="0" rtlCol="0" anchor="ctr"/>
           <a:lstStyle/>
           <a:p>
-            <a:pPr algn="l" indent="0" marL="0">
+            <a:pPr marL="0" indent="0" algn="l">
               <a:buNone/>
             </a:pPr>
             <a:r>
@@ -6041,7 +3957,7 @@
           <a:bodyPr wrap="square" lIns="0" tIns="0" rIns="0" bIns="0" rtlCol="0" anchor="t"/>
           <a:lstStyle/>
           <a:p>
-            <a:pPr algn="l" indent="0" marL="0">
+            <a:pPr marL="0" indent="0" algn="l">
               <a:lnSpc>
                 <a:spcPct val="120000"/>
               </a:lnSpc>
@@ -6110,7 +4026,7 @@
           <a:bodyPr wrap="square" lIns="0" tIns="0" rIns="0" bIns="0" rtlCol="0" anchor="ctr"/>
           <a:lstStyle/>
           <a:p>
-            <a:pPr indent="0" marL="0">
+            <a:pPr marL="0" indent="0">
               <a:buNone/>
             </a:pPr>
             <a:r>
@@ -6149,11 +4065,11 @@
           <a:bodyPr wrap="square" lIns="0" tIns="0" rIns="0" bIns="0" rtlCol="0" anchor="ctr"/>
           <a:lstStyle/>
           <a:p>
-            <a:pPr indent="0" marL="0">
+            <a:pPr marL="0" indent="0">
               <a:buNone/>
             </a:pPr>
             <a:r>
-              <a:rPr lang="en-US" sz="1100" b="1" spc="100" kern="0" dirty="0">
+              <a:rPr lang="en-US" sz="1100" b="1" kern="0" spc="100" dirty="0">
                 <a:solidFill>
                   <a:srgbClr val="E61E2A"/>
                 </a:solidFill>
@@ -6333,7 +4249,7 @@
           <a:bodyPr wrap="square" lIns="0" tIns="0" rIns="0" bIns="0" rtlCol="0" anchor="ctr"/>
           <a:lstStyle/>
           <a:p>
-            <a:pPr indent="0" marL="0">
+            <a:pPr marL="0" indent="0">
               <a:buNone/>
             </a:pPr>
             <a:r>
@@ -6372,11 +4288,11 @@
           <a:bodyPr wrap="square" lIns="0" tIns="0" rIns="0" bIns="0" rtlCol="0" anchor="ctr"/>
           <a:lstStyle/>
           <a:p>
-            <a:pPr indent="0" marL="0">
+            <a:pPr marL="0" indent="0">
               <a:buNone/>
             </a:pPr>
             <a:r>
-              <a:rPr lang="en-US" sz="1100" b="1" spc="100" kern="0" dirty="0">
+              <a:rPr lang="en-US" sz="1100" b="1" kern="0" spc="100" dirty="0">
                 <a:solidFill>
                   <a:srgbClr val="6C6F85"/>
                 </a:solidFill>
@@ -6556,21 +4472,29 @@
           <a:bodyPr wrap="square" lIns="0" tIns="0" rIns="0" bIns="0" rtlCol="0" anchor="ctr"/>
           <a:lstStyle/>
           <a:p>
-            <a:pPr indent="0" marL="0">
+            <a:pPr marL="0" indent="0">
               <a:buNone/>
             </a:pPr>
             <a:r>
-              <a:rPr lang="en-US" sz="2100" b="1" dirty="0">
+              <a:rPr lang="en-US" sz="2100" b="1">
                 <a:solidFill>
-                  <a:srgbClr val="000054"/>
+                  <a:schemeClr val="bg2">
+                    <a:lumMod val="75000"/>
+                  </a:schemeClr>
                 </a:solidFill>
                 <a:latin typeface="Cambria" pitchFamily="34" charset="0"/>
                 <a:ea typeface="Cambria" pitchFamily="34" charset="-122"/>
                 <a:cs typeface="Cambria" pitchFamily="34" charset="-120"/>
               </a:rPr>
-              <a:t>Static hosting</a:t>
+              <a:t>Static hosting (unused)</a:t>
             </a:r>
-            <a:endParaRPr lang="en-US" sz="2100" dirty="0"/>
+            <a:endParaRPr lang="en-US" sz="2100" dirty="0">
+              <a:solidFill>
+                <a:schemeClr val="bg2">
+                  <a:lumMod val="75000"/>
+                </a:schemeClr>
+              </a:solidFill>
+            </a:endParaRPr>
           </a:p>
         </p:txBody>
       </p:sp>
@@ -6595,11 +4519,11 @@
           <a:bodyPr wrap="square" lIns="0" tIns="0" rIns="0" bIns="0" rtlCol="0" anchor="ctr"/>
           <a:lstStyle/>
           <a:p>
-            <a:pPr indent="0" marL="0">
+            <a:pPr marL="0" indent="0">
               <a:buNone/>
             </a:pPr>
             <a:r>
-              <a:rPr lang="en-US" sz="1100" b="1" spc="100" kern="0" dirty="0">
+              <a:rPr lang="en-US" sz="1100" b="1" kern="0" spc="100" dirty="0">
                 <a:solidFill>
                   <a:srgbClr val="6C6F85"/>
                 </a:solidFill>
@@ -6733,14 +4657,14 @@
       </p:sp>
       <p:pic>
         <p:nvPicPr>
-          <p:cNvPr id="17" name="Image 0" descr="C:\Users\nguye\AppData\Local\Temp\claude\E--WORK-OFFLINE-apps-Adflow\c4dbe0b3-8f3b-4a26-ba73-6ba5f8057916\scratchpad\brand\rmit-full.png">    </p:cNvPr>
+          <p:cNvPr id="17" name="Image 0" descr="C:\Users\nguye\AppData\Local\Temp\claude\E--WORK-OFFLINE-apps-Adflow\c4dbe0b3-8f3b-4a26-ba73-6ba5f8057916\scratchpad\brand\rmit-full.png"/>
           <p:cNvPicPr>
             <a:picLocks noChangeAspect="1"/>
           </p:cNvPicPr>
           <p:nvPr/>
         </p:nvPicPr>
         <p:blipFill>
-          <a:blip r:embed="rId1"/>
+          <a:blip r:embed="rId3"/>
           <a:stretch>
             <a:fillRect/>
           </a:stretch>
@@ -6776,7 +4700,7 @@
           <a:bodyPr wrap="square" lIns="0" tIns="0" rIns="0" bIns="0" rtlCol="0" anchor="ctr"/>
           <a:lstStyle/>
           <a:p>
-            <a:pPr indent="0" marL="0">
+            <a:pPr marL="0" indent="0">
               <a:buNone/>
             </a:pPr>
             <a:r>
@@ -6815,7 +4739,7 @@
           <a:bodyPr wrap="square" lIns="0" tIns="0" rIns="0" bIns="0" rtlCol="0" anchor="ctr"/>
           <a:lstStyle/>
           <a:p>
-            <a:pPr algn="r" indent="0" marL="0">
+            <a:pPr marL="0" indent="0" algn="r">
               <a:buNone/>
             </a:pPr>
             <a:r>
@@ -6827,7 +4751,7 @@
                 <a:ea typeface="Calibri" pitchFamily="34" charset="-122"/>
                 <a:cs typeface="Calibri" pitchFamily="34" charset="-120"/>
               </a:rPr>
-              <a:t>4</a:t>
+              <a:t>3</a:t>
             </a:r>
             <a:endParaRPr lang="en-US" sz="900" dirty="0"/>
           </a:p>
@@ -6841,7 +4765,7 @@
 </p:sld>
 </file>
 
-<file path=ppt/slides/slide5.xml><?xml version="1.0" encoding="utf-8"?>
+<file path=ppt/slides/slide4.xml><?xml version="1.0" encoding="utf-8"?>
 <p:sld xmlns:a="http://schemas.openxmlformats.org/drawingml/2006/main" xmlns:r="http://schemas.openxmlformats.org/officeDocument/2006/relationships" xmlns:p="http://schemas.openxmlformats.org/presentationml/2006/main">
   <p:cSld name="Slide 5">
     <p:bg>
@@ -6849,6 +4773,7 @@
         <a:solidFill>
           <a:srgbClr val="FFFFFF"/>
         </a:solidFill>
+        <a:effectLst/>
       </p:bgPr>
     </p:bg>
     <p:spTree>
@@ -6886,11 +4811,11 @@
           <a:bodyPr wrap="square" lIns="0" tIns="0" rIns="0" bIns="0" rtlCol="0" anchor="ctr"/>
           <a:lstStyle/>
           <a:p>
-            <a:pPr algn="l" indent="0" marL="0">
+            <a:pPr marL="0" indent="0" algn="l">
               <a:buNone/>
             </a:pPr>
             <a:r>
-              <a:rPr lang="en-US" sz="1100" b="1" spc="200" kern="0" dirty="0">
+              <a:rPr lang="en-US" sz="1100" b="1" kern="0" spc="200" dirty="0">
                 <a:solidFill>
                   <a:srgbClr val="E61E2A"/>
                 </a:solidFill>
@@ -6925,7 +4850,7 @@
           <a:bodyPr wrap="square" lIns="0" tIns="0" rIns="0" bIns="0" rtlCol="0" anchor="ctr"/>
           <a:lstStyle/>
           <a:p>
-            <a:pPr algn="l" indent="0" marL="0">
+            <a:pPr marL="0" indent="0" algn="l">
               <a:buNone/>
             </a:pPr>
             <a:r>
@@ -6964,7 +4889,7 @@
           <a:bodyPr wrap="square" lIns="0" tIns="0" rIns="0" bIns="0" rtlCol="0" anchor="t"/>
           <a:lstStyle/>
           <a:p>
-            <a:pPr algn="l" indent="0" marL="0">
+            <a:pPr marL="0" indent="0" algn="l">
               <a:lnSpc>
                 <a:spcPct val="120000"/>
               </a:lnSpc>
@@ -7001,15 +4926,27 @@
         </p:nvGraphicFramePr>
         <p:xfrm>
           <a:off x="594360" y="1920240"/>
-          <a:ext cx="10881360" cy="914400"/>
+          <a:ext cx="10881360" cy="1901952"/>
         </p:xfrm>
         <a:graphic>
           <a:graphicData uri="http://schemas.openxmlformats.org/drawingml/2006/table">
             <a:tbl>
               <a:tblPr/>
               <a:tblGrid>
-                <a:gridCol w="5120640"/>
-                <a:gridCol w="5760720"/>
+                <a:gridCol w="5120640">
+                  <a:extLst>
+                    <a:ext uri="{9D8B030D-6E8A-4147-A177-3AD203B41FA5}">
+                      <a16:colId xmlns:a16="http://schemas.microsoft.com/office/drawing/2014/main" val="20000"/>
+                    </a:ext>
+                  </a:extLst>
+                </a:gridCol>
+                <a:gridCol w="5760720">
+                  <a:extLst>
+                    <a:ext uri="{9D8B030D-6E8A-4147-A177-3AD203B41FA5}">
+                      <a16:colId xmlns:a16="http://schemas.microsoft.com/office/drawing/2014/main" val="20001"/>
+                    </a:ext>
+                  </a:extLst>
+                </a:gridCol>
               </a:tblGrid>
               <a:tr h="475488">
                 <a:tc>
@@ -7017,7 +4954,7 @@
                     <a:bodyPr/>
                     <a:lstStyle/>
                     <a:p>
-                      <a:pPr indent="0" marL="0">
+                      <a:pPr marL="0" indent="0">
                         <a:buNone/>
                       </a:pPr>
                       <a:r>
@@ -7085,7 +5022,7 @@
                     <a:bodyPr/>
                     <a:lstStyle/>
                     <a:p>
-                      <a:pPr indent="0" marL="0">
+                      <a:pPr marL="0" indent="0">
                         <a:buNone/>
                       </a:pPr>
                       <a:r>
@@ -7148,6 +5085,11 @@
                     </a:solidFill>
                   </a:tcPr>
                 </a:tc>
+                <a:extLst>
+                  <a:ext uri="{0D108BD9-81ED-4DB2-BD59-A6C34878D82A}">
+                    <a16:rowId xmlns:a16="http://schemas.microsoft.com/office/drawing/2014/main" val="10000"/>
+                  </a:ext>
+                </a:extLst>
               </a:tr>
               <a:tr h="475488">
                 <a:tc>
@@ -7155,7 +5097,7 @@
                     <a:bodyPr/>
                     <a:lstStyle/>
                     <a:p>
-                      <a:pPr indent="0" marL="0">
+                      <a:pPr marL="0" indent="0">
                         <a:buNone/>
                       </a:pPr>
                       <a:r>
@@ -7220,7 +5162,7 @@
                     <a:bodyPr/>
                     <a:lstStyle/>
                     <a:p>
-                      <a:pPr indent="0" marL="0">
+                      <a:pPr marL="0" indent="0">
                         <a:buNone/>
                       </a:pPr>
                       <a:r>
@@ -7280,6 +5222,11 @@
                     </a:lnB>
                   </a:tcPr>
                 </a:tc>
+                <a:extLst>
+                  <a:ext uri="{0D108BD9-81ED-4DB2-BD59-A6C34878D82A}">
+                    <a16:rowId xmlns:a16="http://schemas.microsoft.com/office/drawing/2014/main" val="10001"/>
+                  </a:ext>
+                </a:extLst>
               </a:tr>
               <a:tr h="475488">
                 <a:tc>
@@ -7287,7 +5234,7 @@
                     <a:bodyPr/>
                     <a:lstStyle/>
                     <a:p>
-                      <a:pPr indent="0" marL="0">
+                      <a:pPr marL="0" indent="0">
                         <a:buNone/>
                       </a:pPr>
                       <a:r>
@@ -7352,7 +5299,7 @@
                     <a:bodyPr/>
                     <a:lstStyle/>
                     <a:p>
-                      <a:pPr indent="0" marL="0">
+                      <a:pPr marL="0" indent="0">
                         <a:buNone/>
                       </a:pPr>
                       <a:r>
@@ -7412,6 +5359,11 @@
                     </a:lnB>
                   </a:tcPr>
                 </a:tc>
+                <a:extLst>
+                  <a:ext uri="{0D108BD9-81ED-4DB2-BD59-A6C34878D82A}">
+                    <a16:rowId xmlns:a16="http://schemas.microsoft.com/office/drawing/2014/main" val="10002"/>
+                  </a:ext>
+                </a:extLst>
               </a:tr>
               <a:tr h="475488">
                 <a:tc>
@@ -7419,7 +5371,7 @@
                     <a:bodyPr/>
                     <a:lstStyle/>
                     <a:p>
-                      <a:pPr indent="0" marL="0">
+                      <a:pPr marL="0" indent="0">
                         <a:buNone/>
                       </a:pPr>
                       <a:r>
@@ -7484,7 +5436,7 @@
                     <a:bodyPr/>
                     <a:lstStyle/>
                     <a:p>
-                      <a:pPr indent="0" marL="0">
+                      <a:pPr marL="0" indent="0">
                         <a:buNone/>
                       </a:pPr>
                       <a:r>
@@ -7544,6 +5496,11 @@
                     </a:lnB>
                   </a:tcPr>
                 </a:tc>
+                <a:extLst>
+                  <a:ext uri="{0D108BD9-81ED-4DB2-BD59-A6C34878D82A}">
+                    <a16:rowId xmlns:a16="http://schemas.microsoft.com/office/drawing/2014/main" val="10003"/>
+                  </a:ext>
+                </a:extLst>
               </a:tr>
             </a:tbl>
           </a:graphicData>
@@ -7551,7 +5508,7 @@
       </p:graphicFrame>
       <p:sp>
         <p:nvSpPr>
-          <p:cNvPr id="6" name="Shape 3"/>
+          <p:cNvPr id="5" name="Shape 3"/>
           <p:cNvSpPr/>
           <p:nvPr/>
         </p:nvSpPr>
@@ -7597,7 +5554,7 @@
           <a:bodyPr wrap="square" lIns="0" tIns="0" rIns="0" bIns="0" rtlCol="0" anchor="ctr"/>
           <a:lstStyle/>
           <a:p>
-            <a:pPr indent="0" marL="0">
+            <a:pPr marL="0" indent="0">
               <a:buNone/>
             </a:pPr>
             <a:r>
@@ -7636,7 +5593,7 @@
           <a:bodyPr wrap="square" lIns="0" tIns="0" rIns="0" bIns="0" rtlCol="0" anchor="t"/>
           <a:lstStyle/>
           <a:p>
-            <a:pPr indent="0" marL="0">
+            <a:pPr marL="0" indent="0">
               <a:lnSpc>
                 <a:spcPct val="120000"/>
               </a:lnSpc>
@@ -7705,7 +5662,7 @@
           <a:bodyPr wrap="square" lIns="0" tIns="0" rIns="0" bIns="0" rtlCol="0" anchor="ctr"/>
           <a:lstStyle/>
           <a:p>
-            <a:pPr indent="0" marL="0">
+            <a:pPr marL="0" indent="0">
               <a:buNone/>
             </a:pPr>
             <a:r>
@@ -7744,7 +5701,7 @@
           <a:bodyPr wrap="square" lIns="0" tIns="0" rIns="0" bIns="0" rtlCol="0" anchor="t"/>
           <a:lstStyle/>
           <a:p>
-            <a:pPr indent="0" marL="0">
+            <a:pPr marL="0" indent="0">
               <a:lnSpc>
                 <a:spcPct val="120000"/>
               </a:lnSpc>
@@ -7767,14 +5724,14 @@
       </p:sp>
       <p:pic>
         <p:nvPicPr>
-          <p:cNvPr id="12" name="Image 0" descr="C:\Users\nguye\AppData\Local\Temp\claude\E--WORK-OFFLINE-apps-Adflow\c4dbe0b3-8f3b-4a26-ba73-6ba5f8057916\scratchpad\brand\rmit-full.png">    </p:cNvPr>
+          <p:cNvPr id="12" name="Image 0" descr="C:\Users\nguye\AppData\Local\Temp\claude\E--WORK-OFFLINE-apps-Adflow\c4dbe0b3-8f3b-4a26-ba73-6ba5f8057916\scratchpad\brand\rmit-full.png"/>
           <p:cNvPicPr>
             <a:picLocks noChangeAspect="1"/>
           </p:cNvPicPr>
           <p:nvPr/>
         </p:nvPicPr>
         <p:blipFill>
-          <a:blip r:embed="rId1"/>
+          <a:blip r:embed="rId3"/>
           <a:stretch>
             <a:fillRect/>
           </a:stretch>
@@ -7810,7 +5767,7 @@
           <a:bodyPr wrap="square" lIns="0" tIns="0" rIns="0" bIns="0" rtlCol="0" anchor="ctr"/>
           <a:lstStyle/>
           <a:p>
-            <a:pPr indent="0" marL="0">
+            <a:pPr marL="0" indent="0">
               <a:buNone/>
             </a:pPr>
             <a:r>
@@ -7849,7 +5806,7 @@
           <a:bodyPr wrap="square" lIns="0" tIns="0" rIns="0" bIns="0" rtlCol="0" anchor="ctr"/>
           <a:lstStyle/>
           <a:p>
-            <a:pPr algn="r" indent="0" marL="0">
+            <a:pPr marL="0" indent="0" algn="r">
               <a:buNone/>
             </a:pPr>
             <a:r>
@@ -7861,7 +5818,7 @@
                 <a:ea typeface="Calibri" pitchFamily="34" charset="-122"/>
                 <a:cs typeface="Calibri" pitchFamily="34" charset="-120"/>
               </a:rPr>
-              <a:t>5</a:t>
+              <a:t>4</a:t>
             </a:r>
             <a:endParaRPr lang="en-US" sz="900" dirty="0"/>
           </a:p>
@@ -7875,7 +5832,7 @@
 </p:sld>
 </file>
 
-<file path=ppt/slides/slide6.xml><?xml version="1.0" encoding="utf-8"?>
+<file path=ppt/slides/slide5.xml><?xml version="1.0" encoding="utf-8"?>
 <p:sld xmlns:a="http://schemas.openxmlformats.org/drawingml/2006/main" xmlns:r="http://schemas.openxmlformats.org/officeDocument/2006/relationships" xmlns:p="http://schemas.openxmlformats.org/presentationml/2006/main">
   <p:cSld name="Slide 6">
     <p:bg>
@@ -7883,6 +5840,7 @@
         <a:solidFill>
           <a:srgbClr val="FFFFFF"/>
         </a:solidFill>
+        <a:effectLst/>
       </p:bgPr>
     </p:bg>
     <p:spTree>
@@ -7920,11 +5878,11 @@
           <a:bodyPr wrap="square" lIns="0" tIns="0" rIns="0" bIns="0" rtlCol="0" anchor="ctr"/>
           <a:lstStyle/>
           <a:p>
-            <a:pPr algn="l" indent="0" marL="0">
+            <a:pPr marL="0" indent="0" algn="l">
               <a:buNone/>
             </a:pPr>
             <a:r>
-              <a:rPr lang="en-US" sz="1100" b="1" spc="200" kern="0" dirty="0">
+              <a:rPr lang="en-US" sz="1100" b="1" kern="0" spc="200" dirty="0">
                 <a:solidFill>
                   <a:srgbClr val="E61E2A"/>
                 </a:solidFill>
@@ -7959,7 +5917,7 @@
           <a:bodyPr wrap="square" lIns="0" tIns="0" rIns="0" bIns="0" rtlCol="0" anchor="ctr"/>
           <a:lstStyle/>
           <a:p>
-            <a:pPr algn="l" indent="0" marL="0">
+            <a:pPr marL="0" indent="0" algn="l">
               <a:buNone/>
             </a:pPr>
             <a:r>
@@ -7998,7 +5956,7 @@
           <a:bodyPr wrap="square" lIns="0" tIns="0" rIns="0" bIns="0" rtlCol="0" anchor="t"/>
           <a:lstStyle/>
           <a:p>
-            <a:pPr algn="l" indent="0" marL="0">
+            <a:pPr marL="0" indent="0" algn="l">
               <a:lnSpc>
                 <a:spcPct val="120000"/>
               </a:lnSpc>
@@ -8035,15 +5993,27 @@
         </p:nvGraphicFramePr>
         <p:xfrm>
           <a:off x="594360" y="2148840"/>
-          <a:ext cx="10881360" cy="914400"/>
+          <a:ext cx="10881360" cy="2667000"/>
         </p:xfrm>
         <a:graphic>
           <a:graphicData uri="http://schemas.openxmlformats.org/drawingml/2006/table">
             <a:tbl>
               <a:tblPr/>
               <a:tblGrid>
-                <a:gridCol w="4114800"/>
-                <a:gridCol w="6766560"/>
+                <a:gridCol w="4114800">
+                  <a:extLst>
+                    <a:ext uri="{9D8B030D-6E8A-4147-A177-3AD203B41FA5}">
+                      <a16:colId xmlns:a16="http://schemas.microsoft.com/office/drawing/2014/main" val="20000"/>
+                    </a:ext>
+                  </a:extLst>
+                </a:gridCol>
+                <a:gridCol w="6766560">
+                  <a:extLst>
+                    <a:ext uri="{9D8B030D-6E8A-4147-A177-3AD203B41FA5}">
+                      <a16:colId xmlns:a16="http://schemas.microsoft.com/office/drawing/2014/main" val="20001"/>
+                    </a:ext>
+                  </a:extLst>
+                </a:gridCol>
               </a:tblGrid>
               <a:tr h="438912">
                 <a:tc>
@@ -8051,7 +6021,7 @@
                     <a:bodyPr/>
                     <a:lstStyle/>
                     <a:p>
-                      <a:pPr indent="0" marL="0">
+                      <a:pPr marL="0" indent="0">
                         <a:buNone/>
                       </a:pPr>
                       <a:r>
@@ -8119,7 +6089,7 @@
                     <a:bodyPr/>
                     <a:lstStyle/>
                     <a:p>
-                      <a:pPr indent="0" marL="0">
+                      <a:pPr marL="0" indent="0">
                         <a:buNone/>
                       </a:pPr>
                       <a:r>
@@ -8182,6 +6152,11 @@
                     </a:solidFill>
                   </a:tcPr>
                 </a:tc>
+                <a:extLst>
+                  <a:ext uri="{0D108BD9-81ED-4DB2-BD59-A6C34878D82A}">
+                    <a16:rowId xmlns:a16="http://schemas.microsoft.com/office/drawing/2014/main" val="10000"/>
+                  </a:ext>
+                </a:extLst>
               </a:tr>
               <a:tr h="438912">
                 <a:tc>
@@ -8189,7 +6164,7 @@
                     <a:bodyPr/>
                     <a:lstStyle/>
                     <a:p>
-                      <a:pPr indent="0" marL="0">
+                      <a:pPr marL="0" indent="0">
                         <a:buNone/>
                       </a:pPr>
                       <a:r>
@@ -8254,7 +6229,7 @@
                     <a:bodyPr/>
                     <a:lstStyle/>
                     <a:p>
-                      <a:pPr indent="0" marL="0">
+                      <a:pPr marL="0" indent="0">
                         <a:buNone/>
                       </a:pPr>
                       <a:r>
@@ -8314,6 +6289,11 @@
                     </a:lnB>
                   </a:tcPr>
                 </a:tc>
+                <a:extLst>
+                  <a:ext uri="{0D108BD9-81ED-4DB2-BD59-A6C34878D82A}">
+                    <a16:rowId xmlns:a16="http://schemas.microsoft.com/office/drawing/2014/main" val="10001"/>
+                  </a:ext>
+                </a:extLst>
               </a:tr>
               <a:tr h="438912">
                 <a:tc>
@@ -8321,7 +6301,7 @@
                     <a:bodyPr/>
                     <a:lstStyle/>
                     <a:p>
-                      <a:pPr indent="0" marL="0">
+                      <a:pPr marL="0" indent="0">
                         <a:buNone/>
                       </a:pPr>
                       <a:r>
@@ -8386,7 +6366,7 @@
                     <a:bodyPr/>
                     <a:lstStyle/>
                     <a:p>
-                      <a:pPr indent="0" marL="0">
+                      <a:pPr marL="0" indent="0">
                         <a:buNone/>
                       </a:pPr>
                       <a:r>
@@ -8446,6 +6426,11 @@
                     </a:lnB>
                   </a:tcPr>
                 </a:tc>
+                <a:extLst>
+                  <a:ext uri="{0D108BD9-81ED-4DB2-BD59-A6C34878D82A}">
+                    <a16:rowId xmlns:a16="http://schemas.microsoft.com/office/drawing/2014/main" val="10002"/>
+                  </a:ext>
+                </a:extLst>
               </a:tr>
               <a:tr h="438912">
                 <a:tc>
@@ -8453,7 +6438,7 @@
                     <a:bodyPr/>
                     <a:lstStyle/>
                     <a:p>
-                      <a:pPr indent="0" marL="0">
+                      <a:pPr marL="0" indent="0">
                         <a:buNone/>
                       </a:pPr>
                       <a:r>
@@ -8518,7 +6503,7 @@
                     <a:bodyPr/>
                     <a:lstStyle/>
                     <a:p>
-                      <a:pPr indent="0" marL="0">
+                      <a:pPr marL="0" indent="0">
                         <a:buNone/>
                       </a:pPr>
                       <a:r>
@@ -8578,6 +6563,11 @@
                     </a:lnB>
                   </a:tcPr>
                 </a:tc>
+                <a:extLst>
+                  <a:ext uri="{0D108BD9-81ED-4DB2-BD59-A6C34878D82A}">
+                    <a16:rowId xmlns:a16="http://schemas.microsoft.com/office/drawing/2014/main" val="10003"/>
+                  </a:ext>
+                </a:extLst>
               </a:tr>
               <a:tr h="438912">
                 <a:tc>
@@ -8585,7 +6575,7 @@
                     <a:bodyPr/>
                     <a:lstStyle/>
                     <a:p>
-                      <a:pPr indent="0" marL="0">
+                      <a:pPr marL="0" indent="0">
                         <a:buNone/>
                       </a:pPr>
                       <a:r>
@@ -8650,7 +6640,7 @@
                     <a:bodyPr/>
                     <a:lstStyle/>
                     <a:p>
-                      <a:pPr indent="0" marL="0">
+                      <a:pPr marL="0" indent="0">
                         <a:buNone/>
                       </a:pPr>
                       <a:r>
@@ -8710,6 +6700,11 @@
                     </a:lnB>
                   </a:tcPr>
                 </a:tc>
+                <a:extLst>
+                  <a:ext uri="{0D108BD9-81ED-4DB2-BD59-A6C34878D82A}">
+                    <a16:rowId xmlns:a16="http://schemas.microsoft.com/office/drawing/2014/main" val="10004"/>
+                  </a:ext>
+                </a:extLst>
               </a:tr>
               <a:tr h="438912">
                 <a:tc>
@@ -8717,7 +6712,7 @@
                     <a:bodyPr/>
                     <a:lstStyle/>
                     <a:p>
-                      <a:pPr indent="0" marL="0">
+                      <a:pPr marL="0" indent="0">
                         <a:buNone/>
                       </a:pPr>
                       <a:r>
@@ -8782,7 +6777,7 @@
                     <a:bodyPr/>
                     <a:lstStyle/>
                     <a:p>
-                      <a:pPr indent="0" marL="0">
+                      <a:pPr marL="0" indent="0">
                         <a:buNone/>
                       </a:pPr>
                       <a:r>
@@ -8842,6 +6837,11 @@
                     </a:lnB>
                   </a:tcPr>
                 </a:tc>
+                <a:extLst>
+                  <a:ext uri="{0D108BD9-81ED-4DB2-BD59-A6C34878D82A}">
+                    <a16:rowId xmlns:a16="http://schemas.microsoft.com/office/drawing/2014/main" val="10005"/>
+                  </a:ext>
+                </a:extLst>
               </a:tr>
             </a:tbl>
           </a:graphicData>
@@ -8868,7 +6868,7 @@
           <a:bodyPr wrap="square" lIns="0" tIns="0" rIns="0" bIns="0" rtlCol="0" anchor="ctr"/>
           <a:lstStyle/>
           <a:p>
-            <a:pPr indent="0" marL="0">
+            <a:pPr marL="0" indent="0">
               <a:lnSpc>
                 <a:spcPct val="120000"/>
               </a:lnSpc>
@@ -8891,14 +6891,14 @@
       </p:sp>
       <p:pic>
         <p:nvPicPr>
-          <p:cNvPr id="7" name="Image 0" descr="C:\Users\nguye\AppData\Local\Temp\claude\E--WORK-OFFLINE-apps-Adflow\c4dbe0b3-8f3b-4a26-ba73-6ba5f8057916\scratchpad\brand\rmit-full.png">    </p:cNvPr>
+          <p:cNvPr id="5" name="Image 0" descr="C:\Users\nguye\AppData\Local\Temp\claude\E--WORK-OFFLINE-apps-Adflow\c4dbe0b3-8f3b-4a26-ba73-6ba5f8057916\scratchpad\brand\rmit-full.png"/>
           <p:cNvPicPr>
             <a:picLocks noChangeAspect="1"/>
           </p:cNvPicPr>
           <p:nvPr/>
         </p:nvPicPr>
         <p:blipFill>
-          <a:blip r:embed="rId1"/>
+          <a:blip r:embed="rId3"/>
           <a:stretch>
             <a:fillRect/>
           </a:stretch>
@@ -8934,7 +6934,7 @@
           <a:bodyPr wrap="square" lIns="0" tIns="0" rIns="0" bIns="0" rtlCol="0" anchor="ctr"/>
           <a:lstStyle/>
           <a:p>
-            <a:pPr indent="0" marL="0">
+            <a:pPr marL="0" indent="0">
               <a:buNone/>
             </a:pPr>
             <a:r>
@@ -8973,7 +6973,7 @@
           <a:bodyPr wrap="square" lIns="0" tIns="0" rIns="0" bIns="0" rtlCol="0" anchor="ctr"/>
           <a:lstStyle/>
           <a:p>
-            <a:pPr algn="r" indent="0" marL="0">
+            <a:pPr marL="0" indent="0" algn="r">
               <a:buNone/>
             </a:pPr>
             <a:r>
@@ -8985,7 +6985,7 @@
                 <a:ea typeface="Calibri" pitchFamily="34" charset="-122"/>
                 <a:cs typeface="Calibri" pitchFamily="34" charset="-120"/>
               </a:rPr>
-              <a:t>6</a:t>
+              <a:t>5</a:t>
             </a:r>
             <a:endParaRPr lang="en-US" sz="900" dirty="0"/>
           </a:p>
@@ -8999,7 +6999,7 @@
 </p:sld>
 </file>
 
-<file path=ppt/slides/slide7.xml><?xml version="1.0" encoding="utf-8"?>
+<file path=ppt/slides/slide6.xml><?xml version="1.0" encoding="utf-8"?>
 <p:sld xmlns:a="http://schemas.openxmlformats.org/drawingml/2006/main" xmlns:r="http://schemas.openxmlformats.org/officeDocument/2006/relationships" xmlns:p="http://schemas.openxmlformats.org/presentationml/2006/main">
   <p:cSld name="Slide 7">
     <p:bg>
@@ -9007,6 +7007,7 @@
         <a:solidFill>
           <a:srgbClr val="FFFFFF"/>
         </a:solidFill>
+        <a:effectLst/>
       </p:bgPr>
     </p:bg>
     <p:spTree>
@@ -9044,11 +7045,11 @@
           <a:bodyPr wrap="square" lIns="0" tIns="0" rIns="0" bIns="0" rtlCol="0" anchor="ctr"/>
           <a:lstStyle/>
           <a:p>
-            <a:pPr algn="l" indent="0" marL="0">
+            <a:pPr marL="0" indent="0" algn="l">
               <a:buNone/>
             </a:pPr>
             <a:r>
-              <a:rPr lang="en-US" sz="1100" b="1" spc="200" kern="0" dirty="0">
+              <a:rPr lang="en-US" sz="1100" b="1" kern="0" spc="200" dirty="0">
                 <a:solidFill>
                   <a:srgbClr val="E61E2A"/>
                 </a:solidFill>
@@ -9083,7 +7084,7 @@
           <a:bodyPr wrap="square" lIns="0" tIns="0" rIns="0" bIns="0" rtlCol="0" anchor="ctr"/>
           <a:lstStyle/>
           <a:p>
-            <a:pPr algn="l" indent="0" marL="0">
+            <a:pPr marL="0" indent="0" algn="l">
               <a:buNone/>
             </a:pPr>
             <a:r>
@@ -9103,7 +7104,7 @@
       </p:sp>
       <p:graphicFrame>
         <p:nvGraphicFramePr>
-          <p:cNvPr id="4" name="Chart 0" descr=""/>
+          <p:cNvPr id="4" name="Chart 0"/>
           <p:cNvGraphicFramePr/>
           <p:nvPr/>
         </p:nvGraphicFramePr>
@@ -9111,9 +7112,9 @@
           <a:off x="594360" y="1828800"/>
           <a:ext cx="4937760" cy="3931920"/>
         </p:xfrm>
-        <a:graphic xmlns:a="http://schemas.openxmlformats.org/drawingml/2006/main">
+        <a:graphic>
           <a:graphicData uri="http://schemas.openxmlformats.org/drawingml/2006/chart">
-            <c:chart xmlns:c="http://schemas.openxmlformats.org/drawingml/2006/chart" r:id="rId1"/>
+            <c:chart xmlns:c="http://schemas.openxmlformats.org/drawingml/2006/chart" xmlns:r="http://schemas.openxmlformats.org/officeDocument/2006/relationships" r:id="rId3"/>
           </a:graphicData>
         </a:graphic>
       </p:graphicFrame>
@@ -9163,7 +7164,7 @@
           <a:bodyPr wrap="square" lIns="0" tIns="0" rIns="0" bIns="0" rtlCol="0" anchor="t"/>
           <a:lstStyle/>
           <a:p>
-            <a:pPr indent="0" marL="0">
+            <a:pPr marL="0" indent="0">
               <a:buNone/>
             </a:pPr>
             <a:r>
@@ -9202,7 +7203,7 @@
           <a:bodyPr wrap="square" lIns="0" tIns="0" rIns="0" bIns="0" rtlCol="0" anchor="t"/>
           <a:lstStyle/>
           <a:p>
-            <a:pPr indent="0" marL="0">
+            <a:pPr marL="0" indent="0">
               <a:lnSpc>
                 <a:spcPct val="120000"/>
               </a:lnSpc>
@@ -9269,7 +7270,7 @@
           <a:bodyPr wrap="square" lIns="0" tIns="0" rIns="0" bIns="0" rtlCol="0" anchor="t"/>
           <a:lstStyle/>
           <a:p>
-            <a:pPr indent="0" marL="0">
+            <a:pPr marL="0" indent="0">
               <a:buNone/>
             </a:pPr>
             <a:r>
@@ -9308,7 +7309,7 @@
           <a:bodyPr wrap="square" lIns="0" tIns="0" rIns="0" bIns="0" rtlCol="0" anchor="t"/>
           <a:lstStyle/>
           <a:p>
-            <a:pPr indent="0" marL="0">
+            <a:pPr marL="0" indent="0">
               <a:lnSpc>
                 <a:spcPct val="120000"/>
               </a:lnSpc>
@@ -9377,7 +7378,7 @@
           <a:bodyPr wrap="square" lIns="0" tIns="0" rIns="0" bIns="0" rtlCol="0" anchor="ctr"/>
           <a:lstStyle/>
           <a:p>
-            <a:pPr indent="0" marL="0">
+            <a:pPr marL="0" indent="0">
               <a:lnSpc>
                 <a:spcPct val="115000"/>
               </a:lnSpc>
@@ -9400,14 +7401,14 @@
       </p:sp>
       <p:pic>
         <p:nvPicPr>
-          <p:cNvPr id="13" name="Image 0" descr="C:\Users\nguye\AppData\Local\Temp\claude\E--WORK-OFFLINE-apps-Adflow\c4dbe0b3-8f3b-4a26-ba73-6ba5f8057916\scratchpad\brand\rmit-full.png">    </p:cNvPr>
+          <p:cNvPr id="13" name="Image 0" descr="C:\Users\nguye\AppData\Local\Temp\claude\E--WORK-OFFLINE-apps-Adflow\c4dbe0b3-8f3b-4a26-ba73-6ba5f8057916\scratchpad\brand\rmit-full.png"/>
           <p:cNvPicPr>
             <a:picLocks noChangeAspect="1"/>
           </p:cNvPicPr>
           <p:nvPr/>
         </p:nvPicPr>
         <p:blipFill>
-          <a:blip r:embed="rId2"/>
+          <a:blip r:embed="rId4"/>
           <a:stretch>
             <a:fillRect/>
           </a:stretch>
@@ -9443,7 +7444,7 @@
           <a:bodyPr wrap="square" lIns="0" tIns="0" rIns="0" bIns="0" rtlCol="0" anchor="ctr"/>
           <a:lstStyle/>
           <a:p>
-            <a:pPr indent="0" marL="0">
+            <a:pPr marL="0" indent="0">
               <a:buNone/>
             </a:pPr>
             <a:r>
@@ -9482,7 +7483,7 @@
           <a:bodyPr wrap="square" lIns="0" tIns="0" rIns="0" bIns="0" rtlCol="0" anchor="ctr"/>
           <a:lstStyle/>
           <a:p>
-            <a:pPr algn="r" indent="0" marL="0">
+            <a:pPr marL="0" indent="0" algn="r">
               <a:buNone/>
             </a:pPr>
             <a:r>
@@ -9494,7 +7495,7 @@
                 <a:ea typeface="Calibri" pitchFamily="34" charset="-122"/>
                 <a:cs typeface="Calibri" pitchFamily="34" charset="-120"/>
               </a:rPr>
-              <a:t>7</a:t>
+              <a:t>6</a:t>
             </a:r>
             <a:endParaRPr lang="en-US" sz="900" dirty="0"/>
           </a:p>
@@ -9508,7 +7509,7 @@
 </p:sld>
 </file>
 
-<file path=ppt/slides/slide8.xml><?xml version="1.0" encoding="utf-8"?>
+<file path=ppt/slides/slide7.xml><?xml version="1.0" encoding="utf-8"?>
 <p:sld xmlns:a="http://schemas.openxmlformats.org/drawingml/2006/main" xmlns:r="http://schemas.openxmlformats.org/officeDocument/2006/relationships" xmlns:p="http://schemas.openxmlformats.org/presentationml/2006/main">
   <p:cSld name="Slide 8">
     <p:bg>
@@ -9516,6 +7517,7 @@
         <a:solidFill>
           <a:srgbClr val="FFFFFF"/>
         </a:solidFill>
+        <a:effectLst/>
       </p:bgPr>
     </p:bg>
     <p:spTree>
@@ -9553,11 +7555,11 @@
           <a:bodyPr wrap="square" lIns="0" tIns="0" rIns="0" bIns="0" rtlCol="0" anchor="ctr"/>
           <a:lstStyle/>
           <a:p>
-            <a:pPr algn="l" indent="0" marL="0">
+            <a:pPr marL="0" indent="0" algn="l">
               <a:buNone/>
             </a:pPr>
             <a:r>
-              <a:rPr lang="en-US" sz="1100" b="1" spc="200" kern="0" dirty="0">
+              <a:rPr lang="en-US" sz="1100" b="1" kern="0" spc="200" dirty="0">
                 <a:solidFill>
                   <a:srgbClr val="E61E2A"/>
                 </a:solidFill>
@@ -9592,7 +7594,7 @@
           <a:bodyPr wrap="square" lIns="0" tIns="0" rIns="0" bIns="0" rtlCol="0" anchor="ctr"/>
           <a:lstStyle/>
           <a:p>
-            <a:pPr algn="l" indent="0" marL="0">
+            <a:pPr marL="0" indent="0" algn="l">
               <a:buNone/>
             </a:pPr>
             <a:r>
@@ -9631,7 +7633,7 @@
           <a:bodyPr wrap="square" lIns="0" tIns="0" rIns="0" bIns="0" rtlCol="0" anchor="t"/>
           <a:lstStyle/>
           <a:p>
-            <a:pPr algn="l" indent="0" marL="0">
+            <a:pPr marL="0" indent="0" algn="l">
               <a:lnSpc>
                 <a:spcPct val="120000"/>
               </a:lnSpc>
@@ -9675,10 +7677,34 @@
             <a:tbl>
               <a:tblPr/>
               <a:tblGrid>
-                <a:gridCol w="2286000"/>
-                <a:gridCol w="1828800"/>
-                <a:gridCol w="1737360"/>
-                <a:gridCol w="5029200"/>
+                <a:gridCol w="2286000">
+                  <a:extLst>
+                    <a:ext uri="{9D8B030D-6E8A-4147-A177-3AD203B41FA5}">
+                      <a16:colId xmlns:a16="http://schemas.microsoft.com/office/drawing/2014/main" val="20000"/>
+                    </a:ext>
+                  </a:extLst>
+                </a:gridCol>
+                <a:gridCol w="1828800">
+                  <a:extLst>
+                    <a:ext uri="{9D8B030D-6E8A-4147-A177-3AD203B41FA5}">
+                      <a16:colId xmlns:a16="http://schemas.microsoft.com/office/drawing/2014/main" val="20001"/>
+                    </a:ext>
+                  </a:extLst>
+                </a:gridCol>
+                <a:gridCol w="1737360">
+                  <a:extLst>
+                    <a:ext uri="{9D8B030D-6E8A-4147-A177-3AD203B41FA5}">
+                      <a16:colId xmlns:a16="http://schemas.microsoft.com/office/drawing/2014/main" val="20002"/>
+                    </a:ext>
+                  </a:extLst>
+                </a:gridCol>
+                <a:gridCol w="5029200">
+                  <a:extLst>
+                    <a:ext uri="{9D8B030D-6E8A-4147-A177-3AD203B41FA5}">
+                      <a16:colId xmlns:a16="http://schemas.microsoft.com/office/drawing/2014/main" val="20003"/>
+                    </a:ext>
+                  </a:extLst>
+                </a:gridCol>
               </a:tblGrid>
               <a:tr h="365760">
                 <a:tc>
@@ -9686,7 +7712,7 @@
                     <a:bodyPr/>
                     <a:lstStyle/>
                     <a:p>
-                      <a:pPr indent="0" marL="0">
+                      <a:pPr marL="0" indent="0">
                         <a:buNone/>
                       </a:pPr>
                       <a:r>
@@ -9754,7 +7780,7 @@
                     <a:bodyPr/>
                     <a:lstStyle/>
                     <a:p>
-                      <a:pPr indent="0" marL="0">
+                      <a:pPr marL="0" indent="0">
                         <a:buNone/>
                       </a:pPr>
                       <a:r>
@@ -9822,7 +7848,7 @@
                     <a:bodyPr/>
                     <a:lstStyle/>
                     <a:p>
-                      <a:pPr indent="0" marL="0">
+                      <a:pPr marL="0" indent="0">
                         <a:buNone/>
                       </a:pPr>
                       <a:r>
@@ -9890,7 +7916,7 @@
                     <a:bodyPr/>
                     <a:lstStyle/>
                     <a:p>
-                      <a:pPr indent="0" marL="0">
+                      <a:pPr marL="0" indent="0">
                         <a:buNone/>
                       </a:pPr>
                       <a:r>
@@ -9953,6 +7979,11 @@
                     </a:solidFill>
                   </a:tcPr>
                 </a:tc>
+                <a:extLst>
+                  <a:ext uri="{0D108BD9-81ED-4DB2-BD59-A6C34878D82A}">
+                    <a16:rowId xmlns:a16="http://schemas.microsoft.com/office/drawing/2014/main" val="10000"/>
+                  </a:ext>
+                </a:extLst>
               </a:tr>
               <a:tr h="365760">
                 <a:tc>
@@ -9960,7 +7991,7 @@
                     <a:bodyPr/>
                     <a:lstStyle/>
                     <a:p>
-                      <a:pPr indent="0" marL="0">
+                      <a:pPr marL="0" indent="0">
                         <a:buNone/>
                       </a:pPr>
                       <a:r>
@@ -10025,7 +8056,7 @@
                     <a:bodyPr/>
                     <a:lstStyle/>
                     <a:p>
-                      <a:pPr indent="0" marL="0">
+                      <a:pPr marL="0" indent="0">
                         <a:buNone/>
                       </a:pPr>
                       <a:r>
@@ -10090,7 +8121,7 @@
                     <a:bodyPr/>
                     <a:lstStyle/>
                     <a:p>
-                      <a:pPr indent="0" marL="0">
+                      <a:pPr marL="0" indent="0">
                         <a:buNone/>
                       </a:pPr>
                       <a:r>
@@ -10155,7 +8186,7 @@
                     <a:bodyPr/>
                     <a:lstStyle/>
                     <a:p>
-                      <a:pPr indent="0" marL="0">
+                      <a:pPr marL="0" indent="0">
                         <a:buNone/>
                       </a:pPr>
                       <a:r>
@@ -10215,6 +8246,11 @@
                     </a:lnB>
                   </a:tcPr>
                 </a:tc>
+                <a:extLst>
+                  <a:ext uri="{0D108BD9-81ED-4DB2-BD59-A6C34878D82A}">
+                    <a16:rowId xmlns:a16="http://schemas.microsoft.com/office/drawing/2014/main" val="10001"/>
+                  </a:ext>
+                </a:extLst>
               </a:tr>
               <a:tr h="365760">
                 <a:tc>
@@ -10222,7 +8258,7 @@
                     <a:bodyPr/>
                     <a:lstStyle/>
                     <a:p>
-                      <a:pPr indent="0" marL="0">
+                      <a:pPr marL="0" indent="0">
                         <a:buNone/>
                       </a:pPr>
                       <a:r>
@@ -10287,7 +8323,7 @@
                     <a:bodyPr/>
                     <a:lstStyle/>
                     <a:p>
-                      <a:pPr indent="0" marL="0">
+                      <a:pPr marL="0" indent="0">
                         <a:buNone/>
                       </a:pPr>
                       <a:r>
@@ -10352,7 +8388,7 @@
                     <a:bodyPr/>
                     <a:lstStyle/>
                     <a:p>
-                      <a:pPr indent="0" marL="0">
+                      <a:pPr marL="0" indent="0">
                         <a:buNone/>
                       </a:pPr>
                       <a:r>
@@ -10417,7 +8453,7 @@
                     <a:bodyPr/>
                     <a:lstStyle/>
                     <a:p>
-                      <a:pPr indent="0" marL="0">
+                      <a:pPr marL="0" indent="0">
                         <a:buNone/>
                       </a:pPr>
                       <a:r>
@@ -10477,6 +8513,11 @@
                     </a:lnB>
                   </a:tcPr>
                 </a:tc>
+                <a:extLst>
+                  <a:ext uri="{0D108BD9-81ED-4DB2-BD59-A6C34878D82A}">
+                    <a16:rowId xmlns:a16="http://schemas.microsoft.com/office/drawing/2014/main" val="10002"/>
+                  </a:ext>
+                </a:extLst>
               </a:tr>
               <a:tr h="365760">
                 <a:tc>
@@ -10484,7 +8525,7 @@
                     <a:bodyPr/>
                     <a:lstStyle/>
                     <a:p>
-                      <a:pPr indent="0" marL="0">
+                      <a:pPr marL="0" indent="0">
                         <a:buNone/>
                       </a:pPr>
                       <a:r>
@@ -10549,7 +8590,7 @@
                     <a:bodyPr/>
                     <a:lstStyle/>
                     <a:p>
-                      <a:pPr indent="0" marL="0">
+                      <a:pPr marL="0" indent="0">
                         <a:buNone/>
                       </a:pPr>
                       <a:r>
@@ -10614,7 +8655,7 @@
                     <a:bodyPr/>
                     <a:lstStyle/>
                     <a:p>
-                      <a:pPr indent="0" marL="0">
+                      <a:pPr marL="0" indent="0">
                         <a:buNone/>
                       </a:pPr>
                       <a:r>
@@ -10679,7 +8720,7 @@
                     <a:bodyPr/>
                     <a:lstStyle/>
                     <a:p>
-                      <a:pPr indent="0" marL="0">
+                      <a:pPr marL="0" indent="0">
                         <a:buNone/>
                       </a:pPr>
                       <a:r>
@@ -10739,6 +8780,11 @@
                     </a:lnB>
                   </a:tcPr>
                 </a:tc>
+                <a:extLst>
+                  <a:ext uri="{0D108BD9-81ED-4DB2-BD59-A6C34878D82A}">
+                    <a16:rowId xmlns:a16="http://schemas.microsoft.com/office/drawing/2014/main" val="10003"/>
+                  </a:ext>
+                </a:extLst>
               </a:tr>
               <a:tr h="365760">
                 <a:tc>
@@ -10746,7 +8792,7 @@
                     <a:bodyPr/>
                     <a:lstStyle/>
                     <a:p>
-                      <a:pPr indent="0" marL="0">
+                      <a:pPr marL="0" indent="0">
                         <a:buNone/>
                       </a:pPr>
                       <a:r>
@@ -10811,7 +8857,7 @@
                     <a:bodyPr/>
                     <a:lstStyle/>
                     <a:p>
-                      <a:pPr indent="0" marL="0">
+                      <a:pPr marL="0" indent="0">
                         <a:buNone/>
                       </a:pPr>
                       <a:r>
@@ -10876,7 +8922,7 @@
                     <a:bodyPr/>
                     <a:lstStyle/>
                     <a:p>
-                      <a:pPr indent="0" marL="0">
+                      <a:pPr marL="0" indent="0">
                         <a:buNone/>
                       </a:pPr>
                       <a:r>
@@ -10941,7 +8987,7 @@
                     <a:bodyPr/>
                     <a:lstStyle/>
                     <a:p>
-                      <a:pPr indent="0" marL="0">
+                      <a:pPr marL="0" indent="0">
                         <a:buNone/>
                       </a:pPr>
                       <a:r>
@@ -11001,6 +9047,11 @@
                     </a:lnB>
                   </a:tcPr>
                 </a:tc>
+                <a:extLst>
+                  <a:ext uri="{0D108BD9-81ED-4DB2-BD59-A6C34878D82A}">
+                    <a16:rowId xmlns:a16="http://schemas.microsoft.com/office/drawing/2014/main" val="10004"/>
+                  </a:ext>
+                </a:extLst>
               </a:tr>
               <a:tr h="365760">
                 <a:tc>
@@ -11008,7 +9059,7 @@
                     <a:bodyPr/>
                     <a:lstStyle/>
                     <a:p>
-                      <a:pPr indent="0" marL="0">
+                      <a:pPr marL="0" indent="0">
                         <a:buNone/>
                       </a:pPr>
                       <a:r>
@@ -11073,7 +9124,7 @@
                     <a:bodyPr/>
                     <a:lstStyle/>
                     <a:p>
-                      <a:pPr indent="0" marL="0">
+                      <a:pPr marL="0" indent="0">
                         <a:buNone/>
                       </a:pPr>
                       <a:r>
@@ -11138,7 +9189,7 @@
                     <a:bodyPr/>
                     <a:lstStyle/>
                     <a:p>
-                      <a:pPr indent="0" marL="0">
+                      <a:pPr marL="0" indent="0">
                         <a:buNone/>
                       </a:pPr>
                       <a:r>
@@ -11203,7 +9254,7 @@
                     <a:bodyPr/>
                     <a:lstStyle/>
                     <a:p>
-                      <a:pPr indent="0" marL="0">
+                      <a:pPr marL="0" indent="0">
                         <a:buNone/>
                       </a:pPr>
                       <a:r>
@@ -11263,6 +9314,11 @@
                     </a:lnB>
                   </a:tcPr>
                 </a:tc>
+                <a:extLst>
+                  <a:ext uri="{0D108BD9-81ED-4DB2-BD59-A6C34878D82A}">
+                    <a16:rowId xmlns:a16="http://schemas.microsoft.com/office/drawing/2014/main" val="10005"/>
+                  </a:ext>
+                </a:extLst>
               </a:tr>
             </a:tbl>
           </a:graphicData>
@@ -11316,7 +9372,7 @@
           <a:bodyPr wrap="square" lIns="0" tIns="0" rIns="0" bIns="0" rtlCol="0" anchor="t"/>
           <a:lstStyle/>
           <a:p>
-            <a:pPr indent="0" marL="0">
+            <a:pPr marL="0" indent="0">
               <a:buNone/>
             </a:pPr>
             <a:r>
@@ -11355,7 +9411,7 @@
           <a:bodyPr wrap="square" lIns="0" tIns="0" rIns="0" bIns="0" rtlCol="0" anchor="t"/>
           <a:lstStyle/>
           <a:p>
-            <a:pPr indent="0" marL="0">
+            <a:pPr marL="0" indent="0">
               <a:lnSpc>
                 <a:spcPct val="115000"/>
               </a:lnSpc>
@@ -11378,7 +9434,7 @@
       </p:sp>
       <p:sp>
         <p:nvSpPr>
-          <p:cNvPr id="9" name="Shape 6"/>
+          <p:cNvPr id="5" name="Shape 6"/>
           <p:cNvSpPr/>
           <p:nvPr/>
         </p:nvSpPr>
@@ -11424,7 +9480,7 @@
           <a:bodyPr wrap="square" lIns="0" tIns="0" rIns="0" bIns="0" rtlCol="0" anchor="t"/>
           <a:lstStyle/>
           <a:p>
-            <a:pPr indent="0" marL="0">
+            <a:pPr marL="0" indent="0">
               <a:buNone/>
             </a:pPr>
             <a:r>
@@ -11463,7 +9519,7 @@
           <a:bodyPr wrap="square" lIns="0" tIns="0" rIns="0" bIns="0" rtlCol="0" anchor="t"/>
           <a:lstStyle/>
           <a:p>
-            <a:pPr indent="0" marL="0">
+            <a:pPr marL="0" indent="0">
               <a:lnSpc>
                 <a:spcPct val="115000"/>
               </a:lnSpc>
@@ -11486,14 +9542,14 @@
       </p:sp>
       <p:pic>
         <p:nvPicPr>
-          <p:cNvPr id="12" name="Image 0" descr="C:\Users\nguye\AppData\Local\Temp\claude\E--WORK-OFFLINE-apps-Adflow\c4dbe0b3-8f3b-4a26-ba73-6ba5f8057916\scratchpad\brand\rmit-full.png">    </p:cNvPr>
+          <p:cNvPr id="12" name="Image 0" descr="C:\Users\nguye\AppData\Local\Temp\claude\E--WORK-OFFLINE-apps-Adflow\c4dbe0b3-8f3b-4a26-ba73-6ba5f8057916\scratchpad\brand\rmit-full.png"/>
           <p:cNvPicPr>
             <a:picLocks noChangeAspect="1"/>
           </p:cNvPicPr>
           <p:nvPr/>
         </p:nvPicPr>
         <p:blipFill>
-          <a:blip r:embed="rId1"/>
+          <a:blip r:embed="rId3"/>
           <a:stretch>
             <a:fillRect/>
           </a:stretch>
@@ -11529,7 +9585,7 @@
           <a:bodyPr wrap="square" lIns="0" tIns="0" rIns="0" bIns="0" rtlCol="0" anchor="ctr"/>
           <a:lstStyle/>
           <a:p>
-            <a:pPr indent="0" marL="0">
+            <a:pPr marL="0" indent="0">
               <a:buNone/>
             </a:pPr>
             <a:r>
@@ -11568,7 +9624,7 @@
           <a:bodyPr wrap="square" lIns="0" tIns="0" rIns="0" bIns="0" rtlCol="0" anchor="ctr"/>
           <a:lstStyle/>
           <a:p>
-            <a:pPr algn="r" indent="0" marL="0">
+            <a:pPr marL="0" indent="0" algn="r">
               <a:buNone/>
             </a:pPr>
             <a:r>
@@ -11580,7 +9636,7 @@
                 <a:ea typeface="Calibri" pitchFamily="34" charset="-122"/>
                 <a:cs typeface="Calibri" pitchFamily="34" charset="-120"/>
               </a:rPr>
-              <a:t>8</a:t>
+              <a:t>7</a:t>
             </a:r>
             <a:endParaRPr lang="en-US" sz="900" dirty="0"/>
           </a:p>
@@ -11594,7 +9650,7 @@
 </p:sld>
 </file>
 
-<file path=ppt/slides/slide9.xml><?xml version="1.0" encoding="utf-8"?>
+<file path=ppt/slides/slide8.xml><?xml version="1.0" encoding="utf-8"?>
 <p:sld xmlns:a="http://schemas.openxmlformats.org/drawingml/2006/main" xmlns:r="http://schemas.openxmlformats.org/officeDocument/2006/relationships" xmlns:p="http://schemas.openxmlformats.org/presentationml/2006/main">
   <p:cSld name="Slide 9">
     <p:bg>
@@ -11602,6 +9658,7 @@
         <a:solidFill>
           <a:srgbClr val="000054"/>
         </a:solidFill>
+        <a:effectLst/>
       </p:bgPr>
     </p:bg>
     <p:spTree>
@@ -11639,11 +9696,11 @@
           <a:bodyPr wrap="square" lIns="0" tIns="0" rIns="0" bIns="0" rtlCol="0" anchor="ctr"/>
           <a:lstStyle/>
           <a:p>
-            <a:pPr algn="l" indent="0" marL="0">
+            <a:pPr marL="0" indent="0" algn="l">
               <a:buNone/>
             </a:pPr>
             <a:r>
-              <a:rPr lang="en-US" sz="1100" b="1" spc="200" kern="0" dirty="0">
+              <a:rPr lang="en-US" sz="1100" b="1" kern="0" spc="200" dirty="0">
                 <a:solidFill>
                   <a:srgbClr val="E61E2A"/>
                 </a:solidFill>
@@ -11678,7 +9735,7 @@
           <a:bodyPr wrap="square" lIns="0" tIns="0" rIns="0" bIns="0" rtlCol="0" anchor="ctr"/>
           <a:lstStyle/>
           <a:p>
-            <a:pPr algn="l" indent="0" marL="0">
+            <a:pPr marL="0" indent="0" algn="l">
               <a:buNone/>
             </a:pPr>
             <a:r>
@@ -11717,7 +9774,7 @@
           <a:bodyPr wrap="square" lIns="0" tIns="0" rIns="0" bIns="0" rtlCol="0" anchor="t"/>
           <a:lstStyle/>
           <a:p>
-            <a:pPr algn="l" indent="0" marL="0">
+            <a:pPr marL="0" indent="0" algn="l">
               <a:lnSpc>
                 <a:spcPct val="120000"/>
               </a:lnSpc>
@@ -11786,11 +9843,11 @@
           <a:bodyPr wrap="square" lIns="0" tIns="0" rIns="0" bIns="0" rtlCol="0" anchor="ctr"/>
           <a:lstStyle/>
           <a:p>
-            <a:pPr indent="0" marL="0">
+            <a:pPr marL="0" indent="0">
               <a:buNone/>
             </a:pPr>
             <a:r>
-              <a:rPr lang="en-US" sz="1200" b="1" spc="150" kern="0" dirty="0">
+              <a:rPr lang="en-US" sz="1200" b="1" kern="0" spc="150" dirty="0">
                 <a:solidFill>
                   <a:srgbClr val="E61E2A"/>
                 </a:solidFill>
@@ -11825,7 +9882,7 @@
           <a:bodyPr wrap="square" lIns="0" tIns="0" rIns="0" bIns="0" rtlCol="0" anchor="t"/>
           <a:lstStyle/>
           <a:p>
-            <a:pPr indent="0" marL="0">
+            <a:pPr marL="0" indent="0">
               <a:lnSpc>
                 <a:spcPct val="125000"/>
               </a:lnSpc>
@@ -11894,11 +9951,11 @@
           <a:bodyPr wrap="square" lIns="0" tIns="0" rIns="0" bIns="0" rtlCol="0" anchor="ctr"/>
           <a:lstStyle/>
           <a:p>
-            <a:pPr indent="0" marL="0">
+            <a:pPr marL="0" indent="0">
               <a:buNone/>
             </a:pPr>
             <a:r>
-              <a:rPr lang="en-US" sz="1200" b="1" spc="150" kern="0" dirty="0">
+              <a:rPr lang="en-US" sz="1200" b="1" kern="0" spc="150" dirty="0">
                 <a:solidFill>
                   <a:srgbClr val="E61E2A"/>
                 </a:solidFill>
@@ -11933,7 +9990,7 @@
           <a:bodyPr wrap="square" lIns="0" tIns="0" rIns="0" bIns="0" rtlCol="0" anchor="t"/>
           <a:lstStyle/>
           <a:p>
-            <a:pPr indent="0" marL="0">
+            <a:pPr marL="0" indent="0">
               <a:lnSpc>
                 <a:spcPct val="125000"/>
               </a:lnSpc>
@@ -12002,7 +10059,7 @@
           <a:bodyPr wrap="square" lIns="0" tIns="0" rIns="0" bIns="0" rtlCol="0" anchor="ctr"/>
           <a:lstStyle/>
           <a:p>
-            <a:pPr indent="0" marL="0">
+            <a:pPr marL="0" indent="0">
               <a:lnSpc>
                 <a:spcPct val="120000"/>
               </a:lnSpc>
@@ -12025,14 +10082,14 @@
       </p:sp>
       <p:pic>
         <p:nvPicPr>
-          <p:cNvPr id="13" name="Image 0" descr="C:\Users\nguye\AppData\Local\Temp\claude\E--WORK-OFFLINE-apps-Adflow\c4dbe0b3-8f3b-4a26-ba73-6ba5f8057916\scratchpad\brand\rmit-white.png">    </p:cNvPr>
+          <p:cNvPr id="13" name="Image 0" descr="C:\Users\nguye\AppData\Local\Temp\claude\E--WORK-OFFLINE-apps-Adflow\c4dbe0b3-8f3b-4a26-ba73-6ba5f8057916\scratchpad\brand\rmit-white.png"/>
           <p:cNvPicPr>
             <a:picLocks noChangeAspect="1"/>
           </p:cNvPicPr>
           <p:nvPr/>
         </p:nvPicPr>
         <p:blipFill>
-          <a:blip r:embed="rId1"/>
+          <a:blip r:embed="rId3"/>
           <a:stretch>
             <a:fillRect/>
           </a:stretch>
@@ -12068,7 +10125,7 @@
           <a:bodyPr wrap="square" lIns="0" tIns="0" rIns="0" bIns="0" rtlCol="0" anchor="ctr"/>
           <a:lstStyle/>
           <a:p>
-            <a:pPr indent="0" marL="0">
+            <a:pPr marL="0" indent="0">
               <a:buNone/>
             </a:pPr>
             <a:r>
@@ -12107,13 +10164,1360 @@
           <a:bodyPr wrap="square" lIns="0" tIns="0" rIns="0" bIns="0" rtlCol="0" anchor="ctr"/>
           <a:lstStyle/>
           <a:p>
-            <a:pPr algn="r" indent="0" marL="0">
+            <a:pPr marL="0" indent="0" algn="r">
               <a:buNone/>
             </a:pPr>
             <a:r>
               <a:rPr lang="en-US" sz="900" dirty="0">
                 <a:solidFill>
                   <a:srgbClr val="8E90B4"/>
+                </a:solidFill>
+                <a:latin typeface="Calibri" pitchFamily="34" charset="0"/>
+                <a:ea typeface="Calibri" pitchFamily="34" charset="-122"/>
+                <a:cs typeface="Calibri" pitchFamily="34" charset="-120"/>
+              </a:rPr>
+              <a:t>8</a:t>
+            </a:r>
+            <a:endParaRPr lang="en-US" sz="900" dirty="0"/>
+          </a:p>
+        </p:txBody>
+      </p:sp>
+    </p:spTree>
+  </p:cSld>
+  <p:clrMapOvr>
+    <a:masterClrMapping/>
+  </p:clrMapOvr>
+</p:sld>
+</file>
+
+<file path=ppt/slides/slide9.xml><?xml version="1.0" encoding="utf-8"?>
+<p:sld xmlns:a="http://schemas.openxmlformats.org/drawingml/2006/main" xmlns:r="http://schemas.openxmlformats.org/officeDocument/2006/relationships" xmlns:p="http://schemas.openxmlformats.org/presentationml/2006/main">
+  <p:cSld name="Slide 10">
+    <p:bg>
+      <p:bgPr>
+        <a:solidFill>
+          <a:srgbClr val="FFFFFF"/>
+        </a:solidFill>
+        <a:effectLst/>
+      </p:bgPr>
+    </p:bg>
+    <p:spTree>
+      <p:nvGrpSpPr>
+        <p:cNvPr id="1" name=""/>
+        <p:cNvGrpSpPr/>
+        <p:nvPr/>
+      </p:nvGrpSpPr>
+      <p:grpSpPr>
+        <a:xfrm>
+          <a:off x="0" y="0"/>
+          <a:ext cx="0" cy="0"/>
+          <a:chOff x="0" y="0"/>
+          <a:chExt cx="0" cy="0"/>
+        </a:xfrm>
+      </p:grpSpPr>
+      <p:sp>
+        <p:nvSpPr>
+          <p:cNvPr id="2" name="Text 0"/>
+          <p:cNvSpPr txBox="1"/>
+          <p:nvPr/>
+        </p:nvSpPr>
+        <p:spPr>
+          <a:xfrm>
+            <a:off x="594360" y="146304"/>
+            <a:ext cx="10972800" cy="274320"/>
+          </a:xfrm>
+          <a:prstGeom prst="rect">
+            <a:avLst/>
+          </a:prstGeom>
+          <a:noFill/>
+          <a:ln/>
+        </p:spPr>
+        <p:txBody>
+          <a:bodyPr wrap="square" lIns="0" tIns="0" rIns="0" bIns="0" rtlCol="0" anchor="ctr"/>
+          <a:lstStyle/>
+          <a:p>
+            <a:pPr marL="0" indent="0" algn="l">
+              <a:buNone/>
+            </a:pPr>
+            <a:r>
+              <a:rPr lang="en-US" sz="1100" b="1" kern="0" spc="200" dirty="0">
+                <a:solidFill>
+                  <a:srgbClr val="E61E2A"/>
+                </a:solidFill>
+                <a:latin typeface="Calibri" pitchFamily="34" charset="0"/>
+                <a:ea typeface="Calibri" pitchFamily="34" charset="-122"/>
+                <a:cs typeface="Calibri" pitchFamily="34" charset="-120"/>
+              </a:rPr>
+              <a:t>KNOWN GAPS</a:t>
+            </a:r>
+            <a:endParaRPr lang="en-US" sz="1100" dirty="0"/>
+          </a:p>
+        </p:txBody>
+      </p:sp>
+      <p:sp>
+        <p:nvSpPr>
+          <p:cNvPr id="3" name="Text 1"/>
+          <p:cNvSpPr txBox="1"/>
+          <p:nvPr/>
+        </p:nvSpPr>
+        <p:spPr>
+          <a:xfrm>
+            <a:off x="594360" y="411480"/>
+            <a:ext cx="10972800" cy="685800"/>
+          </a:xfrm>
+          <a:prstGeom prst="rect">
+            <a:avLst/>
+          </a:prstGeom>
+          <a:noFill/>
+          <a:ln/>
+        </p:spPr>
+        <p:txBody>
+          <a:bodyPr wrap="square" lIns="0" tIns="0" rIns="0" bIns="0" rtlCol="0" anchor="ctr"/>
+          <a:lstStyle/>
+          <a:p>
+            <a:pPr marL="0" indent="0" algn="l">
+              <a:buNone/>
+            </a:pPr>
+            <a:r>
+              <a:rPr lang="en-US" sz="3400" b="1" dirty="0">
+                <a:solidFill>
+                  <a:srgbClr val="000054"/>
+                </a:solidFill>
+                <a:latin typeface="Cambria" pitchFamily="34" charset="0"/>
+                <a:ea typeface="Cambria" pitchFamily="34" charset="-122"/>
+                <a:cs typeface="Cambria" pitchFamily="34" charset="-120"/>
+              </a:rPr>
+              <a:t>Stated openly, with their status</a:t>
+            </a:r>
+            <a:endParaRPr lang="en-US" sz="3400" dirty="0"/>
+          </a:p>
+        </p:txBody>
+      </p:sp>
+      <p:graphicFrame>
+        <p:nvGraphicFramePr>
+          <p:cNvPr id="11" name="Table 0"/>
+          <p:cNvGraphicFramePr>
+            <a:graphicFrameLocks noGrp="1"/>
+          </p:cNvGraphicFramePr>
+          <p:nvPr>
+            <p:extLst>
+              <p:ext uri="{D42A27DB-BD31-4B8C-83A1-F6EECF244321}">
+                <p14:modId xmlns:p14="http://schemas.microsoft.com/office/powerpoint/2010/main" val="1579011935"/>
+              </p:ext>
+            </p:extLst>
+          </p:nvPr>
+        </p:nvGraphicFramePr>
+        <p:xfrm>
+          <a:off x="594360" y="2011680"/>
+          <a:ext cx="10881360" cy="2286000"/>
+        </p:xfrm>
+        <a:graphic>
+          <a:graphicData uri="http://schemas.openxmlformats.org/drawingml/2006/table">
+            <a:tbl>
+              <a:tblPr/>
+              <a:tblGrid>
+                <a:gridCol w="3017520">
+                  <a:extLst>
+                    <a:ext uri="{9D8B030D-6E8A-4147-A177-3AD203B41FA5}">
+                      <a16:colId xmlns:a16="http://schemas.microsoft.com/office/drawing/2014/main" val="20000"/>
+                    </a:ext>
+                  </a:extLst>
+                </a:gridCol>
+                <a:gridCol w="4297680">
+                  <a:extLst>
+                    <a:ext uri="{9D8B030D-6E8A-4147-A177-3AD203B41FA5}">
+                      <a16:colId xmlns:a16="http://schemas.microsoft.com/office/drawing/2014/main" val="20001"/>
+                    </a:ext>
+                  </a:extLst>
+                </a:gridCol>
+                <a:gridCol w="3566160">
+                  <a:extLst>
+                    <a:ext uri="{9D8B030D-6E8A-4147-A177-3AD203B41FA5}">
+                      <a16:colId xmlns:a16="http://schemas.microsoft.com/office/drawing/2014/main" val="20002"/>
+                    </a:ext>
+                  </a:extLst>
+                </a:gridCol>
+              </a:tblGrid>
+              <a:tr h="457200">
+                <a:tc>
+                  <a:txBody>
+                    <a:bodyPr/>
+                    <a:lstStyle/>
+                    <a:p>
+                      <a:pPr marL="0" indent="0">
+                        <a:buNone/>
+                      </a:pPr>
+                      <a:r>
+                        <a:rPr lang="en-US" sz="1200" b="1" dirty="0">
+                          <a:solidFill>
+                            <a:srgbClr val="FFFFFF"/>
+                          </a:solidFill>
+                          <a:latin typeface="Calibri" pitchFamily="34" charset="0"/>
+                          <a:ea typeface="Calibri" pitchFamily="34" charset="-122"/>
+                          <a:cs typeface="Calibri" pitchFamily="34" charset="-120"/>
+                        </a:rPr>
+                        <a:t>Gap</a:t>
+                      </a:r>
+                      <a:endParaRPr lang="en-US" sz="1200" dirty="0">
+                        <a:latin typeface="Calibri" charset="0"/>
+                        <a:ea typeface="Calibri" charset="0"/>
+                        <a:cs typeface="Calibri" charset="0"/>
+                      </a:endParaRPr>
+                    </a:p>
+                  </a:txBody>
+                  <a:tcPr marL="76200" marR="76200" marT="76200" marB="76200" anchor="ctr">
+                    <a:lnL w="9525" cap="flat" cmpd="sng" algn="ctr">
+                      <a:solidFill>
+                        <a:srgbClr val="D8DAE6"/>
+                      </a:solidFill>
+                      <a:prstDash val="solid"/>
+                      <a:round/>
+                      <a:headEnd type="none" w="med" len="med"/>
+                      <a:tailEnd type="none" w="med" len="med"/>
+                    </a:lnL>
+                    <a:lnR w="9525" cap="flat" cmpd="sng" algn="ctr">
+                      <a:solidFill>
+                        <a:srgbClr val="D8DAE6"/>
+                      </a:solidFill>
+                      <a:prstDash val="solid"/>
+                      <a:round/>
+                      <a:headEnd type="none" w="med" len="med"/>
+                      <a:tailEnd type="none" w="med" len="med"/>
+                    </a:lnR>
+                    <a:lnT w="9525" cap="flat" cmpd="sng" algn="ctr">
+                      <a:solidFill>
+                        <a:srgbClr val="D8DAE6"/>
+                      </a:solidFill>
+                      <a:prstDash val="solid"/>
+                      <a:round/>
+                      <a:headEnd type="none" w="med" len="med"/>
+                      <a:tailEnd type="none" w="med" len="med"/>
+                    </a:lnT>
+                    <a:lnB w="9525" cap="flat" cmpd="sng" algn="ctr">
+                      <a:solidFill>
+                        <a:srgbClr val="D8DAE6"/>
+                      </a:solidFill>
+                      <a:prstDash val="solid"/>
+                      <a:round/>
+                      <a:headEnd type="none" w="med" len="med"/>
+                      <a:tailEnd type="none" w="med" len="med"/>
+                    </a:lnB>
+                    <a:solidFill>
+                      <a:srgbClr val="000054"/>
+                    </a:solidFill>
+                  </a:tcPr>
+                </a:tc>
+                <a:tc>
+                  <a:txBody>
+                    <a:bodyPr/>
+                    <a:lstStyle/>
+                    <a:p>
+                      <a:pPr marL="0" indent="0">
+                        <a:buNone/>
+                      </a:pPr>
+                      <a:r>
+                        <a:rPr lang="en-US" sz="1200" b="1" dirty="0">
+                          <a:solidFill>
+                            <a:srgbClr val="FFFFFF"/>
+                          </a:solidFill>
+                          <a:latin typeface="Calibri" pitchFamily="34" charset="0"/>
+                          <a:ea typeface="Calibri" pitchFamily="34" charset="-122"/>
+                          <a:cs typeface="Calibri" pitchFamily="34" charset="-120"/>
+                        </a:rPr>
+                        <a:t>Effect</a:t>
+                      </a:r>
+                      <a:endParaRPr lang="en-US" sz="1200" dirty="0">
+                        <a:latin typeface="Calibri" charset="0"/>
+                        <a:ea typeface="Calibri" charset="0"/>
+                        <a:cs typeface="Calibri" charset="0"/>
+                      </a:endParaRPr>
+                    </a:p>
+                  </a:txBody>
+                  <a:tcPr marL="76200" marR="76200" marT="76200" marB="76200" anchor="ctr">
+                    <a:lnL w="9525" cap="flat" cmpd="sng" algn="ctr">
+                      <a:solidFill>
+                        <a:srgbClr val="D8DAE6"/>
+                      </a:solidFill>
+                      <a:prstDash val="solid"/>
+                      <a:round/>
+                      <a:headEnd type="none" w="med" len="med"/>
+                      <a:tailEnd type="none" w="med" len="med"/>
+                    </a:lnL>
+                    <a:lnR w="9525" cap="flat" cmpd="sng" algn="ctr">
+                      <a:solidFill>
+                        <a:srgbClr val="D8DAE6"/>
+                      </a:solidFill>
+                      <a:prstDash val="solid"/>
+                      <a:round/>
+                      <a:headEnd type="none" w="med" len="med"/>
+                      <a:tailEnd type="none" w="med" len="med"/>
+                    </a:lnR>
+                    <a:lnT w="9525" cap="flat" cmpd="sng" algn="ctr">
+                      <a:solidFill>
+                        <a:srgbClr val="D8DAE6"/>
+                      </a:solidFill>
+                      <a:prstDash val="solid"/>
+                      <a:round/>
+                      <a:headEnd type="none" w="med" len="med"/>
+                      <a:tailEnd type="none" w="med" len="med"/>
+                    </a:lnT>
+                    <a:lnB w="9525" cap="flat" cmpd="sng" algn="ctr">
+                      <a:solidFill>
+                        <a:srgbClr val="D8DAE6"/>
+                      </a:solidFill>
+                      <a:prstDash val="solid"/>
+                      <a:round/>
+                      <a:headEnd type="none" w="med" len="med"/>
+                      <a:tailEnd type="none" w="med" len="med"/>
+                    </a:lnB>
+                    <a:solidFill>
+                      <a:srgbClr val="000054"/>
+                    </a:solidFill>
+                  </a:tcPr>
+                </a:tc>
+                <a:tc>
+                  <a:txBody>
+                    <a:bodyPr/>
+                    <a:lstStyle/>
+                    <a:p>
+                      <a:pPr marL="0" indent="0">
+                        <a:buNone/>
+                      </a:pPr>
+                      <a:r>
+                        <a:rPr lang="en-US" sz="1200" b="1" dirty="0">
+                          <a:solidFill>
+                            <a:srgbClr val="FFFFFF"/>
+                          </a:solidFill>
+                          <a:latin typeface="Calibri" pitchFamily="34" charset="0"/>
+                          <a:ea typeface="Calibri" pitchFamily="34" charset="-122"/>
+                          <a:cs typeface="Calibri" pitchFamily="34" charset="-120"/>
+                        </a:rPr>
+                        <a:t>Status</a:t>
+                      </a:r>
+                      <a:endParaRPr lang="en-US" sz="1200" dirty="0">
+                        <a:latin typeface="Calibri" charset="0"/>
+                        <a:ea typeface="Calibri" charset="0"/>
+                        <a:cs typeface="Calibri" charset="0"/>
+                      </a:endParaRPr>
+                    </a:p>
+                  </a:txBody>
+                  <a:tcPr marL="76200" marR="76200" marT="76200" marB="76200" anchor="ctr">
+                    <a:lnL w="9525" cap="flat" cmpd="sng" algn="ctr">
+                      <a:solidFill>
+                        <a:srgbClr val="D8DAE6"/>
+                      </a:solidFill>
+                      <a:prstDash val="solid"/>
+                      <a:round/>
+                      <a:headEnd type="none" w="med" len="med"/>
+                      <a:tailEnd type="none" w="med" len="med"/>
+                    </a:lnL>
+                    <a:lnR w="9525" cap="flat" cmpd="sng" algn="ctr">
+                      <a:solidFill>
+                        <a:srgbClr val="D8DAE6"/>
+                      </a:solidFill>
+                      <a:prstDash val="solid"/>
+                      <a:round/>
+                      <a:headEnd type="none" w="med" len="med"/>
+                      <a:tailEnd type="none" w="med" len="med"/>
+                    </a:lnR>
+                    <a:lnT w="9525" cap="flat" cmpd="sng" algn="ctr">
+                      <a:solidFill>
+                        <a:srgbClr val="D8DAE6"/>
+                      </a:solidFill>
+                      <a:prstDash val="solid"/>
+                      <a:round/>
+                      <a:headEnd type="none" w="med" len="med"/>
+                      <a:tailEnd type="none" w="med" len="med"/>
+                    </a:lnT>
+                    <a:lnB w="9525" cap="flat" cmpd="sng" algn="ctr">
+                      <a:solidFill>
+                        <a:srgbClr val="D8DAE6"/>
+                      </a:solidFill>
+                      <a:prstDash val="solid"/>
+                      <a:round/>
+                      <a:headEnd type="none" w="med" len="med"/>
+                      <a:tailEnd type="none" w="med" len="med"/>
+                    </a:lnB>
+                    <a:solidFill>
+                      <a:srgbClr val="000054"/>
+                    </a:solidFill>
+                  </a:tcPr>
+                </a:tc>
+                <a:extLst>
+                  <a:ext uri="{0D108BD9-81ED-4DB2-BD59-A6C34878D82A}">
+                    <a16:rowId xmlns:a16="http://schemas.microsoft.com/office/drawing/2014/main" val="10000"/>
+                  </a:ext>
+                </a:extLst>
+              </a:tr>
+              <a:tr h="457200">
+                <a:tc>
+                  <a:txBody>
+                    <a:bodyPr/>
+                    <a:lstStyle/>
+                    <a:p>
+                      <a:pPr marL="0" indent="0">
+                        <a:buNone/>
+                      </a:pPr>
+                      <a:r>
+                        <a:rPr lang="en-US" sz="1200" dirty="0">
+                          <a:solidFill>
+                            <a:srgbClr val="33333B"/>
+                          </a:solidFill>
+                          <a:latin typeface="Calibri" pitchFamily="34" charset="0"/>
+                          <a:ea typeface="Calibri" pitchFamily="34" charset="-122"/>
+                          <a:cs typeface="Calibri" pitchFamily="34" charset="-120"/>
+                        </a:rPr>
+                        <a:t>Binaries are not code-signed</a:t>
+                      </a:r>
+                      <a:endParaRPr lang="en-US" sz="1200" dirty="0">
+                        <a:latin typeface="Calibri" charset="0"/>
+                        <a:ea typeface="Calibri" charset="0"/>
+                        <a:cs typeface="Calibri" charset="0"/>
+                      </a:endParaRPr>
+                    </a:p>
+                  </a:txBody>
+                  <a:tcPr marL="76200" marR="76200" marT="76200" marB="76200" anchor="ctr">
+                    <a:lnL w="9525" cap="flat" cmpd="sng" algn="ctr">
+                      <a:solidFill>
+                        <a:srgbClr val="D8DAE6"/>
+                      </a:solidFill>
+                      <a:prstDash val="solid"/>
+                      <a:round/>
+                      <a:headEnd type="none" w="med" len="med"/>
+                      <a:tailEnd type="none" w="med" len="med"/>
+                    </a:lnL>
+                    <a:lnR w="9525" cap="flat" cmpd="sng" algn="ctr">
+                      <a:solidFill>
+                        <a:srgbClr val="D8DAE6"/>
+                      </a:solidFill>
+                      <a:prstDash val="solid"/>
+                      <a:round/>
+                      <a:headEnd type="none" w="med" len="med"/>
+                      <a:tailEnd type="none" w="med" len="med"/>
+                    </a:lnR>
+                    <a:lnT w="9525" cap="flat" cmpd="sng" algn="ctr">
+                      <a:solidFill>
+                        <a:srgbClr val="D8DAE6"/>
+                      </a:solidFill>
+                      <a:prstDash val="solid"/>
+                      <a:round/>
+                      <a:headEnd type="none" w="med" len="med"/>
+                      <a:tailEnd type="none" w="med" len="med"/>
+                    </a:lnT>
+                    <a:lnB w="9525" cap="flat" cmpd="sng" algn="ctr">
+                      <a:solidFill>
+                        <a:srgbClr val="D8DAE6"/>
+                      </a:solidFill>
+                      <a:prstDash val="solid"/>
+                      <a:round/>
+                      <a:headEnd type="none" w="med" len="med"/>
+                      <a:tailEnd type="none" w="med" len="med"/>
+                    </a:lnB>
+                  </a:tcPr>
+                </a:tc>
+                <a:tc>
+                  <a:txBody>
+                    <a:bodyPr/>
+                    <a:lstStyle/>
+                    <a:p>
+                      <a:pPr marL="0" indent="0">
+                        <a:buNone/>
+                      </a:pPr>
+                      <a:r>
+                        <a:rPr lang="en-US" sz="1200" dirty="0">
+                          <a:solidFill>
+                            <a:srgbClr val="33333B"/>
+                          </a:solidFill>
+                          <a:latin typeface="Calibri" pitchFamily="34" charset="0"/>
+                          <a:ea typeface="Calibri" pitchFamily="34" charset="-122"/>
+                          <a:cs typeface="Calibri" pitchFamily="34" charset="-120"/>
+                        </a:rPr>
+                        <a:t>Windows warns on download; macOS blocks it outright</a:t>
+                      </a:r>
+                      <a:endParaRPr lang="en-US" sz="1200" dirty="0">
+                        <a:latin typeface="Calibri" charset="0"/>
+                        <a:ea typeface="Calibri" charset="0"/>
+                        <a:cs typeface="Calibri" charset="0"/>
+                      </a:endParaRPr>
+                    </a:p>
+                  </a:txBody>
+                  <a:tcPr marL="76200" marR="76200" marT="76200" marB="76200" anchor="ctr">
+                    <a:lnL w="9525" cap="flat" cmpd="sng" algn="ctr">
+                      <a:solidFill>
+                        <a:srgbClr val="D8DAE6"/>
+                      </a:solidFill>
+                      <a:prstDash val="solid"/>
+                      <a:round/>
+                      <a:headEnd type="none" w="med" len="med"/>
+                      <a:tailEnd type="none" w="med" len="med"/>
+                    </a:lnL>
+                    <a:lnR w="9525" cap="flat" cmpd="sng" algn="ctr">
+                      <a:solidFill>
+                        <a:srgbClr val="D8DAE6"/>
+                      </a:solidFill>
+                      <a:prstDash val="solid"/>
+                      <a:round/>
+                      <a:headEnd type="none" w="med" len="med"/>
+                      <a:tailEnd type="none" w="med" len="med"/>
+                    </a:lnR>
+                    <a:lnT w="9525" cap="flat" cmpd="sng" algn="ctr">
+                      <a:solidFill>
+                        <a:srgbClr val="D8DAE6"/>
+                      </a:solidFill>
+                      <a:prstDash val="solid"/>
+                      <a:round/>
+                      <a:headEnd type="none" w="med" len="med"/>
+                      <a:tailEnd type="none" w="med" len="med"/>
+                    </a:lnT>
+                    <a:lnB w="9525" cap="flat" cmpd="sng" algn="ctr">
+                      <a:solidFill>
+                        <a:srgbClr val="D8DAE6"/>
+                      </a:solidFill>
+                      <a:prstDash val="solid"/>
+                      <a:round/>
+                      <a:headEnd type="none" w="med" len="med"/>
+                      <a:tailEnd type="none" w="med" len="med"/>
+                    </a:lnB>
+                  </a:tcPr>
+                </a:tc>
+                <a:tc>
+                  <a:txBody>
+                    <a:bodyPr/>
+                    <a:lstStyle/>
+                    <a:p>
+                      <a:pPr marL="0" indent="0">
+                        <a:buNone/>
+                      </a:pPr>
+                      <a:r>
+                        <a:rPr lang="en-US" sz="1200" dirty="0">
+                          <a:solidFill>
+                            <a:srgbClr val="33333B"/>
+                          </a:solidFill>
+                          <a:latin typeface="Calibri" pitchFamily="34" charset="0"/>
+                          <a:ea typeface="Calibri" pitchFamily="34" charset="-122"/>
+                          <a:cs typeface="Calibri" pitchFamily="34" charset="-120"/>
+                        </a:rPr>
+                        <a:t>Needs a certificate — our main ask</a:t>
+                      </a:r>
+                      <a:endParaRPr lang="en-US" sz="1200" dirty="0">
+                        <a:latin typeface="Calibri" charset="0"/>
+                        <a:ea typeface="Calibri" charset="0"/>
+                        <a:cs typeface="Calibri" charset="0"/>
+                      </a:endParaRPr>
+                    </a:p>
+                  </a:txBody>
+                  <a:tcPr marL="76200" marR="76200" marT="76200" marB="76200" anchor="ctr">
+                    <a:lnL w="9525" cap="flat" cmpd="sng" algn="ctr">
+                      <a:solidFill>
+                        <a:srgbClr val="D8DAE6"/>
+                      </a:solidFill>
+                      <a:prstDash val="solid"/>
+                      <a:round/>
+                      <a:headEnd type="none" w="med" len="med"/>
+                      <a:tailEnd type="none" w="med" len="med"/>
+                    </a:lnL>
+                    <a:lnR w="9525" cap="flat" cmpd="sng" algn="ctr">
+                      <a:solidFill>
+                        <a:srgbClr val="D8DAE6"/>
+                      </a:solidFill>
+                      <a:prstDash val="solid"/>
+                      <a:round/>
+                      <a:headEnd type="none" w="med" len="med"/>
+                      <a:tailEnd type="none" w="med" len="med"/>
+                    </a:lnR>
+                    <a:lnT w="9525" cap="flat" cmpd="sng" algn="ctr">
+                      <a:solidFill>
+                        <a:srgbClr val="D8DAE6"/>
+                      </a:solidFill>
+                      <a:prstDash val="solid"/>
+                      <a:round/>
+                      <a:headEnd type="none" w="med" len="med"/>
+                      <a:tailEnd type="none" w="med" len="med"/>
+                    </a:lnT>
+                    <a:lnB w="9525" cap="flat" cmpd="sng" algn="ctr">
+                      <a:solidFill>
+                        <a:srgbClr val="D8DAE6"/>
+                      </a:solidFill>
+                      <a:prstDash val="solid"/>
+                      <a:round/>
+                      <a:headEnd type="none" w="med" len="med"/>
+                      <a:tailEnd type="none" w="med" len="med"/>
+                    </a:lnB>
+                  </a:tcPr>
+                </a:tc>
+                <a:extLst>
+                  <a:ext uri="{0D108BD9-81ED-4DB2-BD59-A6C34878D82A}">
+                    <a16:rowId xmlns:a16="http://schemas.microsoft.com/office/drawing/2014/main" val="10001"/>
+                  </a:ext>
+                </a:extLst>
+              </a:tr>
+              <a:tr h="457200">
+                <a:tc>
+                  <a:txBody>
+                    <a:bodyPr/>
+                    <a:lstStyle/>
+                    <a:p>
+                      <a:pPr marL="0" indent="0">
+                        <a:buNone/>
+                      </a:pPr>
+                      <a:r>
+                        <a:rPr lang="en-US" sz="1200" dirty="0">
+                          <a:solidFill>
+                            <a:srgbClr val="33333B"/>
+                          </a:solidFill>
+                          <a:latin typeface="Calibri" pitchFamily="34" charset="0"/>
+                          <a:ea typeface="Calibri" pitchFamily="34" charset="-122"/>
+                          <a:cs typeface="Calibri" pitchFamily="34" charset="-120"/>
+                        </a:rPr>
+                        <a:t>Chromium version is pinned</a:t>
+                      </a:r>
+                      <a:endParaRPr lang="en-US" sz="1200" dirty="0">
+                        <a:latin typeface="Calibri" charset="0"/>
+                        <a:ea typeface="Calibri" charset="0"/>
+                        <a:cs typeface="Calibri" charset="0"/>
+                      </a:endParaRPr>
+                    </a:p>
+                  </a:txBody>
+                  <a:tcPr marL="76200" marR="76200" marT="76200" marB="76200" anchor="ctr">
+                    <a:lnL w="9525" cap="flat" cmpd="sng" algn="ctr">
+                      <a:solidFill>
+                        <a:srgbClr val="D8DAE6"/>
+                      </a:solidFill>
+                      <a:prstDash val="solid"/>
+                      <a:round/>
+                      <a:headEnd type="none" w="med" len="med"/>
+                      <a:tailEnd type="none" w="med" len="med"/>
+                    </a:lnL>
+                    <a:lnR w="9525" cap="flat" cmpd="sng" algn="ctr">
+                      <a:solidFill>
+                        <a:srgbClr val="D8DAE6"/>
+                      </a:solidFill>
+                      <a:prstDash val="solid"/>
+                      <a:round/>
+                      <a:headEnd type="none" w="med" len="med"/>
+                      <a:tailEnd type="none" w="med" len="med"/>
+                    </a:lnR>
+                    <a:lnT w="9525" cap="flat" cmpd="sng" algn="ctr">
+                      <a:solidFill>
+                        <a:srgbClr val="D8DAE6"/>
+                      </a:solidFill>
+                      <a:prstDash val="solid"/>
+                      <a:round/>
+                      <a:headEnd type="none" w="med" len="med"/>
+                      <a:tailEnd type="none" w="med" len="med"/>
+                    </a:lnT>
+                    <a:lnB w="9525" cap="flat" cmpd="sng" algn="ctr">
+                      <a:solidFill>
+                        <a:srgbClr val="D8DAE6"/>
+                      </a:solidFill>
+                      <a:prstDash val="solid"/>
+                      <a:round/>
+                      <a:headEnd type="none" w="med" len="med"/>
+                      <a:tailEnd type="none" w="med" len="med"/>
+                    </a:lnB>
+                  </a:tcPr>
+                </a:tc>
+                <a:tc>
+                  <a:txBody>
+                    <a:bodyPr/>
+                    <a:lstStyle/>
+                    <a:p>
+                      <a:pPr marL="0" indent="0">
+                        <a:buNone/>
+                      </a:pPr>
+                      <a:r>
+                        <a:rPr lang="en-US" sz="1200" dirty="0">
+                          <a:solidFill>
+                            <a:srgbClr val="33333B"/>
+                          </a:solidFill>
+                          <a:latin typeface="Calibri" pitchFamily="34" charset="0"/>
+                          <a:ea typeface="Calibri" pitchFamily="34" charset="-122"/>
+                          <a:cs typeface="Calibri" pitchFamily="34" charset="-120"/>
+                        </a:rPr>
+                        <a:t>Not patched by ITS browser management</a:t>
+                      </a:r>
+                      <a:endParaRPr lang="en-US" sz="1200" dirty="0">
+                        <a:latin typeface="Calibri" charset="0"/>
+                        <a:ea typeface="Calibri" charset="0"/>
+                        <a:cs typeface="Calibri" charset="0"/>
+                      </a:endParaRPr>
+                    </a:p>
+                  </a:txBody>
+                  <a:tcPr marL="76200" marR="76200" marT="76200" marB="76200" anchor="ctr">
+                    <a:lnL w="9525" cap="flat" cmpd="sng" algn="ctr">
+                      <a:solidFill>
+                        <a:srgbClr val="D8DAE6"/>
+                      </a:solidFill>
+                      <a:prstDash val="solid"/>
+                      <a:round/>
+                      <a:headEnd type="none" w="med" len="med"/>
+                      <a:tailEnd type="none" w="med" len="med"/>
+                    </a:lnL>
+                    <a:lnR w="9525" cap="flat" cmpd="sng" algn="ctr">
+                      <a:solidFill>
+                        <a:srgbClr val="D8DAE6"/>
+                      </a:solidFill>
+                      <a:prstDash val="solid"/>
+                      <a:round/>
+                      <a:headEnd type="none" w="med" len="med"/>
+                      <a:tailEnd type="none" w="med" len="med"/>
+                    </a:lnR>
+                    <a:lnT w="9525" cap="flat" cmpd="sng" algn="ctr">
+                      <a:solidFill>
+                        <a:srgbClr val="D8DAE6"/>
+                      </a:solidFill>
+                      <a:prstDash val="solid"/>
+                      <a:round/>
+                      <a:headEnd type="none" w="med" len="med"/>
+                      <a:tailEnd type="none" w="med" len="med"/>
+                    </a:lnT>
+                    <a:lnB w="9525" cap="flat" cmpd="sng" algn="ctr">
+                      <a:solidFill>
+                        <a:srgbClr val="D8DAE6"/>
+                      </a:solidFill>
+                      <a:prstDash val="solid"/>
+                      <a:round/>
+                      <a:headEnd type="none" w="med" len="med"/>
+                      <a:tailEnd type="none" w="med" len="med"/>
+                    </a:lnB>
+                  </a:tcPr>
+                </a:tc>
+                <a:tc>
+                  <a:txBody>
+                    <a:bodyPr/>
+                    <a:lstStyle/>
+                    <a:p>
+                      <a:pPr marL="0" indent="0">
+                        <a:buNone/>
+                      </a:pPr>
+                      <a:r>
+                        <a:rPr lang="en-US" sz="1200" dirty="0">
+                          <a:solidFill>
+                            <a:srgbClr val="33333B"/>
+                          </a:solidFill>
+                          <a:latin typeface="Calibri" pitchFamily="34" charset="0"/>
+                          <a:ea typeface="Calibri" pitchFamily="34" charset="-122"/>
+                          <a:cs typeface="Calibri" pitchFamily="34" charset="-120"/>
+                        </a:rPr>
+                        <a:t>Rebuild and redistribute on advisories</a:t>
+                      </a:r>
+                      <a:endParaRPr lang="en-US" sz="1200" dirty="0">
+                        <a:latin typeface="Calibri" charset="0"/>
+                        <a:ea typeface="Calibri" charset="0"/>
+                        <a:cs typeface="Calibri" charset="0"/>
+                      </a:endParaRPr>
+                    </a:p>
+                  </a:txBody>
+                  <a:tcPr marL="76200" marR="76200" marT="76200" marB="76200" anchor="ctr">
+                    <a:lnL w="9525" cap="flat" cmpd="sng" algn="ctr">
+                      <a:solidFill>
+                        <a:srgbClr val="D8DAE6"/>
+                      </a:solidFill>
+                      <a:prstDash val="solid"/>
+                      <a:round/>
+                      <a:headEnd type="none" w="med" len="med"/>
+                      <a:tailEnd type="none" w="med" len="med"/>
+                    </a:lnL>
+                    <a:lnR w="9525" cap="flat" cmpd="sng" algn="ctr">
+                      <a:solidFill>
+                        <a:srgbClr val="D8DAE6"/>
+                      </a:solidFill>
+                      <a:prstDash val="solid"/>
+                      <a:round/>
+                      <a:headEnd type="none" w="med" len="med"/>
+                      <a:tailEnd type="none" w="med" len="med"/>
+                    </a:lnR>
+                    <a:lnT w="9525" cap="flat" cmpd="sng" algn="ctr">
+                      <a:solidFill>
+                        <a:srgbClr val="D8DAE6"/>
+                      </a:solidFill>
+                      <a:prstDash val="solid"/>
+                      <a:round/>
+                      <a:headEnd type="none" w="med" len="med"/>
+                      <a:tailEnd type="none" w="med" len="med"/>
+                    </a:lnT>
+                    <a:lnB w="9525" cap="flat" cmpd="sng" algn="ctr">
+                      <a:solidFill>
+                        <a:srgbClr val="D8DAE6"/>
+                      </a:solidFill>
+                      <a:prstDash val="solid"/>
+                      <a:round/>
+                      <a:headEnd type="none" w="med" len="med"/>
+                      <a:tailEnd type="none" w="med" len="med"/>
+                    </a:lnB>
+                  </a:tcPr>
+                </a:tc>
+                <a:extLst>
+                  <a:ext uri="{0D108BD9-81ED-4DB2-BD59-A6C34878D82A}">
+                    <a16:rowId xmlns:a16="http://schemas.microsoft.com/office/drawing/2014/main" val="10002"/>
+                  </a:ext>
+                </a:extLst>
+              </a:tr>
+              <a:tr h="457200">
+                <a:tc>
+                  <a:txBody>
+                    <a:bodyPr/>
+                    <a:lstStyle/>
+                    <a:p>
+                      <a:pPr marL="0" indent="0">
+                        <a:buNone/>
+                      </a:pPr>
+                      <a:r>
+                        <a:rPr lang="en-US" sz="1200" dirty="0">
+                          <a:solidFill>
+                            <a:srgbClr val="33333B"/>
+                          </a:solidFill>
+                          <a:latin typeface="Calibri" pitchFamily="34" charset="0"/>
+                          <a:ea typeface="Calibri" pitchFamily="34" charset="-122"/>
+                          <a:cs typeface="Calibri" pitchFamily="34" charset="-120"/>
+                        </a:rPr>
+                        <a:t>Build tooling reports findings</a:t>
+                      </a:r>
+                      <a:endParaRPr lang="en-US" sz="1200" dirty="0">
+                        <a:latin typeface="Calibri" charset="0"/>
+                        <a:ea typeface="Calibri" charset="0"/>
+                        <a:cs typeface="Calibri" charset="0"/>
+                      </a:endParaRPr>
+                    </a:p>
+                  </a:txBody>
+                  <a:tcPr marL="76200" marR="76200" marT="76200" marB="76200" anchor="ctr">
+                    <a:lnL w="9525" cap="flat" cmpd="sng" algn="ctr">
+                      <a:solidFill>
+                        <a:srgbClr val="D8DAE6"/>
+                      </a:solidFill>
+                      <a:prstDash val="solid"/>
+                      <a:round/>
+                      <a:headEnd type="none" w="med" len="med"/>
+                      <a:tailEnd type="none" w="med" len="med"/>
+                    </a:lnL>
+                    <a:lnR w="9525" cap="flat" cmpd="sng" algn="ctr">
+                      <a:solidFill>
+                        <a:srgbClr val="D8DAE6"/>
+                      </a:solidFill>
+                      <a:prstDash val="solid"/>
+                      <a:round/>
+                      <a:headEnd type="none" w="med" len="med"/>
+                      <a:tailEnd type="none" w="med" len="med"/>
+                    </a:lnR>
+                    <a:lnT w="9525" cap="flat" cmpd="sng" algn="ctr">
+                      <a:solidFill>
+                        <a:srgbClr val="D8DAE6"/>
+                      </a:solidFill>
+                      <a:prstDash val="solid"/>
+                      <a:round/>
+                      <a:headEnd type="none" w="med" len="med"/>
+                      <a:tailEnd type="none" w="med" len="med"/>
+                    </a:lnT>
+                    <a:lnB w="9525" cap="flat" cmpd="sng" algn="ctr">
+                      <a:solidFill>
+                        <a:srgbClr val="D8DAE6"/>
+                      </a:solidFill>
+                      <a:prstDash val="solid"/>
+                      <a:round/>
+                      <a:headEnd type="none" w="med" len="med"/>
+                      <a:tailEnd type="none" w="med" len="med"/>
+                    </a:lnB>
+                  </a:tcPr>
+                </a:tc>
+                <a:tc>
+                  <a:txBody>
+                    <a:bodyPr/>
+                    <a:lstStyle/>
+                    <a:p>
+                      <a:pPr marL="0" indent="0">
+                        <a:buNone/>
+                      </a:pPr>
+                      <a:r>
+                        <a:rPr lang="en-US" sz="1200" dirty="0">
+                          <a:solidFill>
+                            <a:srgbClr val="33333B"/>
+                          </a:solidFill>
+                          <a:latin typeface="Calibri" pitchFamily="34" charset="0"/>
+                          <a:ea typeface="Calibri" pitchFamily="34" charset="-122"/>
+                          <a:cs typeface="Calibri" pitchFamily="34" charset="-120"/>
+                        </a:rPr>
+                        <a:t>None reach users; shipped scope is zero</a:t>
+                      </a:r>
+                      <a:endParaRPr lang="en-US" sz="1200" dirty="0">
+                        <a:latin typeface="Calibri" charset="0"/>
+                        <a:ea typeface="Calibri" charset="0"/>
+                        <a:cs typeface="Calibri" charset="0"/>
+                      </a:endParaRPr>
+                    </a:p>
+                  </a:txBody>
+                  <a:tcPr marL="76200" marR="76200" marT="76200" marB="76200" anchor="ctr">
+                    <a:lnL w="9525" cap="flat" cmpd="sng" algn="ctr">
+                      <a:solidFill>
+                        <a:srgbClr val="D8DAE6"/>
+                      </a:solidFill>
+                      <a:prstDash val="solid"/>
+                      <a:round/>
+                      <a:headEnd type="none" w="med" len="med"/>
+                      <a:tailEnd type="none" w="med" len="med"/>
+                    </a:lnL>
+                    <a:lnR w="9525" cap="flat" cmpd="sng" algn="ctr">
+                      <a:solidFill>
+                        <a:srgbClr val="D8DAE6"/>
+                      </a:solidFill>
+                      <a:prstDash val="solid"/>
+                      <a:round/>
+                      <a:headEnd type="none" w="med" len="med"/>
+                      <a:tailEnd type="none" w="med" len="med"/>
+                    </a:lnR>
+                    <a:lnT w="9525" cap="flat" cmpd="sng" algn="ctr">
+                      <a:solidFill>
+                        <a:srgbClr val="D8DAE6"/>
+                      </a:solidFill>
+                      <a:prstDash val="solid"/>
+                      <a:round/>
+                      <a:headEnd type="none" w="med" len="med"/>
+                      <a:tailEnd type="none" w="med" len="med"/>
+                    </a:lnT>
+                    <a:lnB w="9525" cap="flat" cmpd="sng" algn="ctr">
+                      <a:solidFill>
+                        <a:srgbClr val="D8DAE6"/>
+                      </a:solidFill>
+                      <a:prstDash val="solid"/>
+                      <a:round/>
+                      <a:headEnd type="none" w="med" len="med"/>
+                      <a:tailEnd type="none" w="med" len="med"/>
+                    </a:lnB>
+                  </a:tcPr>
+                </a:tc>
+                <a:tc>
+                  <a:txBody>
+                    <a:bodyPr/>
+                    <a:lstStyle/>
+                    <a:p>
+                      <a:pPr marL="0" indent="0">
+                        <a:buNone/>
+                      </a:pPr>
+                      <a:r>
+                        <a:rPr lang="en-US" sz="1200" dirty="0">
+                          <a:solidFill>
+                            <a:srgbClr val="33333B"/>
+                          </a:solidFill>
+                          <a:latin typeface="Calibri" pitchFamily="34" charset="0"/>
+                          <a:ea typeface="Calibri" pitchFamily="34" charset="-122"/>
+                          <a:cs typeface="Calibri" pitchFamily="34" charset="-120"/>
+                        </a:rPr>
+                        <a:t>Build-machine hygiene, tracked</a:t>
+                      </a:r>
+                      <a:endParaRPr lang="en-US" sz="1200" dirty="0">
+                        <a:latin typeface="Calibri" charset="0"/>
+                        <a:ea typeface="Calibri" charset="0"/>
+                        <a:cs typeface="Calibri" charset="0"/>
+                      </a:endParaRPr>
+                    </a:p>
+                  </a:txBody>
+                  <a:tcPr marL="76200" marR="76200" marT="76200" marB="76200" anchor="ctr">
+                    <a:lnL w="9525" cap="flat" cmpd="sng" algn="ctr">
+                      <a:solidFill>
+                        <a:srgbClr val="D8DAE6"/>
+                      </a:solidFill>
+                      <a:prstDash val="solid"/>
+                      <a:round/>
+                      <a:headEnd type="none" w="med" len="med"/>
+                      <a:tailEnd type="none" w="med" len="med"/>
+                    </a:lnL>
+                    <a:lnR w="9525" cap="flat" cmpd="sng" algn="ctr">
+                      <a:solidFill>
+                        <a:srgbClr val="D8DAE6"/>
+                      </a:solidFill>
+                      <a:prstDash val="solid"/>
+                      <a:round/>
+                      <a:headEnd type="none" w="med" len="med"/>
+                      <a:tailEnd type="none" w="med" len="med"/>
+                    </a:lnR>
+                    <a:lnT w="9525" cap="flat" cmpd="sng" algn="ctr">
+                      <a:solidFill>
+                        <a:srgbClr val="D8DAE6"/>
+                      </a:solidFill>
+                      <a:prstDash val="solid"/>
+                      <a:round/>
+                      <a:headEnd type="none" w="med" len="med"/>
+                      <a:tailEnd type="none" w="med" len="med"/>
+                    </a:lnT>
+                    <a:lnB w="9525" cap="flat" cmpd="sng" algn="ctr">
+                      <a:solidFill>
+                        <a:srgbClr val="D8DAE6"/>
+                      </a:solidFill>
+                      <a:prstDash val="solid"/>
+                      <a:round/>
+                      <a:headEnd type="none" w="med" len="med"/>
+                      <a:tailEnd type="none" w="med" len="med"/>
+                    </a:lnB>
+                  </a:tcPr>
+                </a:tc>
+                <a:extLst>
+                  <a:ext uri="{0D108BD9-81ED-4DB2-BD59-A6C34878D82A}">
+                    <a16:rowId xmlns:a16="http://schemas.microsoft.com/office/drawing/2014/main" val="10003"/>
+                  </a:ext>
+                </a:extLst>
+              </a:tr>
+              <a:tr h="457200">
+                <a:tc>
+                  <a:txBody>
+                    <a:bodyPr/>
+                    <a:lstStyle/>
+                    <a:p>
+                      <a:pPr marL="0" indent="0">
+                        <a:buNone/>
+                      </a:pPr>
+                      <a:r>
+                        <a:rPr lang="en-US" sz="1200" dirty="0">
+                          <a:solidFill>
+                            <a:srgbClr val="33333B"/>
+                          </a:solidFill>
+                          <a:latin typeface="Calibri" pitchFamily="34" charset="0"/>
+                          <a:ea typeface="Calibri" pitchFamily="34" charset="-122"/>
+                          <a:cs typeface="Calibri" pitchFamily="34" charset="-120"/>
+                        </a:rPr>
+                        <a:t>macOS build not yet produced</a:t>
+                      </a:r>
+                      <a:endParaRPr lang="en-US" sz="1200" dirty="0">
+                        <a:latin typeface="Calibri" charset="0"/>
+                        <a:ea typeface="Calibri" charset="0"/>
+                        <a:cs typeface="Calibri" charset="0"/>
+                      </a:endParaRPr>
+                    </a:p>
+                  </a:txBody>
+                  <a:tcPr marL="76200" marR="76200" marT="76200" marB="76200" anchor="ctr">
+                    <a:lnL w="9525" cap="flat" cmpd="sng" algn="ctr">
+                      <a:solidFill>
+                        <a:srgbClr val="D8DAE6"/>
+                      </a:solidFill>
+                      <a:prstDash val="solid"/>
+                      <a:round/>
+                      <a:headEnd type="none" w="med" len="med"/>
+                      <a:tailEnd type="none" w="med" len="med"/>
+                    </a:lnL>
+                    <a:lnR w="9525" cap="flat" cmpd="sng" algn="ctr">
+                      <a:solidFill>
+                        <a:srgbClr val="D8DAE6"/>
+                      </a:solidFill>
+                      <a:prstDash val="solid"/>
+                      <a:round/>
+                      <a:headEnd type="none" w="med" len="med"/>
+                      <a:tailEnd type="none" w="med" len="med"/>
+                    </a:lnR>
+                    <a:lnT w="9525" cap="flat" cmpd="sng" algn="ctr">
+                      <a:solidFill>
+                        <a:srgbClr val="D8DAE6"/>
+                      </a:solidFill>
+                      <a:prstDash val="solid"/>
+                      <a:round/>
+                      <a:headEnd type="none" w="med" len="med"/>
+                      <a:tailEnd type="none" w="med" len="med"/>
+                    </a:lnT>
+                    <a:lnB w="9525" cap="flat" cmpd="sng" algn="ctr">
+                      <a:solidFill>
+                        <a:srgbClr val="D8DAE6"/>
+                      </a:solidFill>
+                      <a:prstDash val="solid"/>
+                      <a:round/>
+                      <a:headEnd type="none" w="med" len="med"/>
+                      <a:tailEnd type="none" w="med" len="med"/>
+                    </a:lnB>
+                  </a:tcPr>
+                </a:tc>
+                <a:tc>
+                  <a:txBody>
+                    <a:bodyPr/>
+                    <a:lstStyle/>
+                    <a:p>
+                      <a:pPr marL="0" indent="0">
+                        <a:buNone/>
+                      </a:pPr>
+                      <a:r>
+                        <a:rPr lang="en-US" sz="1200" dirty="0">
+                          <a:solidFill>
+                            <a:srgbClr val="33333B"/>
+                          </a:solidFill>
+                          <a:latin typeface="Calibri" pitchFamily="34" charset="0"/>
+                          <a:ea typeface="Calibri" pitchFamily="34" charset="-122"/>
+                          <a:cs typeface="Calibri" pitchFamily="34" charset="-120"/>
+                        </a:rPr>
+                        <a:t>Mac users build locally from source today</a:t>
+                      </a:r>
+                      <a:endParaRPr lang="en-US" sz="1200" dirty="0">
+                        <a:latin typeface="Calibri" charset="0"/>
+                        <a:ea typeface="Calibri" charset="0"/>
+                        <a:cs typeface="Calibri" charset="0"/>
+                      </a:endParaRPr>
+                    </a:p>
+                  </a:txBody>
+                  <a:tcPr marL="76200" marR="76200" marT="76200" marB="76200" anchor="ctr">
+                    <a:lnL w="9525" cap="flat" cmpd="sng" algn="ctr">
+                      <a:solidFill>
+                        <a:srgbClr val="D8DAE6"/>
+                      </a:solidFill>
+                      <a:prstDash val="solid"/>
+                      <a:round/>
+                      <a:headEnd type="none" w="med" len="med"/>
+                      <a:tailEnd type="none" w="med" len="med"/>
+                    </a:lnL>
+                    <a:lnR w="9525" cap="flat" cmpd="sng" algn="ctr">
+                      <a:solidFill>
+                        <a:srgbClr val="D8DAE6"/>
+                      </a:solidFill>
+                      <a:prstDash val="solid"/>
+                      <a:round/>
+                      <a:headEnd type="none" w="med" len="med"/>
+                      <a:tailEnd type="none" w="med" len="med"/>
+                    </a:lnR>
+                    <a:lnT w="9525" cap="flat" cmpd="sng" algn="ctr">
+                      <a:solidFill>
+                        <a:srgbClr val="D8DAE6"/>
+                      </a:solidFill>
+                      <a:prstDash val="solid"/>
+                      <a:round/>
+                      <a:headEnd type="none" w="med" len="med"/>
+                      <a:tailEnd type="none" w="med" len="med"/>
+                    </a:lnT>
+                    <a:lnB w="9525" cap="flat" cmpd="sng" algn="ctr">
+                      <a:solidFill>
+                        <a:srgbClr val="D8DAE6"/>
+                      </a:solidFill>
+                      <a:prstDash val="solid"/>
+                      <a:round/>
+                      <a:headEnd type="none" w="med" len="med"/>
+                      <a:tailEnd type="none" w="med" len="med"/>
+                    </a:lnB>
+                  </a:tcPr>
+                </a:tc>
+                <a:tc>
+                  <a:txBody>
+                    <a:bodyPr/>
+                    <a:lstStyle/>
+                    <a:p>
+                      <a:pPr marL="0" indent="0">
+                        <a:buNone/>
+                      </a:pPr>
+                      <a:r>
+                        <a:rPr lang="en-US" sz="1200" dirty="0">
+                          <a:solidFill>
+                            <a:srgbClr val="33333B"/>
+                          </a:solidFill>
+                          <a:latin typeface="Calibri" pitchFamily="34" charset="0"/>
+                          <a:ea typeface="Calibri" pitchFamily="34" charset="-122"/>
+                          <a:cs typeface="Calibri" pitchFamily="34" charset="-120"/>
+                        </a:rPr>
+                        <a:t>Needs an Apple Developer account</a:t>
+                      </a:r>
+                      <a:endParaRPr lang="en-US" sz="1200" dirty="0">
+                        <a:latin typeface="Calibri" charset="0"/>
+                        <a:ea typeface="Calibri" charset="0"/>
+                        <a:cs typeface="Calibri" charset="0"/>
+                      </a:endParaRPr>
+                    </a:p>
+                  </a:txBody>
+                  <a:tcPr marL="76200" marR="76200" marT="76200" marB="76200" anchor="ctr">
+                    <a:lnL w="9525" cap="flat" cmpd="sng" algn="ctr">
+                      <a:solidFill>
+                        <a:srgbClr val="D8DAE6"/>
+                      </a:solidFill>
+                      <a:prstDash val="solid"/>
+                      <a:round/>
+                      <a:headEnd type="none" w="med" len="med"/>
+                      <a:tailEnd type="none" w="med" len="med"/>
+                    </a:lnL>
+                    <a:lnR w="9525" cap="flat" cmpd="sng" algn="ctr">
+                      <a:solidFill>
+                        <a:srgbClr val="D8DAE6"/>
+                      </a:solidFill>
+                      <a:prstDash val="solid"/>
+                      <a:round/>
+                      <a:headEnd type="none" w="med" len="med"/>
+                      <a:tailEnd type="none" w="med" len="med"/>
+                    </a:lnR>
+                    <a:lnT w="9525" cap="flat" cmpd="sng" algn="ctr">
+                      <a:solidFill>
+                        <a:srgbClr val="D8DAE6"/>
+                      </a:solidFill>
+                      <a:prstDash val="solid"/>
+                      <a:round/>
+                      <a:headEnd type="none" w="med" len="med"/>
+                      <a:tailEnd type="none" w="med" len="med"/>
+                    </a:lnT>
+                    <a:lnB w="9525" cap="flat" cmpd="sng" algn="ctr">
+                      <a:solidFill>
+                        <a:srgbClr val="D8DAE6"/>
+                      </a:solidFill>
+                      <a:prstDash val="solid"/>
+                      <a:round/>
+                      <a:headEnd type="none" w="med" len="med"/>
+                      <a:tailEnd type="none" w="med" len="med"/>
+                    </a:lnB>
+                  </a:tcPr>
+                </a:tc>
+                <a:extLst>
+                  <a:ext uri="{0D108BD9-81ED-4DB2-BD59-A6C34878D82A}">
+                    <a16:rowId xmlns:a16="http://schemas.microsoft.com/office/drawing/2014/main" val="10004"/>
+                  </a:ext>
+                </a:extLst>
+              </a:tr>
+            </a:tbl>
+          </a:graphicData>
+        </a:graphic>
+      </p:graphicFrame>
+      <p:sp>
+        <p:nvSpPr>
+          <p:cNvPr id="5" name="Shape 2"/>
+          <p:cNvSpPr/>
+          <p:nvPr/>
+        </p:nvSpPr>
+        <p:spPr>
+          <a:xfrm>
+            <a:off x="594360" y="4892040"/>
+            <a:ext cx="10881360" cy="914400"/>
+          </a:xfrm>
+          <a:prstGeom prst="roundRect">
+            <a:avLst>
+              <a:gd name="adj" fmla="val 6000"/>
+            </a:avLst>
+          </a:prstGeom>
+          <a:solidFill>
+            <a:srgbClr val="F4F5F9"/>
+          </a:solidFill>
+          <a:ln w="9525">
+            <a:solidFill>
+              <a:srgbClr val="D8DAE6"/>
+            </a:solidFill>
+            <a:prstDash val="solid"/>
+          </a:ln>
+        </p:spPr>
+      </p:sp>
+      <p:sp>
+        <p:nvSpPr>
+          <p:cNvPr id="6" name="Text 3"/>
+          <p:cNvSpPr txBox="1"/>
+          <p:nvPr/>
+        </p:nvSpPr>
+        <p:spPr>
+          <a:xfrm>
+            <a:off x="960120" y="5120640"/>
+            <a:ext cx="10149840" cy="457200"/>
+          </a:xfrm>
+          <a:prstGeom prst="rect">
+            <a:avLst/>
+          </a:prstGeom>
+          <a:noFill/>
+          <a:ln/>
+        </p:spPr>
+        <p:txBody>
+          <a:bodyPr wrap="square" lIns="0" tIns="0" rIns="0" bIns="0" rtlCol="0" anchor="t"/>
+          <a:lstStyle/>
+          <a:p>
+            <a:pPr marL="0" indent="0">
+              <a:buNone/>
+            </a:pPr>
+            <a:r>
+              <a:rPr lang="en-US" sz="1300" b="1" dirty="0">
+                <a:solidFill>
+                  <a:srgbClr val="000054"/>
+                </a:solidFill>
+                <a:latin typeface="Calibri" pitchFamily="34" charset="0"/>
+                <a:ea typeface="Calibri" pitchFamily="34" charset="-122"/>
+                <a:cs typeface="Calibri" pitchFamily="34" charset="-120"/>
+              </a:rPr>
+              <a:t>Supporting documents in the repository:  SECURITY.md  ·  DEPENDENCIES.md  ·  lib/THIRD-PARTY-NOTICES.txt</a:t>
+            </a:r>
+            <a:endParaRPr lang="en-US" sz="1300" dirty="0"/>
+          </a:p>
+        </p:txBody>
+      </p:sp>
+      <p:pic>
+        <p:nvPicPr>
+          <p:cNvPr id="7" name="Image 0" descr="C:\Users\nguye\AppData\Local\Temp\claude\E--WORK-OFFLINE-apps-Adflow\c4dbe0b3-8f3b-4a26-ba73-6ba5f8057916\scratchpad\brand\rmit-full.png"/>
+          <p:cNvPicPr>
+            <a:picLocks noChangeAspect="1"/>
+          </p:cNvPicPr>
+          <p:nvPr/>
+        </p:nvPicPr>
+        <p:blipFill>
+          <a:blip r:embed="rId3"/>
+          <a:stretch>
+            <a:fillRect/>
+          </a:stretch>
+        </p:blipFill>
+        <p:spPr>
+          <a:xfrm>
+            <a:off x="594360" y="6272784"/>
+            <a:ext cx="841248" cy="292033"/>
+          </a:xfrm>
+          <a:prstGeom prst="rect">
+            <a:avLst/>
+          </a:prstGeom>
+        </p:spPr>
+      </p:pic>
+      <p:sp>
+        <p:nvSpPr>
+          <p:cNvPr id="8" name="Text 4"/>
+          <p:cNvSpPr txBox="1"/>
+          <p:nvPr/>
+        </p:nvSpPr>
+        <p:spPr>
+          <a:xfrm>
+            <a:off x="1572768" y="6309360"/>
+            <a:ext cx="6400800" cy="256032"/>
+          </a:xfrm>
+          <a:prstGeom prst="rect">
+            <a:avLst/>
+          </a:prstGeom>
+          <a:noFill/>
+          <a:ln/>
+        </p:spPr>
+        <p:txBody>
+          <a:bodyPr wrap="square" lIns="0" tIns="0" rIns="0" bIns="0" rtlCol="0" anchor="ctr"/>
+          <a:lstStyle/>
+          <a:p>
+            <a:pPr marL="0" indent="0">
+              <a:buNone/>
+            </a:pPr>
+            <a:r>
+              <a:rPr lang="en-US" sz="900" dirty="0">
+                <a:solidFill>
+                  <a:srgbClr val="9C9FB4"/>
+                </a:solidFill>
+                <a:latin typeface="Calibri" pitchFamily="34" charset="0"/>
+                <a:ea typeface="Calibri" pitchFamily="34" charset="-122"/>
+                <a:cs typeface="Calibri" pitchFamily="34" charset="-120"/>
+              </a:rPr>
+              <a:t>Adflow  ·  v0.61.1  ·  ITS review</a:t>
+            </a:r>
+            <a:endParaRPr lang="en-US" sz="900" dirty="0"/>
+          </a:p>
+        </p:txBody>
+      </p:sp>
+      <p:sp>
+        <p:nvSpPr>
+          <p:cNvPr id="9" name="Text 5"/>
+          <p:cNvSpPr txBox="1"/>
+          <p:nvPr/>
+        </p:nvSpPr>
+        <p:spPr>
+          <a:xfrm>
+            <a:off x="11064240" y="6309360"/>
+            <a:ext cx="502920" cy="256032"/>
+          </a:xfrm>
+          <a:prstGeom prst="rect">
+            <a:avLst/>
+          </a:prstGeom>
+          <a:noFill/>
+          <a:ln/>
+        </p:spPr>
+        <p:txBody>
+          <a:bodyPr wrap="square" lIns="0" tIns="0" rIns="0" bIns="0" rtlCol="0" anchor="ctr"/>
+          <a:lstStyle/>
+          <a:p>
+            <a:pPr marL="0" indent="0" algn="r">
+              <a:buNone/>
+            </a:pPr>
+            <a:r>
+              <a:rPr lang="en-US" sz="900" dirty="0">
+                <a:solidFill>
+                  <a:srgbClr val="9C9FB4"/>
                 </a:solidFill>
                 <a:latin typeface="Calibri" pitchFamily="34" charset="0"/>
                 <a:ea typeface="Calibri" pitchFamily="34" charset="-122"/>
@@ -12426,4 +11830,299 @@
     </a:ext>
   </a:extLst>
 </a:theme>
+</file>
+
+<file path=ppt/theme/theme2.xml><?xml version="1.0" encoding="utf-8"?>
+<a:theme xmlns:a="http://schemas.openxmlformats.org/drawingml/2006/main" name="Office Theme">
+  <a:themeElements>
+    <a:clrScheme name="Office">
+      <a:dk1>
+        <a:sysClr val="windowText" lastClr="000000"/>
+      </a:dk1>
+      <a:lt1>
+        <a:sysClr val="window" lastClr="FFFFFF"/>
+      </a:lt1>
+      <a:dk2>
+        <a:srgbClr val="44546A"/>
+      </a:dk2>
+      <a:lt2>
+        <a:srgbClr val="E7E6E6"/>
+      </a:lt2>
+      <a:accent1>
+        <a:srgbClr val="4472C4"/>
+      </a:accent1>
+      <a:accent2>
+        <a:srgbClr val="ED7D31"/>
+      </a:accent2>
+      <a:accent3>
+        <a:srgbClr val="A5A5A5"/>
+      </a:accent3>
+      <a:accent4>
+        <a:srgbClr val="FFC000"/>
+      </a:accent4>
+      <a:accent5>
+        <a:srgbClr val="5B9BD5"/>
+      </a:accent5>
+      <a:accent6>
+        <a:srgbClr val="70AD47"/>
+      </a:accent6>
+      <a:hlink>
+        <a:srgbClr val="0563C1"/>
+      </a:hlink>
+      <a:folHlink>
+        <a:srgbClr val="954F72"/>
+      </a:folHlink>
+    </a:clrScheme>
+    <a:fontScheme name="Office">
+      <a:majorFont>
+        <a:latin typeface="Calibri Light" panose="020F0302020204030204"/>
+        <a:ea typeface=""/>
+        <a:cs typeface=""/>
+        <a:font script="Jpan" typeface="游ゴシック Light"/>
+        <a:font script="Hang" typeface="맑은 고딕"/>
+        <a:font script="Hans" typeface="等线 Light"/>
+        <a:font script="Hant" typeface="新細明體"/>
+        <a:font script="Arab" typeface="Times New Roman"/>
+        <a:font script="Hebr" typeface="Times New Roman"/>
+        <a:font script="Thai" typeface="Angsana New"/>
+        <a:font script="Ethi" typeface="Nyala"/>
+        <a:font script="Beng" typeface="Vrinda"/>
+        <a:font script="Gujr" typeface="Shruti"/>
+        <a:font script="Khmr" typeface="MoolBoran"/>
+        <a:font script="Knda" typeface="Tunga"/>
+        <a:font script="Guru" typeface="Raavi"/>
+        <a:font script="Cans" typeface="Euphemia"/>
+        <a:font script="Cher" typeface="Plantagenet Cherokee"/>
+        <a:font script="Yiii" typeface="Microsoft Yi Baiti"/>
+        <a:font script="Tibt" typeface="Microsoft Himalaya"/>
+        <a:font script="Thaa" typeface="MV Boli"/>
+        <a:font script="Deva" typeface="Mangal"/>
+        <a:font script="Telu" typeface="Gautami"/>
+        <a:font script="Taml" typeface="Latha"/>
+        <a:font script="Syrc" typeface="Estrangelo Edessa"/>
+        <a:font script="Orya" typeface="Kalinga"/>
+        <a:font script="Mlym" typeface="Kartika"/>
+        <a:font script="Laoo" typeface="DokChampa"/>
+        <a:font script="Sinh" typeface="Iskoola Pota"/>
+        <a:font script="Mong" typeface="Mongolian Baiti"/>
+        <a:font script="Viet" typeface="Times New Roman"/>
+        <a:font script="Uigh" typeface="Microsoft Uighur"/>
+        <a:font script="Geor" typeface="Sylfaen"/>
+        <a:font script="Armn" typeface="Arial"/>
+        <a:font script="Bugi" typeface="Leelawadee UI"/>
+        <a:font script="Bopo" typeface="Microsoft JhengHei"/>
+        <a:font script="Java" typeface="Javanese Text"/>
+        <a:font script="Lisu" typeface="Segoe UI"/>
+        <a:font script="Mymr" typeface="Myanmar Text"/>
+        <a:font script="Nkoo" typeface="Ebrima"/>
+        <a:font script="Olck" typeface="Nirmala UI"/>
+        <a:font script="Osma" typeface="Ebrima"/>
+        <a:font script="Phag" typeface="Phagspa"/>
+        <a:font script="Syrn" typeface="Estrangelo Edessa"/>
+        <a:font script="Syrj" typeface="Estrangelo Edessa"/>
+        <a:font script="Syre" typeface="Estrangelo Edessa"/>
+        <a:font script="Sora" typeface="Nirmala UI"/>
+        <a:font script="Tale" typeface="Microsoft Tai Le"/>
+        <a:font script="Talu" typeface="Microsoft New Tai Lue"/>
+        <a:font script="Tfng" typeface="Ebrima"/>
+      </a:majorFont>
+      <a:minorFont>
+        <a:latin typeface="Calibri" panose="020F0502020204030204"/>
+        <a:ea typeface=""/>
+        <a:cs typeface=""/>
+        <a:font script="Jpan" typeface="游ゴシック"/>
+        <a:font script="Hang" typeface="맑은 고딕"/>
+        <a:font script="Hans" typeface="等线"/>
+        <a:font script="Hant" typeface="新細明體"/>
+        <a:font script="Arab" typeface="Arial"/>
+        <a:font script="Hebr" typeface="Arial"/>
+        <a:font script="Thai" typeface="Cordia New"/>
+        <a:font script="Ethi" typeface="Nyala"/>
+        <a:font script="Beng" typeface="Vrinda"/>
+        <a:font script="Gujr" typeface="Shruti"/>
+        <a:font script="Khmr" typeface="DaunPenh"/>
+        <a:font script="Knda" typeface="Tunga"/>
+        <a:font script="Guru" typeface="Raavi"/>
+        <a:font script="Cans" typeface="Euphemia"/>
+        <a:font script="Cher" typeface="Plantagenet Cherokee"/>
+        <a:font script="Yiii" typeface="Microsoft Yi Baiti"/>
+        <a:font script="Tibt" typeface="Microsoft Himalaya"/>
+        <a:font script="Thaa" typeface="MV Boli"/>
+        <a:font script="Deva" typeface="Mangal"/>
+        <a:font script="Telu" typeface="Gautami"/>
+        <a:font script="Taml" typeface="Latha"/>
+        <a:font script="Syrc" typeface="Estrangelo Edessa"/>
+        <a:font script="Orya" typeface="Kalinga"/>
+        <a:font script="Mlym" typeface="Kartika"/>
+        <a:font script="Laoo" typeface="DokChampa"/>
+        <a:font script="Sinh" typeface="Iskoola Pota"/>
+        <a:font script="Mong" typeface="Mongolian Baiti"/>
+        <a:font script="Viet" typeface="Arial"/>
+        <a:font script="Uigh" typeface="Microsoft Uighur"/>
+        <a:font script="Geor" typeface="Sylfaen"/>
+        <a:font script="Armn" typeface="Arial"/>
+        <a:font script="Bugi" typeface="Leelawadee UI"/>
+        <a:font script="Bopo" typeface="Microsoft JhengHei"/>
+        <a:font script="Java" typeface="Javanese Text"/>
+        <a:font script="Lisu" typeface="Segoe UI"/>
+        <a:font script="Mymr" typeface="Myanmar Text"/>
+        <a:font script="Nkoo" typeface="Ebrima"/>
+        <a:font script="Olck" typeface="Nirmala UI"/>
+        <a:font script="Osma" typeface="Ebrima"/>
+        <a:font script="Phag" typeface="Phagspa"/>
+        <a:font script="Syrn" typeface="Estrangelo Edessa"/>
+        <a:font script="Syrj" typeface="Estrangelo Edessa"/>
+        <a:font script="Syre" typeface="Estrangelo Edessa"/>
+        <a:font script="Sora" typeface="Nirmala UI"/>
+        <a:font script="Tale" typeface="Microsoft Tai Le"/>
+        <a:font script="Talu" typeface="Microsoft New Tai Lue"/>
+        <a:font script="Tfng" typeface="Ebrima"/>
+      </a:minorFont>
+    </a:fontScheme>
+    <a:fmtScheme name="Office">
+      <a:fillStyleLst>
+        <a:solidFill>
+          <a:schemeClr val="phClr"/>
+        </a:solidFill>
+        <a:gradFill rotWithShape="1">
+          <a:gsLst>
+            <a:gs pos="0">
+              <a:schemeClr val="phClr">
+                <a:lumMod val="110000"/>
+                <a:satMod val="105000"/>
+                <a:tint val="67000"/>
+              </a:schemeClr>
+            </a:gs>
+            <a:gs pos="50000">
+              <a:schemeClr val="phClr">
+                <a:lumMod val="105000"/>
+                <a:satMod val="103000"/>
+                <a:tint val="73000"/>
+              </a:schemeClr>
+            </a:gs>
+            <a:gs pos="100000">
+              <a:schemeClr val="phClr">
+                <a:lumMod val="105000"/>
+                <a:satMod val="109000"/>
+                <a:tint val="81000"/>
+              </a:schemeClr>
+            </a:gs>
+          </a:gsLst>
+          <a:lin ang="5400000" scaled="0"/>
+        </a:gradFill>
+        <a:gradFill rotWithShape="1">
+          <a:gsLst>
+            <a:gs pos="0">
+              <a:schemeClr val="phClr">
+                <a:satMod val="103000"/>
+                <a:lumMod val="102000"/>
+                <a:tint val="94000"/>
+              </a:schemeClr>
+            </a:gs>
+            <a:gs pos="50000">
+              <a:schemeClr val="phClr">
+                <a:satMod val="110000"/>
+                <a:lumMod val="100000"/>
+                <a:shade val="100000"/>
+              </a:schemeClr>
+            </a:gs>
+            <a:gs pos="100000">
+              <a:schemeClr val="phClr">
+                <a:lumMod val="99000"/>
+                <a:satMod val="120000"/>
+                <a:shade val="78000"/>
+              </a:schemeClr>
+            </a:gs>
+          </a:gsLst>
+          <a:lin ang="5400000" scaled="0"/>
+        </a:gradFill>
+      </a:fillStyleLst>
+      <a:lnStyleLst>
+        <a:ln w="6350" cap="flat" cmpd="sng" algn="ctr">
+          <a:solidFill>
+            <a:schemeClr val="phClr"/>
+          </a:solidFill>
+          <a:prstDash val="solid"/>
+          <a:miter lim="800000"/>
+        </a:ln>
+        <a:ln w="12700" cap="flat" cmpd="sng" algn="ctr">
+          <a:solidFill>
+            <a:schemeClr val="phClr"/>
+          </a:solidFill>
+          <a:prstDash val="solid"/>
+          <a:miter lim="800000"/>
+        </a:ln>
+        <a:ln w="19050" cap="flat" cmpd="sng" algn="ctr">
+          <a:solidFill>
+            <a:schemeClr val="phClr"/>
+          </a:solidFill>
+          <a:prstDash val="solid"/>
+          <a:miter lim="800000"/>
+        </a:ln>
+      </a:lnStyleLst>
+      <a:effectStyleLst>
+        <a:effectStyle>
+          <a:effectLst/>
+        </a:effectStyle>
+        <a:effectStyle>
+          <a:effectLst/>
+        </a:effectStyle>
+        <a:effectStyle>
+          <a:effectLst>
+            <a:outerShdw blurRad="57150" dist="19050" dir="5400000" algn="ctr" rotWithShape="0">
+              <a:srgbClr val="000000">
+                <a:alpha val="63000"/>
+              </a:srgbClr>
+            </a:outerShdw>
+          </a:effectLst>
+        </a:effectStyle>
+      </a:effectStyleLst>
+      <a:bgFillStyleLst>
+        <a:solidFill>
+          <a:schemeClr val="phClr"/>
+        </a:solidFill>
+        <a:solidFill>
+          <a:schemeClr val="phClr">
+            <a:tint val="95000"/>
+            <a:satMod val="170000"/>
+          </a:schemeClr>
+        </a:solidFill>
+        <a:gradFill rotWithShape="1">
+          <a:gsLst>
+            <a:gs pos="0">
+              <a:schemeClr val="phClr">
+                <a:tint val="93000"/>
+                <a:satMod val="150000"/>
+                <a:shade val="98000"/>
+                <a:lumMod val="102000"/>
+              </a:schemeClr>
+            </a:gs>
+            <a:gs pos="50000">
+              <a:schemeClr val="phClr">
+                <a:tint val="98000"/>
+                <a:satMod val="130000"/>
+                <a:shade val="90000"/>
+                <a:lumMod val="103000"/>
+              </a:schemeClr>
+            </a:gs>
+            <a:gs pos="100000">
+              <a:schemeClr val="phClr">
+                <a:shade val="63000"/>
+                <a:satMod val="120000"/>
+              </a:schemeClr>
+            </a:gs>
+          </a:gsLst>
+          <a:lin ang="5400000" scaled="0"/>
+        </a:gradFill>
+      </a:bgFillStyleLst>
+    </a:fmtScheme>
+  </a:themeElements>
+  <a:objectDefaults/>
+  <a:extraClrSchemeLst/>
+  <a:extLst>
+    <a:ext uri="{05A4C25C-085E-4340-85A3-A5531E510DB2}">
+      <thm15:themeFamily xmlns:thm15="http://schemas.microsoft.com/office/thememl/2012/main" name="Office Theme" id="{62F939B6-93AF-4DB8-9C6B-D6C7DFDC589F}" vid="{4A3C46E8-61CC-4603-A589-7422A47A8E4A}"/>
+    </a:ext>
+  </a:extLst>
+</a:theme>
 </file>